--- a/Наработки/диздоки/ЮАС/ЮАС общая.pptx
+++ b/Наработки/диздоки/ЮАС/ЮАС общая.pptx
@@ -209,7 +209,7 @@
             <a:fld id="{33E3D7F9-E251-484C-A6FF-FA958879DF69}" type="datetimeFigureOut">
               <a:rPr lang="ru-RU" smtClean="0"/>
               <a:pPr/>
-              <a:t>11.12.2025</a:t>
+              <a:t>22.01.2026</a:t>
             </a:fld>
             <a:endParaRPr lang="ru-RU"/>
           </a:p>
@@ -699,7 +699,7 @@
             <a:fld id="{85A5DE44-605B-4D3B-B2B7-94543DF81A36}" type="datetimeFigureOut">
               <a:rPr lang="ru-RU" smtClean="0"/>
               <a:pPr/>
-              <a:t>11.12.2025</a:t>
+              <a:t>22.01.2026</a:t>
             </a:fld>
             <a:endParaRPr lang="ru-RU"/>
           </a:p>
@@ -871,7 +871,7 @@
             <a:fld id="{85A5DE44-605B-4D3B-B2B7-94543DF81A36}" type="datetimeFigureOut">
               <a:rPr lang="ru-RU" smtClean="0"/>
               <a:pPr/>
-              <a:t>11.12.2025</a:t>
+              <a:t>22.01.2026</a:t>
             </a:fld>
             <a:endParaRPr lang="ru-RU"/>
           </a:p>
@@ -1053,7 +1053,7 @@
             <a:fld id="{85A5DE44-605B-4D3B-B2B7-94543DF81A36}" type="datetimeFigureOut">
               <a:rPr lang="ru-RU" smtClean="0"/>
               <a:pPr/>
-              <a:t>11.12.2025</a:t>
+              <a:t>22.01.2026</a:t>
             </a:fld>
             <a:endParaRPr lang="ru-RU"/>
           </a:p>
@@ -1225,7 +1225,7 @@
             <a:fld id="{85A5DE44-605B-4D3B-B2B7-94543DF81A36}" type="datetimeFigureOut">
               <a:rPr lang="ru-RU" smtClean="0"/>
               <a:pPr/>
-              <a:t>11.12.2025</a:t>
+              <a:t>22.01.2026</a:t>
             </a:fld>
             <a:endParaRPr lang="ru-RU"/>
           </a:p>
@@ -1473,7 +1473,7 @@
             <a:fld id="{85A5DE44-605B-4D3B-B2B7-94543DF81A36}" type="datetimeFigureOut">
               <a:rPr lang="ru-RU" smtClean="0"/>
               <a:pPr/>
-              <a:t>11.12.2025</a:t>
+              <a:t>22.01.2026</a:t>
             </a:fld>
             <a:endParaRPr lang="ru-RU"/>
           </a:p>
@@ -1707,7 +1707,7 @@
             <a:fld id="{85A5DE44-605B-4D3B-B2B7-94543DF81A36}" type="datetimeFigureOut">
               <a:rPr lang="ru-RU" smtClean="0"/>
               <a:pPr/>
-              <a:t>11.12.2025</a:t>
+              <a:t>22.01.2026</a:t>
             </a:fld>
             <a:endParaRPr lang="ru-RU"/>
           </a:p>
@@ -2076,7 +2076,7 @@
             <a:fld id="{85A5DE44-605B-4D3B-B2B7-94543DF81A36}" type="datetimeFigureOut">
               <a:rPr lang="ru-RU" smtClean="0"/>
               <a:pPr/>
-              <a:t>11.12.2025</a:t>
+              <a:t>22.01.2026</a:t>
             </a:fld>
             <a:endParaRPr lang="ru-RU"/>
           </a:p>
@@ -2196,7 +2196,7 @@
             <a:fld id="{85A5DE44-605B-4D3B-B2B7-94543DF81A36}" type="datetimeFigureOut">
               <a:rPr lang="ru-RU" smtClean="0"/>
               <a:pPr/>
-              <a:t>11.12.2025</a:t>
+              <a:t>22.01.2026</a:t>
             </a:fld>
             <a:endParaRPr lang="ru-RU"/>
           </a:p>
@@ -2293,7 +2293,7 @@
             <a:fld id="{85A5DE44-605B-4D3B-B2B7-94543DF81A36}" type="datetimeFigureOut">
               <a:rPr lang="ru-RU" smtClean="0"/>
               <a:pPr/>
-              <a:t>11.12.2025</a:t>
+              <a:t>22.01.2026</a:t>
             </a:fld>
             <a:endParaRPr lang="ru-RU"/>
           </a:p>
@@ -2572,7 +2572,7 @@
             <a:fld id="{85A5DE44-605B-4D3B-B2B7-94543DF81A36}" type="datetimeFigureOut">
               <a:rPr lang="ru-RU" smtClean="0"/>
               <a:pPr/>
-              <a:t>11.12.2025</a:t>
+              <a:t>22.01.2026</a:t>
             </a:fld>
             <a:endParaRPr lang="ru-RU"/>
           </a:p>
@@ -2831,7 +2831,7 @@
             <a:fld id="{85A5DE44-605B-4D3B-B2B7-94543DF81A36}" type="datetimeFigureOut">
               <a:rPr lang="ru-RU" smtClean="0"/>
               <a:pPr/>
-              <a:t>11.12.2025</a:t>
+              <a:t>22.01.2026</a:t>
             </a:fld>
             <a:endParaRPr lang="ru-RU"/>
           </a:p>
@@ -3046,7 +3046,7 @@
             <a:fld id="{85A5DE44-605B-4D3B-B2B7-94543DF81A36}" type="datetimeFigureOut">
               <a:rPr lang="ru-RU" smtClean="0"/>
               <a:pPr/>
-              <a:t>11.12.2025</a:t>
+              <a:t>22.01.2026</a:t>
             </a:fld>
             <a:endParaRPr lang="ru-RU"/>
           </a:p>
@@ -20416,7 +20416,7 @@
             <a:pPr algn="ctr"/>
             <a:r>
               <a:rPr lang="ru-RU" sz="1100" dirty="0"/>
-              <a:t>Возобновить связи с Британской империей</a:t>
+              <a:t>Возобновить связи с Нидерландами</a:t>
             </a:r>
           </a:p>
         </p:txBody>
@@ -20631,27 +20631,7 @@
             <a:pPr algn="ctr"/>
             <a:r>
               <a:rPr lang="ru-RU" sz="1100" dirty="0"/>
-              <a:t>Ввести </a:t>
-            </a:r>
-            <a:r>
-              <a:rPr lang="ru-RU" sz="1100" dirty="0" err="1"/>
-              <a:t>однопартийность</a:t>
-            </a:r>
-            <a:r>
-              <a:rPr lang="ru-RU" sz="1100" dirty="0"/>
-              <a:t> </a:t>
-            </a:r>
-            <a:r>
-              <a:rPr lang="ru-RU" sz="300" dirty="0"/>
-              <a:t>(Однако однопартийное государство, за которое выступал Ван </a:t>
-            </a:r>
-            <a:r>
-              <a:rPr lang="ru-RU" sz="300" dirty="0" err="1"/>
-              <a:t>Ренсбург</a:t>
-            </a:r>
-            <a:r>
-              <a:rPr lang="ru-RU" sz="300" dirty="0"/>
-              <a:t> , не было принято, а парламентская система — хотя и в пользу националистического правительства — сохранилась.)</a:t>
+              <a:t>Ввести однопартийную систему</a:t>
             </a:r>
             <a:endParaRPr lang="ru-RU" sz="600" dirty="0"/>
           </a:p>
@@ -26078,154 +26058,6 @@
               <a:rPr lang="en-US" sz="1100" dirty="0" err="1"/>
               <a:t>Stormjaers</a:t>
             </a:r>
-            <a:r>
-              <a:rPr lang="en-US" sz="1100" dirty="0"/>
-              <a:t> ( </a:t>
-            </a:r>
-            <a:r>
-              <a:rPr lang="ru-RU" sz="1100" dirty="0"/>
-              <a:t>Охотники за бурями ) </a:t>
-            </a:r>
-            <a:r>
-              <a:rPr lang="ru-RU" sz="200" dirty="0"/>
-              <a:t>(военизированного крыла ОБ. Характер </a:t>
-            </a:r>
-            <a:r>
-              <a:rPr lang="ru-RU" sz="200" dirty="0" err="1"/>
-              <a:t>Stormjaers</a:t>
-            </a:r>
-            <a:r>
-              <a:rPr lang="ru-RU" sz="200" dirty="0"/>
-              <a:t> был подтвержден клятвой, которую приносили новые рекруты: «Если я отступлю, стреляйте в меня. Если я упаду, отомстите за меня. Если я атакую, следуйте за мной» ( африкаанс : </a:t>
-            </a:r>
-            <a:r>
-              <a:rPr lang="ru-RU" sz="200" dirty="0" err="1"/>
-              <a:t>As</a:t>
-            </a:r>
-            <a:r>
-              <a:rPr lang="ru-RU" sz="200" dirty="0"/>
-              <a:t> </a:t>
-            </a:r>
-            <a:r>
-              <a:rPr lang="ru-RU" sz="200" dirty="0" err="1"/>
-              <a:t>ek</a:t>
-            </a:r>
-            <a:r>
-              <a:rPr lang="ru-RU" sz="200" dirty="0"/>
-              <a:t> </a:t>
-            </a:r>
-            <a:r>
-              <a:rPr lang="ru-RU" sz="200" dirty="0" err="1"/>
-              <a:t>omdraai</a:t>
-            </a:r>
-            <a:r>
-              <a:rPr lang="ru-RU" sz="200" dirty="0"/>
-              <a:t>, </a:t>
-            </a:r>
-            <a:r>
-              <a:rPr lang="ru-RU" sz="200" dirty="0" err="1"/>
-              <a:t>skiet</a:t>
-            </a:r>
-            <a:r>
-              <a:rPr lang="ru-RU" sz="200" dirty="0"/>
-              <a:t> </a:t>
-            </a:r>
-            <a:r>
-              <a:rPr lang="ru-RU" sz="200" dirty="0" err="1"/>
-              <a:t>my</a:t>
-            </a:r>
-            <a:r>
-              <a:rPr lang="ru-RU" sz="200" dirty="0"/>
-              <a:t>. </a:t>
-            </a:r>
-            <a:r>
-              <a:rPr lang="ru-RU" sz="200" dirty="0" err="1"/>
-              <a:t>As</a:t>
-            </a:r>
-            <a:r>
-              <a:rPr lang="ru-RU" sz="200" dirty="0"/>
-              <a:t> </a:t>
-            </a:r>
-            <a:r>
-              <a:rPr lang="ru-RU" sz="200" dirty="0" err="1"/>
-              <a:t>ek</a:t>
-            </a:r>
-            <a:r>
-              <a:rPr lang="ru-RU" sz="200" dirty="0"/>
-              <a:t> </a:t>
-            </a:r>
-            <a:r>
-              <a:rPr lang="ru-RU" sz="200" dirty="0" err="1"/>
-              <a:t>val</a:t>
-            </a:r>
-            <a:r>
-              <a:rPr lang="ru-RU" sz="200" dirty="0"/>
-              <a:t>, </a:t>
-            </a:r>
-            <a:r>
-              <a:rPr lang="ru-RU" sz="200" dirty="0" err="1"/>
-              <a:t>wrek</a:t>
-            </a:r>
-            <a:r>
-              <a:rPr lang="ru-RU" sz="200" dirty="0"/>
-              <a:t> </a:t>
-            </a:r>
-            <a:r>
-              <a:rPr lang="ru-RU" sz="200" dirty="0" err="1"/>
-              <a:t>my</a:t>
-            </a:r>
-            <a:r>
-              <a:rPr lang="ru-RU" sz="200" dirty="0"/>
-              <a:t>. </a:t>
-            </a:r>
-            <a:r>
-              <a:rPr lang="ru-RU" sz="200" dirty="0" err="1"/>
-              <a:t>As</a:t>
-            </a:r>
-            <a:r>
-              <a:rPr lang="ru-RU" sz="200" dirty="0"/>
-              <a:t> </a:t>
-            </a:r>
-            <a:r>
-              <a:rPr lang="ru-RU" sz="200" dirty="0" err="1"/>
-              <a:t>ek</a:t>
-            </a:r>
-            <a:r>
-              <a:rPr lang="ru-RU" sz="200" dirty="0"/>
-              <a:t> </a:t>
-            </a:r>
-            <a:r>
-              <a:rPr lang="ru-RU" sz="200" dirty="0" err="1"/>
-              <a:t>storm</a:t>
-            </a:r>
-            <a:r>
-              <a:rPr lang="ru-RU" sz="200" dirty="0"/>
-              <a:t>, </a:t>
-            </a:r>
-            <a:r>
-              <a:rPr lang="ru-RU" sz="200" dirty="0" err="1"/>
-              <a:t>volg</a:t>
-            </a:r>
-            <a:r>
-              <a:rPr lang="ru-RU" sz="200" dirty="0"/>
-              <a:t> </a:t>
-            </a:r>
-            <a:r>
-              <a:rPr lang="ru-RU" sz="200" dirty="0" err="1"/>
-              <a:t>my</a:t>
-            </a:r>
-            <a:r>
-              <a:rPr lang="ru-RU" sz="200" dirty="0"/>
-              <a:t> ). [ 7 ] Этот девиз первоначально приписывается французскому роялисту Анри де ла </a:t>
-            </a:r>
-            <a:r>
-              <a:rPr lang="ru-RU" sz="200" dirty="0" err="1"/>
-              <a:t>Рошжаклену</a:t>
-            </a:r>
-            <a:r>
-              <a:rPr lang="ru-RU" sz="200" dirty="0"/>
-              <a:t> в 1793 году, но также был популярным лозунгом фашистов Бенито Муссолини в 1930-х годах.)</a:t>
-            </a:r>
             <a:endParaRPr lang="ru-RU" sz="600" dirty="0"/>
           </a:p>
         </p:txBody>
@@ -28767,7 +28599,15 @@
             <a:pPr algn="ctr"/>
             <a:r>
               <a:rPr lang="ru-RU" sz="1100" dirty="0"/>
-              <a:t>Отказ от парламента и капитализма</a:t>
+              <a:t>Упор на </a:t>
+            </a:r>
+            <a:r>
+              <a:rPr lang="ru-RU" sz="1100" dirty="0" err="1"/>
+              <a:t>африканерской</a:t>
+            </a:r>
+            <a:r>
+              <a:rPr lang="ru-RU" sz="1100" dirty="0"/>
+              <a:t> нации</a:t>
             </a:r>
             <a:endParaRPr lang="ru-RU" sz="600" dirty="0"/>
           </a:p>

--- a/Наработки/диздоки/ЮАС/ЮАС общая.pptx
+++ b/Наработки/диздоки/ЮАС/ЮАС общая.pptx
@@ -209,7 +209,7 @@
             <a:fld id="{33E3D7F9-E251-484C-A6FF-FA958879DF69}" type="datetimeFigureOut">
               <a:rPr lang="ru-RU" smtClean="0"/>
               <a:pPr/>
-              <a:t>11.12.2025</a:t>
+              <a:t>16.12.2025</a:t>
             </a:fld>
             <a:endParaRPr lang="ru-RU"/>
           </a:p>
@@ -699,7 +699,7 @@
             <a:fld id="{85A5DE44-605B-4D3B-B2B7-94543DF81A36}" type="datetimeFigureOut">
               <a:rPr lang="ru-RU" smtClean="0"/>
               <a:pPr/>
-              <a:t>11.12.2025</a:t>
+              <a:t>16.12.2025</a:t>
             </a:fld>
             <a:endParaRPr lang="ru-RU"/>
           </a:p>
@@ -871,7 +871,7 @@
             <a:fld id="{85A5DE44-605B-4D3B-B2B7-94543DF81A36}" type="datetimeFigureOut">
               <a:rPr lang="ru-RU" smtClean="0"/>
               <a:pPr/>
-              <a:t>11.12.2025</a:t>
+              <a:t>16.12.2025</a:t>
             </a:fld>
             <a:endParaRPr lang="ru-RU"/>
           </a:p>
@@ -1053,7 +1053,7 @@
             <a:fld id="{85A5DE44-605B-4D3B-B2B7-94543DF81A36}" type="datetimeFigureOut">
               <a:rPr lang="ru-RU" smtClean="0"/>
               <a:pPr/>
-              <a:t>11.12.2025</a:t>
+              <a:t>16.12.2025</a:t>
             </a:fld>
             <a:endParaRPr lang="ru-RU"/>
           </a:p>
@@ -1225,7 +1225,7 @@
             <a:fld id="{85A5DE44-605B-4D3B-B2B7-94543DF81A36}" type="datetimeFigureOut">
               <a:rPr lang="ru-RU" smtClean="0"/>
               <a:pPr/>
-              <a:t>11.12.2025</a:t>
+              <a:t>16.12.2025</a:t>
             </a:fld>
             <a:endParaRPr lang="ru-RU"/>
           </a:p>
@@ -1473,7 +1473,7 @@
             <a:fld id="{85A5DE44-605B-4D3B-B2B7-94543DF81A36}" type="datetimeFigureOut">
               <a:rPr lang="ru-RU" smtClean="0"/>
               <a:pPr/>
-              <a:t>11.12.2025</a:t>
+              <a:t>16.12.2025</a:t>
             </a:fld>
             <a:endParaRPr lang="ru-RU"/>
           </a:p>
@@ -1707,7 +1707,7 @@
             <a:fld id="{85A5DE44-605B-4D3B-B2B7-94543DF81A36}" type="datetimeFigureOut">
               <a:rPr lang="ru-RU" smtClean="0"/>
               <a:pPr/>
-              <a:t>11.12.2025</a:t>
+              <a:t>16.12.2025</a:t>
             </a:fld>
             <a:endParaRPr lang="ru-RU"/>
           </a:p>
@@ -2076,7 +2076,7 @@
             <a:fld id="{85A5DE44-605B-4D3B-B2B7-94543DF81A36}" type="datetimeFigureOut">
               <a:rPr lang="ru-RU" smtClean="0"/>
               <a:pPr/>
-              <a:t>11.12.2025</a:t>
+              <a:t>16.12.2025</a:t>
             </a:fld>
             <a:endParaRPr lang="ru-RU"/>
           </a:p>
@@ -2196,7 +2196,7 @@
             <a:fld id="{85A5DE44-605B-4D3B-B2B7-94543DF81A36}" type="datetimeFigureOut">
               <a:rPr lang="ru-RU" smtClean="0"/>
               <a:pPr/>
-              <a:t>11.12.2025</a:t>
+              <a:t>16.12.2025</a:t>
             </a:fld>
             <a:endParaRPr lang="ru-RU"/>
           </a:p>
@@ -2293,7 +2293,7 @@
             <a:fld id="{85A5DE44-605B-4D3B-B2B7-94543DF81A36}" type="datetimeFigureOut">
               <a:rPr lang="ru-RU" smtClean="0"/>
               <a:pPr/>
-              <a:t>11.12.2025</a:t>
+              <a:t>16.12.2025</a:t>
             </a:fld>
             <a:endParaRPr lang="ru-RU"/>
           </a:p>
@@ -2572,7 +2572,7 @@
             <a:fld id="{85A5DE44-605B-4D3B-B2B7-94543DF81A36}" type="datetimeFigureOut">
               <a:rPr lang="ru-RU" smtClean="0"/>
               <a:pPr/>
-              <a:t>11.12.2025</a:t>
+              <a:t>16.12.2025</a:t>
             </a:fld>
             <a:endParaRPr lang="ru-RU"/>
           </a:p>
@@ -2831,7 +2831,7 @@
             <a:fld id="{85A5DE44-605B-4D3B-B2B7-94543DF81A36}" type="datetimeFigureOut">
               <a:rPr lang="ru-RU" smtClean="0"/>
               <a:pPr/>
-              <a:t>11.12.2025</a:t>
+              <a:t>16.12.2025</a:t>
             </a:fld>
             <a:endParaRPr lang="ru-RU"/>
           </a:p>
@@ -3046,7 +3046,7 @@
             <a:fld id="{85A5DE44-605B-4D3B-B2B7-94543DF81A36}" type="datetimeFigureOut">
               <a:rPr lang="ru-RU" smtClean="0"/>
               <a:pPr/>
-              <a:t>11.12.2025</a:t>
+              <a:t>16.12.2025</a:t>
             </a:fld>
             <a:endParaRPr lang="ru-RU"/>
           </a:p>

--- a/Наработки/диздоки/ЮАС/ЮАС общая.pptx
+++ b/Наработки/диздоки/ЮАС/ЮАС общая.pptx
@@ -209,7 +209,7 @@
             <a:fld id="{33E3D7F9-E251-484C-A6FF-FA958879DF69}" type="datetimeFigureOut">
               <a:rPr lang="ru-RU" smtClean="0"/>
               <a:pPr/>
-              <a:t>22.01.2026</a:t>
+              <a:t>29.01.2026</a:t>
             </a:fld>
             <a:endParaRPr lang="ru-RU"/>
           </a:p>
@@ -699,7 +699,7 @@
             <a:fld id="{85A5DE44-605B-4D3B-B2B7-94543DF81A36}" type="datetimeFigureOut">
               <a:rPr lang="ru-RU" smtClean="0"/>
               <a:pPr/>
-              <a:t>22.01.2026</a:t>
+              <a:t>29.01.2026</a:t>
             </a:fld>
             <a:endParaRPr lang="ru-RU"/>
           </a:p>
@@ -871,7 +871,7 @@
             <a:fld id="{85A5DE44-605B-4D3B-B2B7-94543DF81A36}" type="datetimeFigureOut">
               <a:rPr lang="ru-RU" smtClean="0"/>
               <a:pPr/>
-              <a:t>22.01.2026</a:t>
+              <a:t>29.01.2026</a:t>
             </a:fld>
             <a:endParaRPr lang="ru-RU"/>
           </a:p>
@@ -1053,7 +1053,7 @@
             <a:fld id="{85A5DE44-605B-4D3B-B2B7-94543DF81A36}" type="datetimeFigureOut">
               <a:rPr lang="ru-RU" smtClean="0"/>
               <a:pPr/>
-              <a:t>22.01.2026</a:t>
+              <a:t>29.01.2026</a:t>
             </a:fld>
             <a:endParaRPr lang="ru-RU"/>
           </a:p>
@@ -1225,7 +1225,7 @@
             <a:fld id="{85A5DE44-605B-4D3B-B2B7-94543DF81A36}" type="datetimeFigureOut">
               <a:rPr lang="ru-RU" smtClean="0"/>
               <a:pPr/>
-              <a:t>22.01.2026</a:t>
+              <a:t>29.01.2026</a:t>
             </a:fld>
             <a:endParaRPr lang="ru-RU"/>
           </a:p>
@@ -1473,7 +1473,7 @@
             <a:fld id="{85A5DE44-605B-4D3B-B2B7-94543DF81A36}" type="datetimeFigureOut">
               <a:rPr lang="ru-RU" smtClean="0"/>
               <a:pPr/>
-              <a:t>22.01.2026</a:t>
+              <a:t>29.01.2026</a:t>
             </a:fld>
             <a:endParaRPr lang="ru-RU"/>
           </a:p>
@@ -1707,7 +1707,7 @@
             <a:fld id="{85A5DE44-605B-4D3B-B2B7-94543DF81A36}" type="datetimeFigureOut">
               <a:rPr lang="ru-RU" smtClean="0"/>
               <a:pPr/>
-              <a:t>22.01.2026</a:t>
+              <a:t>29.01.2026</a:t>
             </a:fld>
             <a:endParaRPr lang="ru-RU"/>
           </a:p>
@@ -2076,7 +2076,7 @@
             <a:fld id="{85A5DE44-605B-4D3B-B2B7-94543DF81A36}" type="datetimeFigureOut">
               <a:rPr lang="ru-RU" smtClean="0"/>
               <a:pPr/>
-              <a:t>22.01.2026</a:t>
+              <a:t>29.01.2026</a:t>
             </a:fld>
             <a:endParaRPr lang="ru-RU"/>
           </a:p>
@@ -2196,7 +2196,7 @@
             <a:fld id="{85A5DE44-605B-4D3B-B2B7-94543DF81A36}" type="datetimeFigureOut">
               <a:rPr lang="ru-RU" smtClean="0"/>
               <a:pPr/>
-              <a:t>22.01.2026</a:t>
+              <a:t>29.01.2026</a:t>
             </a:fld>
             <a:endParaRPr lang="ru-RU"/>
           </a:p>
@@ -2293,7 +2293,7 @@
             <a:fld id="{85A5DE44-605B-4D3B-B2B7-94543DF81A36}" type="datetimeFigureOut">
               <a:rPr lang="ru-RU" smtClean="0"/>
               <a:pPr/>
-              <a:t>22.01.2026</a:t>
+              <a:t>29.01.2026</a:t>
             </a:fld>
             <a:endParaRPr lang="ru-RU"/>
           </a:p>
@@ -2572,7 +2572,7 @@
             <a:fld id="{85A5DE44-605B-4D3B-B2B7-94543DF81A36}" type="datetimeFigureOut">
               <a:rPr lang="ru-RU" smtClean="0"/>
               <a:pPr/>
-              <a:t>22.01.2026</a:t>
+              <a:t>29.01.2026</a:t>
             </a:fld>
             <a:endParaRPr lang="ru-RU"/>
           </a:p>
@@ -2831,7 +2831,7 @@
             <a:fld id="{85A5DE44-605B-4D3B-B2B7-94543DF81A36}" type="datetimeFigureOut">
               <a:rPr lang="ru-RU" smtClean="0"/>
               <a:pPr/>
-              <a:t>22.01.2026</a:t>
+              <a:t>29.01.2026</a:t>
             </a:fld>
             <a:endParaRPr lang="ru-RU"/>
           </a:p>
@@ -3046,7 +3046,7 @@
             <a:fld id="{85A5DE44-605B-4D3B-B2B7-94543DF81A36}" type="datetimeFigureOut">
               <a:rPr lang="ru-RU" smtClean="0"/>
               <a:pPr/>
-              <a:t>22.01.2026</a:t>
+              <a:t>29.01.2026</a:t>
             </a:fld>
             <a:endParaRPr lang="ru-RU"/>
           </a:p>
@@ -20105,106 +20105,6 @@
           </a:p>
         </p:txBody>
       </p:sp>
-      <p:sp>
-        <p:nvSpPr>
-          <p:cNvPr id="1479" name="Прямоугольник 1478">
-            <a:extLst>
-              <a:ext uri="{FF2B5EF4-FFF2-40B4-BE49-F238E27FC236}">
-                <a16:creationId xmlns:a16="http://schemas.microsoft.com/office/drawing/2014/main" id="{214BF47C-6A41-4957-8473-E730ED14F329}"/>
-              </a:ext>
-            </a:extLst>
-          </p:cNvPr>
-          <p:cNvSpPr/>
-          <p:nvPr/>
-        </p:nvSpPr>
-        <p:spPr>
-          <a:xfrm>
-            <a:off x="4647883" y="1551449"/>
-            <a:ext cx="1156124" cy="645064"/>
-          </a:xfrm>
-          <a:prstGeom prst="rect">
-            <a:avLst/>
-          </a:prstGeom>
-          <a:solidFill>
-            <a:schemeClr val="accent2"/>
-          </a:solidFill>
-          <a:ln w="28575"/>
-        </p:spPr>
-        <p:style>
-          <a:lnRef idx="2">
-            <a:schemeClr val="accent1"/>
-          </a:lnRef>
-          <a:fillRef idx="1">
-            <a:schemeClr val="lt1"/>
-          </a:fillRef>
-          <a:effectRef idx="0">
-            <a:schemeClr val="accent1"/>
-          </a:effectRef>
-          <a:fontRef idx="minor">
-            <a:schemeClr val="dk1"/>
-          </a:fontRef>
-        </p:style>
-        <p:txBody>
-          <a:bodyPr lIns="124733" tIns="62367" rIns="124733" bIns="62367" rtlCol="0" anchor="ctr"/>
-          <a:lstStyle/>
-          <a:p>
-            <a:pPr algn="ctr"/>
-            <a:r>
-              <a:rPr lang="ru-RU" sz="1100" dirty="0"/>
-              <a:t>Вооружённые отряды </a:t>
-            </a:r>
-            <a:r>
-              <a:rPr lang="ru-RU" sz="1100" dirty="0" err="1"/>
-              <a:t>серорубашечников</a:t>
-            </a:r>
-            <a:r>
-              <a:rPr lang="ru-RU" sz="1100" dirty="0"/>
-              <a:t> </a:t>
-            </a:r>
-            <a:r>
-              <a:rPr lang="ru-RU" sz="300" dirty="0"/>
-              <a:t>(</a:t>
-            </a:r>
-            <a:r>
-              <a:rPr lang="ru-RU" sz="300" dirty="0" err="1"/>
-              <a:t>кирино</a:t>
-            </a:r>
-            <a:r>
-              <a:rPr lang="en-US" sz="300" dirty="0"/>
-              <a:t>: </a:t>
-            </a:r>
-            <a:r>
-              <a:rPr lang="ru-RU" sz="300" dirty="0"/>
-              <a:t>НД -20% время подготовки, </a:t>
-            </a:r>
-            <a:r>
-              <a:rPr lang="ru-RU" sz="300" dirty="0" err="1"/>
-              <a:t>орагнизация</a:t>
-            </a:r>
-            <a:r>
-              <a:rPr lang="ru-RU" sz="300" dirty="0"/>
-              <a:t> +8%, </a:t>
-            </a:r>
-            <a:r>
-              <a:rPr lang="ru-RU" sz="300" dirty="0" err="1"/>
-              <a:t>военка</a:t>
-            </a:r>
-            <a:r>
-              <a:rPr lang="ru-RU" sz="300" dirty="0"/>
-              <a:t> +1%, решение на </a:t>
-            </a:r>
-            <a:r>
-              <a:rPr lang="ru-RU" sz="300" dirty="0" err="1"/>
-              <a:t>дивки</a:t>
-            </a:r>
-            <a:r>
-              <a:rPr lang="ru-RU" sz="300" dirty="0"/>
-              <a:t> рубашек)</a:t>
-            </a:r>
-            <a:endParaRPr lang="ru-RU" sz="600" dirty="0"/>
-          </a:p>
-        </p:txBody>
-      </p:sp>
       <p:cxnSp>
         <p:nvCxnSpPr>
           <p:cNvPr id="1480" name="Прямая соединительная линия 1479">
@@ -20467,11 +20367,7 @@
             <a:pPr algn="ctr"/>
             <a:r>
               <a:rPr lang="ru-RU" sz="1100" dirty="0"/>
-              <a:t>Принять спонсирование от НДСАП </a:t>
-            </a:r>
-            <a:r>
-              <a:rPr lang="ru-RU" sz="300" dirty="0"/>
-              <a:t>(Южноафриканское нееврейское национал-социалистическое движение финансировалось НСДАП/АО и получило поддержку среди молодых немцев, южноафриканцев и буров)</a:t>
+              <a:t>Принять спонсирование от НДСАП</a:t>
             </a:r>
             <a:endParaRPr lang="ru-RU" sz="600" dirty="0"/>
           </a:p>
@@ -20599,7 +20495,7 @@
         </p:nvSpPr>
         <p:spPr>
           <a:xfrm>
-            <a:off x="3079876" y="1551449"/>
+            <a:off x="3868465" y="1563515"/>
             <a:ext cx="1156124" cy="645064"/>
           </a:xfrm>
           <a:prstGeom prst="rect">
@@ -20703,7 +20599,7 @@
         </p:nvSpPr>
         <p:spPr>
           <a:xfrm>
-            <a:off x="3079876" y="2618185"/>
+            <a:off x="3867048" y="2608403"/>
             <a:ext cx="1156124" cy="645064"/>
           </a:xfrm>
           <a:prstGeom prst="rect">
@@ -20735,19 +20631,7 @@
             <a:pPr algn="ctr"/>
             <a:r>
               <a:rPr lang="ru-RU" sz="1100" dirty="0"/>
-              <a:t>Ввести дисциплину в государство </a:t>
-            </a:r>
-            <a:r>
-              <a:rPr lang="ru-RU" sz="200" dirty="0"/>
-              <a:t>(Цель </a:t>
-            </a:r>
-            <a:r>
-              <a:rPr lang="ru-RU" sz="200" dirty="0" err="1"/>
-              <a:t>Оссевабрандваг</a:t>
-            </a:r>
-            <a:r>
-              <a:rPr lang="ru-RU" sz="200" dirty="0"/>
-              <a:t> — создание однопартийного авторитарного и дисциплинированного государства, в котором люди не позволят себе говорить и делать что им заблагорассудится в ущерб народу и правительству (29 мая 1942). )</a:t>
+              <a:t>Ввести дисциплину в государство</a:t>
             </a:r>
             <a:endParaRPr lang="ru-RU" sz="100" dirty="0"/>
           </a:p>
@@ -20767,7 +20651,7 @@
         </p:nvSpPr>
         <p:spPr>
           <a:xfrm>
-            <a:off x="9472896" y="1567398"/>
+            <a:off x="10283618" y="1567398"/>
             <a:ext cx="1156124" cy="645064"/>
           </a:xfrm>
           <a:prstGeom prst="rect">
@@ -20941,22 +20825,7 @@
               <a:rPr lang="en-US" sz="1100" dirty="0" err="1"/>
               <a:t>Reddingsdaadbond</a:t>
             </a:r>
-            <a:r>
-              <a:rPr lang="ru-RU" sz="1100" dirty="0"/>
-              <a:t> </a:t>
-            </a:r>
-            <a:r>
-              <a:rPr lang="ru-RU" sz="600" dirty="0"/>
-              <a:t>(</a:t>
-            </a:r>
-            <a:r>
-              <a:rPr lang="en-US" sz="600" dirty="0"/>
-              <a:t>https://af.m.wikipedia.org/wiki/Reddingsdaadbond</a:t>
-            </a:r>
-            <a:r>
-              <a:rPr lang="ru-RU" sz="600" dirty="0"/>
-              <a:t>)</a:t>
-            </a:r>
+            <a:endParaRPr lang="ru-RU" sz="600" dirty="0"/>
           </a:p>
         </p:txBody>
       </p:sp>
@@ -25356,8 +25225,8 @@
         </p:nvCxnSpPr>
         <p:spPr>
           <a:xfrm rot="16200000" flipH="1">
-            <a:off x="9055656" y="572096"/>
-            <a:ext cx="387744" cy="1602859"/>
+            <a:off x="9461017" y="166735"/>
+            <a:ext cx="387744" cy="2413581"/>
           </a:xfrm>
           <a:prstGeom prst="bentConnector3">
             <a:avLst>
@@ -25490,9 +25359,9 @@
           <p:nvPr/>
         </p:nvCxnSpPr>
         <p:spPr>
-          <a:xfrm>
-            <a:off x="3657938" y="2196513"/>
-            <a:ext cx="0" cy="421672"/>
+          <a:xfrm flipH="1">
+            <a:off x="4445110" y="2208579"/>
+            <a:ext cx="1417" cy="399824"/>
           </a:xfrm>
           <a:prstGeom prst="straightConnector1">
             <a:avLst/>
@@ -25528,14 +25397,14 @@
           <p:cNvCxnSpPr>
             <a:cxnSpLocks/>
             <a:stCxn id="1496" idx="2"/>
-            <a:endCxn id="1499" idx="0"/>
+            <a:endCxn id="549" idx="0"/>
           </p:cNvCxnSpPr>
           <p:nvPr/>
         </p:nvCxnSpPr>
         <p:spPr>
           <a:xfrm>
-            <a:off x="3657938" y="3263249"/>
-            <a:ext cx="3036" cy="373621"/>
+            <a:off x="4445110" y="3253467"/>
+            <a:ext cx="5078" cy="1480321"/>
           </a:xfrm>
           <a:prstGeom prst="straightConnector1">
             <a:avLst/>
@@ -26024,7 +25893,7 @@
         </p:nvSpPr>
         <p:spPr>
           <a:xfrm>
-            <a:off x="6223776" y="1551449"/>
+            <a:off x="5403318" y="1568748"/>
             <a:ext cx="1156124" cy="645064"/>
           </a:xfrm>
           <a:prstGeom prst="rect">
@@ -28508,26 +28377,86 @@
           </a:fontRef>
         </p:style>
       </p:cxnSp>
+      <p:sp>
+        <p:nvSpPr>
+          <p:cNvPr id="603" name="Прямоугольник 602">
+            <a:extLst>
+              <a:ext uri="{FF2B5EF4-FFF2-40B4-BE49-F238E27FC236}">
+                <a16:creationId xmlns:a16="http://schemas.microsoft.com/office/drawing/2014/main" id="{18E91F26-A50D-4BF6-8A8F-AE67F9D07CE8}"/>
+              </a:ext>
+            </a:extLst>
+          </p:cNvPr>
+          <p:cNvSpPr/>
+          <p:nvPr/>
+        </p:nvSpPr>
+        <p:spPr>
+          <a:xfrm>
+            <a:off x="7043919" y="2619179"/>
+            <a:ext cx="1156124" cy="645064"/>
+          </a:xfrm>
+          <a:prstGeom prst="rect">
+            <a:avLst/>
+          </a:prstGeom>
+          <a:solidFill>
+            <a:schemeClr val="accent2"/>
+          </a:solidFill>
+          <a:ln w="28575"/>
+        </p:spPr>
+        <p:style>
+          <a:lnRef idx="2">
+            <a:schemeClr val="accent1"/>
+          </a:lnRef>
+          <a:fillRef idx="1">
+            <a:schemeClr val="lt1"/>
+          </a:fillRef>
+          <a:effectRef idx="0">
+            <a:schemeClr val="accent1"/>
+          </a:effectRef>
+          <a:fontRef idx="minor">
+            <a:schemeClr val="dk1"/>
+          </a:fontRef>
+        </p:style>
+        <p:txBody>
+          <a:bodyPr lIns="124733" tIns="62367" rIns="124733" bIns="62367" rtlCol="0" anchor="ctr"/>
+          <a:lstStyle/>
+          <a:p>
+            <a:pPr algn="ctr"/>
+            <a:r>
+              <a:rPr lang="ru-RU" sz="1100" dirty="0"/>
+              <a:t>Упор на </a:t>
+            </a:r>
+            <a:r>
+              <a:rPr lang="ru-RU" sz="1100" dirty="0" err="1"/>
+              <a:t>африканерской</a:t>
+            </a:r>
+            <a:r>
+              <a:rPr lang="ru-RU" sz="1100" dirty="0"/>
+              <a:t> нации</a:t>
+            </a:r>
+            <a:endParaRPr lang="ru-RU" sz="600" dirty="0"/>
+          </a:p>
+        </p:txBody>
+      </p:sp>
       <p:cxnSp>
         <p:nvCxnSpPr>
-          <p:cNvPr id="602" name="Прямая соединительная линия 601">
-            <a:extLst>
-              <a:ext uri="{FF2B5EF4-FFF2-40B4-BE49-F238E27FC236}">
-                <a16:creationId xmlns:a16="http://schemas.microsoft.com/office/drawing/2014/main" id="{5706F8EC-BA96-42DF-A651-81560F4B312E}"/>
+          <p:cNvPr id="613" name="Прямая соединительная линия 612">
+            <a:extLst>
+              <a:ext uri="{FF2B5EF4-FFF2-40B4-BE49-F238E27FC236}">
+                <a16:creationId xmlns:a16="http://schemas.microsoft.com/office/drawing/2014/main" id="{4ECF9963-01EF-4349-9BFD-418568C1A594}"/>
               </a:ext>
             </a:extLst>
           </p:cNvPr>
           <p:cNvCxnSpPr>
             <a:cxnSpLocks/>
-            <a:stCxn id="1479" idx="3"/>
-            <a:endCxn id="524" idx="1"/>
+            <a:stCxn id="603" idx="3"/>
+            <a:endCxn id="1495" idx="1"/>
           </p:cNvCxnSpPr>
           <p:nvPr/>
         </p:nvCxnSpPr>
         <p:spPr>
-          <a:xfrm>
-            <a:off x="5804007" y="1873981"/>
-            <a:ext cx="419769" cy="0"/>
+          <a:xfrm flipV="1">
+            <a:off x="8200043" y="2939724"/>
+            <a:ext cx="511685" cy="1987"/>
           </a:xfrm>
           <a:prstGeom prst="line">
             <a:avLst/>
@@ -28553,111 +28482,6 @@
           </a:fontRef>
         </p:style>
       </p:cxnSp>
-      <p:sp>
-        <p:nvSpPr>
-          <p:cNvPr id="603" name="Прямоугольник 602">
-            <a:extLst>
-              <a:ext uri="{FF2B5EF4-FFF2-40B4-BE49-F238E27FC236}">
-                <a16:creationId xmlns:a16="http://schemas.microsoft.com/office/drawing/2014/main" id="{18E91F26-A50D-4BF6-8A8F-AE67F9D07CE8}"/>
-              </a:ext>
-            </a:extLst>
-          </p:cNvPr>
-          <p:cNvSpPr/>
-          <p:nvPr/>
-        </p:nvSpPr>
-        <p:spPr>
-          <a:xfrm>
-            <a:off x="7043919" y="2619179"/>
-            <a:ext cx="1156124" cy="645064"/>
-          </a:xfrm>
-          <a:prstGeom prst="rect">
-            <a:avLst/>
-          </a:prstGeom>
-          <a:solidFill>
-            <a:schemeClr val="accent2"/>
-          </a:solidFill>
-          <a:ln w="28575"/>
-        </p:spPr>
-        <p:style>
-          <a:lnRef idx="2">
-            <a:schemeClr val="accent1"/>
-          </a:lnRef>
-          <a:fillRef idx="1">
-            <a:schemeClr val="lt1"/>
-          </a:fillRef>
-          <a:effectRef idx="0">
-            <a:schemeClr val="accent1"/>
-          </a:effectRef>
-          <a:fontRef idx="minor">
-            <a:schemeClr val="dk1"/>
-          </a:fontRef>
-        </p:style>
-        <p:txBody>
-          <a:bodyPr lIns="124733" tIns="62367" rIns="124733" bIns="62367" rtlCol="0" anchor="ctr"/>
-          <a:lstStyle/>
-          <a:p>
-            <a:pPr algn="ctr"/>
-            <a:r>
-              <a:rPr lang="ru-RU" sz="1100" dirty="0"/>
-              <a:t>Упор на </a:t>
-            </a:r>
-            <a:r>
-              <a:rPr lang="ru-RU" sz="1100" dirty="0" err="1"/>
-              <a:t>африканерской</a:t>
-            </a:r>
-            <a:r>
-              <a:rPr lang="ru-RU" sz="1100" dirty="0"/>
-              <a:t> нации</a:t>
-            </a:r>
-            <a:endParaRPr lang="ru-RU" sz="600" dirty="0"/>
-          </a:p>
-        </p:txBody>
-      </p:sp>
-      <p:cxnSp>
-        <p:nvCxnSpPr>
-          <p:cNvPr id="613" name="Прямая соединительная линия 612">
-            <a:extLst>
-              <a:ext uri="{FF2B5EF4-FFF2-40B4-BE49-F238E27FC236}">
-                <a16:creationId xmlns:a16="http://schemas.microsoft.com/office/drawing/2014/main" id="{4ECF9963-01EF-4349-9BFD-418568C1A594}"/>
-              </a:ext>
-            </a:extLst>
-          </p:cNvPr>
-          <p:cNvCxnSpPr>
-            <a:cxnSpLocks/>
-            <a:stCxn id="603" idx="3"/>
-            <a:endCxn id="1495" idx="1"/>
-          </p:cNvCxnSpPr>
-          <p:nvPr/>
-        </p:nvCxnSpPr>
-        <p:spPr>
-          <a:xfrm flipV="1">
-            <a:off x="8200043" y="2939724"/>
-            <a:ext cx="511685" cy="1987"/>
-          </a:xfrm>
-          <a:prstGeom prst="line">
-            <a:avLst/>
-          </a:prstGeom>
-          <a:ln w="38100">
-            <a:solidFill>
-              <a:srgbClr val="FF0000"/>
-            </a:solidFill>
-          </a:ln>
-        </p:spPr>
-        <p:style>
-          <a:lnRef idx="1">
-            <a:schemeClr val="accent2"/>
-          </a:lnRef>
-          <a:fillRef idx="0">
-            <a:schemeClr val="accent2"/>
-          </a:fillRef>
-          <a:effectRef idx="0">
-            <a:schemeClr val="accent2"/>
-          </a:effectRef>
-          <a:fontRef idx="minor">
-            <a:schemeClr val="tx1"/>
-          </a:fontRef>
-        </p:style>
-      </p:cxnSp>
       <p:cxnSp>
         <p:nvCxnSpPr>
           <p:cNvPr id="614" name="Shape 248">
@@ -28901,53 +28725,8 @@
         </p:nvCxnSpPr>
         <p:spPr>
           <a:xfrm rot="5400000">
-            <a:off x="7439072" y="542421"/>
-            <a:ext cx="371795" cy="1646261"/>
-          </a:xfrm>
-          <a:prstGeom prst="bentConnector3">
-            <a:avLst>
-              <a:gd name="adj1" fmla="val 50000"/>
-            </a:avLst>
-          </a:prstGeom>
-          <a:ln w="28575">
-            <a:tailEnd type="arrow"/>
-          </a:ln>
-        </p:spPr>
-        <p:style>
-          <a:lnRef idx="1">
-            <a:schemeClr val="accent1"/>
-          </a:lnRef>
-          <a:fillRef idx="0">
-            <a:schemeClr val="accent1"/>
-          </a:fillRef>
-          <a:effectRef idx="0">
-            <a:schemeClr val="accent1"/>
-          </a:effectRef>
-          <a:fontRef idx="minor">
-            <a:schemeClr val="tx1"/>
-          </a:fontRef>
-        </p:style>
-      </p:cxnSp>
-      <p:cxnSp>
-        <p:nvCxnSpPr>
-          <p:cNvPr id="622" name="Shape 248">
-            <a:extLst>
-              <a:ext uri="{FF2B5EF4-FFF2-40B4-BE49-F238E27FC236}">
-                <a16:creationId xmlns:a16="http://schemas.microsoft.com/office/drawing/2014/main" id="{957320AC-BC9A-4553-96A1-C68D585CBFA2}"/>
-              </a:ext>
-            </a:extLst>
-          </p:cNvPr>
-          <p:cNvCxnSpPr>
-            <a:cxnSpLocks/>
-            <a:stCxn id="1478" idx="2"/>
-            <a:endCxn id="1479" idx="0"/>
-          </p:cNvCxnSpPr>
-          <p:nvPr/>
-        </p:nvCxnSpPr>
-        <p:spPr>
-          <a:xfrm rot="5400000">
-            <a:off x="6651125" y="-245526"/>
-            <a:ext cx="371795" cy="3222154"/>
+            <a:off x="7020193" y="140842"/>
+            <a:ext cx="389094" cy="2466719"/>
           </a:xfrm>
           <a:prstGeom prst="bentConnector3">
             <a:avLst>
@@ -28991,8 +28770,8 @@
         </p:nvCxnSpPr>
         <p:spPr>
           <a:xfrm rot="5400000">
-            <a:off x="5867122" y="-1029529"/>
-            <a:ext cx="371795" cy="4790161"/>
+            <a:off x="6255383" y="-629202"/>
+            <a:ext cx="383861" cy="4001572"/>
           </a:xfrm>
           <a:prstGeom prst="bentConnector3">
             <a:avLst>
@@ -29000,52 +28779,6 @@
             </a:avLst>
           </a:prstGeom>
           <a:ln w="28575">
-            <a:tailEnd type="arrow"/>
-          </a:ln>
-        </p:spPr>
-        <p:style>
-          <a:lnRef idx="1">
-            <a:schemeClr val="accent1"/>
-          </a:lnRef>
-          <a:fillRef idx="0">
-            <a:schemeClr val="accent1"/>
-          </a:fillRef>
-          <a:effectRef idx="0">
-            <a:schemeClr val="accent1"/>
-          </a:effectRef>
-          <a:fontRef idx="minor">
-            <a:schemeClr val="tx1"/>
-          </a:fontRef>
-        </p:style>
-      </p:cxnSp>
-      <p:cxnSp>
-        <p:nvCxnSpPr>
-          <p:cNvPr id="642" name="Shape 248">
-            <a:extLst>
-              <a:ext uri="{FF2B5EF4-FFF2-40B4-BE49-F238E27FC236}">
-                <a16:creationId xmlns:a16="http://schemas.microsoft.com/office/drawing/2014/main" id="{EB9C1D6D-E446-47FB-9E95-E8008A51CAB7}"/>
-              </a:ext>
-            </a:extLst>
-          </p:cNvPr>
-          <p:cNvCxnSpPr>
-            <a:cxnSpLocks/>
-            <a:stCxn id="1479" idx="2"/>
-            <a:endCxn id="1493" idx="0"/>
-          </p:cNvCxnSpPr>
-          <p:nvPr/>
-        </p:nvCxnSpPr>
-        <p:spPr>
-          <a:xfrm rot="16200000" flipH="1">
-            <a:off x="5398787" y="2023671"/>
-            <a:ext cx="421672" cy="767356"/>
-          </a:xfrm>
-          <a:prstGeom prst="bentConnector3">
-            <a:avLst>
-              <a:gd name="adj1" fmla="val 50000"/>
-            </a:avLst>
-          </a:prstGeom>
-          <a:ln w="28575">
-            <a:prstDash val="dash"/>
             <a:tailEnd type="arrow"/>
           </a:ln>
         </p:spPr>
@@ -29081,9 +28814,9 @@
           <p:nvPr/>
         </p:nvCxnSpPr>
         <p:spPr>
-          <a:xfrm rot="5400000">
-            <a:off x="6186734" y="2003081"/>
-            <a:ext cx="421672" cy="808537"/>
+          <a:xfrm rot="16200000" flipH="1">
+            <a:off x="5785154" y="2410037"/>
+            <a:ext cx="404373" cy="11921"/>
           </a:xfrm>
           <a:prstGeom prst="bentConnector3">
             <a:avLst>
@@ -29128,104 +28861,12 @@
         </p:nvCxnSpPr>
         <p:spPr>
           <a:xfrm rot="16200000" flipH="1">
-            <a:off x="6086490" y="2911861"/>
-            <a:ext cx="1433780" cy="3084"/>
+            <a:off x="5684911" y="2510281"/>
+            <a:ext cx="1416481" cy="823542"/>
           </a:xfrm>
           <a:prstGeom prst="bentConnector3">
             <a:avLst>
-              <a:gd name="adj1" fmla="val 50000"/>
-            </a:avLst>
-          </a:prstGeom>
-          <a:ln w="28575">
-            <a:prstDash val="dash"/>
-            <a:tailEnd type="arrow"/>
-          </a:ln>
-        </p:spPr>
-        <p:style>
-          <a:lnRef idx="1">
-            <a:schemeClr val="accent1"/>
-          </a:lnRef>
-          <a:fillRef idx="0">
-            <a:schemeClr val="accent1"/>
-          </a:fillRef>
-          <a:effectRef idx="0">
-            <a:schemeClr val="accent1"/>
-          </a:effectRef>
-          <a:fontRef idx="minor">
-            <a:schemeClr val="tx1"/>
-          </a:fontRef>
-        </p:style>
-      </p:cxnSp>
-      <p:cxnSp>
-        <p:nvCxnSpPr>
-          <p:cNvPr id="646" name="Shape 248">
-            <a:extLst>
-              <a:ext uri="{FF2B5EF4-FFF2-40B4-BE49-F238E27FC236}">
-                <a16:creationId xmlns:a16="http://schemas.microsoft.com/office/drawing/2014/main" id="{458C9804-AC82-491B-AC3F-13F54D808902}"/>
-              </a:ext>
-            </a:extLst>
-          </p:cNvPr>
-          <p:cNvCxnSpPr>
-            <a:cxnSpLocks/>
-            <a:stCxn id="1479" idx="2"/>
-            <a:endCxn id="1491" idx="0"/>
-          </p:cNvCxnSpPr>
-          <p:nvPr/>
-        </p:nvCxnSpPr>
-        <p:spPr>
-          <a:xfrm rot="16200000" flipH="1">
-            <a:off x="5298543" y="2123914"/>
-            <a:ext cx="1433780" cy="1578977"/>
-          </a:xfrm>
-          <a:prstGeom prst="bentConnector3">
-            <a:avLst>
-              <a:gd name="adj1" fmla="val 14392"/>
-            </a:avLst>
-          </a:prstGeom>
-          <a:ln w="28575">
-            <a:prstDash val="dash"/>
-            <a:tailEnd type="arrow"/>
-          </a:ln>
-        </p:spPr>
-        <p:style>
-          <a:lnRef idx="1">
-            <a:schemeClr val="accent1"/>
-          </a:lnRef>
-          <a:fillRef idx="0">
-            <a:schemeClr val="accent1"/>
-          </a:fillRef>
-          <a:effectRef idx="0">
-            <a:schemeClr val="accent1"/>
-          </a:effectRef>
-          <a:fontRef idx="minor">
-            <a:schemeClr val="tx1"/>
-          </a:fontRef>
-        </p:style>
-      </p:cxnSp>
-      <p:cxnSp>
-        <p:nvCxnSpPr>
-          <p:cNvPr id="648" name="Shape 248">
-            <a:extLst>
-              <a:ext uri="{FF2B5EF4-FFF2-40B4-BE49-F238E27FC236}">
-                <a16:creationId xmlns:a16="http://schemas.microsoft.com/office/drawing/2014/main" id="{EA426D8B-FEF3-403F-B620-49C1C5E57428}"/>
-              </a:ext>
-            </a:extLst>
-          </p:cNvPr>
-          <p:cNvCxnSpPr>
-            <a:cxnSpLocks/>
-            <a:stCxn id="1479" idx="2"/>
-            <a:endCxn id="573" idx="0"/>
-          </p:cNvCxnSpPr>
-          <p:nvPr/>
-        </p:nvCxnSpPr>
-        <p:spPr>
-          <a:xfrm rot="5400000">
-            <a:off x="4508911" y="2910305"/>
-            <a:ext cx="1430827" cy="3243"/>
-          </a:xfrm>
-          <a:prstGeom prst="bentConnector3">
-            <a:avLst>
-              <a:gd name="adj1" fmla="val 50000"/>
+              <a:gd name="adj1" fmla="val 12390"/>
             </a:avLst>
           </a:prstGeom>
           <a:ln w="28575">
@@ -29266,12 +28907,12 @@
         </p:nvCxnSpPr>
         <p:spPr>
           <a:xfrm rot="5400000">
-            <a:off x="5296857" y="2122358"/>
-            <a:ext cx="1430827" cy="1579136"/>
+            <a:off x="4895277" y="2541237"/>
+            <a:ext cx="1413528" cy="758678"/>
           </a:xfrm>
           <a:prstGeom prst="bentConnector3">
             <a:avLst>
-              <a:gd name="adj1" fmla="val 14318"/>
+              <a:gd name="adj1" fmla="val 12312"/>
             </a:avLst>
           </a:prstGeom>
           <a:ln w="28575">
@@ -29446,18 +29087,18 @@
           <p:cNvCxnSpPr>
             <a:cxnSpLocks/>
             <a:stCxn id="1496" idx="2"/>
-            <a:endCxn id="549" idx="0"/>
+            <a:endCxn id="1499" idx="0"/>
           </p:cNvCxnSpPr>
           <p:nvPr/>
         </p:nvCxnSpPr>
         <p:spPr>
-          <a:xfrm rot="16200000" flipH="1">
-            <a:off x="3318794" y="3602393"/>
-            <a:ext cx="1470539" cy="792250"/>
+          <a:xfrm rot="5400000">
+            <a:off x="3861341" y="3053100"/>
+            <a:ext cx="383403" cy="784136"/>
           </a:xfrm>
           <a:prstGeom prst="bentConnector3">
             <a:avLst>
-              <a:gd name="adj1" fmla="val 8546"/>
+              <a:gd name="adj1" fmla="val 50000"/>
             </a:avLst>
           </a:prstGeom>
           <a:ln w="28575">
@@ -29595,8 +29236,8 @@
         </p:nvCxnSpPr>
         <p:spPr>
           <a:xfrm rot="16200000" flipH="1">
-            <a:off x="11450173" y="813246"/>
-            <a:ext cx="397567" cy="3195997"/>
+            <a:off x="11855534" y="1218607"/>
+            <a:ext cx="397567" cy="2385275"/>
           </a:xfrm>
           <a:prstGeom prst="bentConnector3">
             <a:avLst>
@@ -29623,6 +29264,58 @@
           </a:fontRef>
         </p:style>
       </p:cxnSp>
+      <p:sp>
+        <p:nvSpPr>
+          <p:cNvPr id="585" name="Прямоугольник 584">
+            <a:extLst>
+              <a:ext uri="{FF2B5EF4-FFF2-40B4-BE49-F238E27FC236}">
+                <a16:creationId xmlns:a16="http://schemas.microsoft.com/office/drawing/2014/main" id="{9BA3B89F-0C56-4A24-82AB-5D74D1DA5C11}"/>
+              </a:ext>
+            </a:extLst>
+          </p:cNvPr>
+          <p:cNvSpPr/>
+          <p:nvPr/>
+        </p:nvSpPr>
+        <p:spPr>
+          <a:xfrm>
+            <a:off x="6226860" y="5724848"/>
+            <a:ext cx="1156124" cy="645064"/>
+          </a:xfrm>
+          <a:prstGeom prst="rect">
+            <a:avLst/>
+          </a:prstGeom>
+          <a:solidFill>
+            <a:schemeClr val="accent2"/>
+          </a:solidFill>
+          <a:ln w="28575"/>
+        </p:spPr>
+        <p:style>
+          <a:lnRef idx="2">
+            <a:schemeClr val="accent1"/>
+          </a:lnRef>
+          <a:fillRef idx="1">
+            <a:schemeClr val="lt1"/>
+          </a:fillRef>
+          <a:effectRef idx="0">
+            <a:schemeClr val="accent1"/>
+          </a:effectRef>
+          <a:fontRef idx="minor">
+            <a:schemeClr val="dk1"/>
+          </a:fontRef>
+        </p:style>
+        <p:txBody>
+          <a:bodyPr lIns="124733" tIns="62367" rIns="124733" bIns="62367" rtlCol="0" anchor="ctr"/>
+          <a:lstStyle/>
+          <a:p>
+            <a:pPr algn="ctr"/>
+            <a:r>
+              <a:rPr lang="ru-RU" sz="1100" dirty="0"/>
+              <a:t>Поставки оружия от Германии</a:t>
+            </a:r>
+            <a:endParaRPr lang="ru-RU" sz="600" dirty="0"/>
+          </a:p>
+        </p:txBody>
+      </p:sp>
     </p:spTree>
     <p:extLst>
       <p:ext uri="{BB962C8B-B14F-4D97-AF65-F5344CB8AC3E}">

--- a/Наработки/диздоки/ЮАС/ЮАС общая.pptx
+++ b/Наработки/диздоки/ЮАС/ЮАС общая.pptx
@@ -209,7 +209,7 @@
             <a:fld id="{33E3D7F9-E251-484C-A6FF-FA958879DF69}" type="datetimeFigureOut">
               <a:rPr lang="ru-RU" smtClean="0"/>
               <a:pPr/>
-              <a:t>16.12.2025</a:t>
+              <a:t>30.01.2026</a:t>
             </a:fld>
             <a:endParaRPr lang="ru-RU"/>
           </a:p>
@@ -699,7 +699,7 @@
             <a:fld id="{85A5DE44-605B-4D3B-B2B7-94543DF81A36}" type="datetimeFigureOut">
               <a:rPr lang="ru-RU" smtClean="0"/>
               <a:pPr/>
-              <a:t>16.12.2025</a:t>
+              <a:t>30.01.2026</a:t>
             </a:fld>
             <a:endParaRPr lang="ru-RU"/>
           </a:p>
@@ -871,7 +871,7 @@
             <a:fld id="{85A5DE44-605B-4D3B-B2B7-94543DF81A36}" type="datetimeFigureOut">
               <a:rPr lang="ru-RU" smtClean="0"/>
               <a:pPr/>
-              <a:t>16.12.2025</a:t>
+              <a:t>30.01.2026</a:t>
             </a:fld>
             <a:endParaRPr lang="ru-RU"/>
           </a:p>
@@ -1053,7 +1053,7 @@
             <a:fld id="{85A5DE44-605B-4D3B-B2B7-94543DF81A36}" type="datetimeFigureOut">
               <a:rPr lang="ru-RU" smtClean="0"/>
               <a:pPr/>
-              <a:t>16.12.2025</a:t>
+              <a:t>30.01.2026</a:t>
             </a:fld>
             <a:endParaRPr lang="ru-RU"/>
           </a:p>
@@ -1225,7 +1225,7 @@
             <a:fld id="{85A5DE44-605B-4D3B-B2B7-94543DF81A36}" type="datetimeFigureOut">
               <a:rPr lang="ru-RU" smtClean="0"/>
               <a:pPr/>
-              <a:t>16.12.2025</a:t>
+              <a:t>30.01.2026</a:t>
             </a:fld>
             <a:endParaRPr lang="ru-RU"/>
           </a:p>
@@ -1473,7 +1473,7 @@
             <a:fld id="{85A5DE44-605B-4D3B-B2B7-94543DF81A36}" type="datetimeFigureOut">
               <a:rPr lang="ru-RU" smtClean="0"/>
               <a:pPr/>
-              <a:t>16.12.2025</a:t>
+              <a:t>30.01.2026</a:t>
             </a:fld>
             <a:endParaRPr lang="ru-RU"/>
           </a:p>
@@ -1707,7 +1707,7 @@
             <a:fld id="{85A5DE44-605B-4D3B-B2B7-94543DF81A36}" type="datetimeFigureOut">
               <a:rPr lang="ru-RU" smtClean="0"/>
               <a:pPr/>
-              <a:t>16.12.2025</a:t>
+              <a:t>30.01.2026</a:t>
             </a:fld>
             <a:endParaRPr lang="ru-RU"/>
           </a:p>
@@ -2076,7 +2076,7 @@
             <a:fld id="{85A5DE44-605B-4D3B-B2B7-94543DF81A36}" type="datetimeFigureOut">
               <a:rPr lang="ru-RU" smtClean="0"/>
               <a:pPr/>
-              <a:t>16.12.2025</a:t>
+              <a:t>30.01.2026</a:t>
             </a:fld>
             <a:endParaRPr lang="ru-RU"/>
           </a:p>
@@ -2196,7 +2196,7 @@
             <a:fld id="{85A5DE44-605B-4D3B-B2B7-94543DF81A36}" type="datetimeFigureOut">
               <a:rPr lang="ru-RU" smtClean="0"/>
               <a:pPr/>
-              <a:t>16.12.2025</a:t>
+              <a:t>30.01.2026</a:t>
             </a:fld>
             <a:endParaRPr lang="ru-RU"/>
           </a:p>
@@ -2293,7 +2293,7 @@
             <a:fld id="{85A5DE44-605B-4D3B-B2B7-94543DF81A36}" type="datetimeFigureOut">
               <a:rPr lang="ru-RU" smtClean="0"/>
               <a:pPr/>
-              <a:t>16.12.2025</a:t>
+              <a:t>30.01.2026</a:t>
             </a:fld>
             <a:endParaRPr lang="ru-RU"/>
           </a:p>
@@ -2572,7 +2572,7 @@
             <a:fld id="{85A5DE44-605B-4D3B-B2B7-94543DF81A36}" type="datetimeFigureOut">
               <a:rPr lang="ru-RU" smtClean="0"/>
               <a:pPr/>
-              <a:t>16.12.2025</a:t>
+              <a:t>30.01.2026</a:t>
             </a:fld>
             <a:endParaRPr lang="ru-RU"/>
           </a:p>
@@ -2831,7 +2831,7 @@
             <a:fld id="{85A5DE44-605B-4D3B-B2B7-94543DF81A36}" type="datetimeFigureOut">
               <a:rPr lang="ru-RU" smtClean="0"/>
               <a:pPr/>
-              <a:t>16.12.2025</a:t>
+              <a:t>30.01.2026</a:t>
             </a:fld>
             <a:endParaRPr lang="ru-RU"/>
           </a:p>
@@ -3046,7 +3046,7 @@
             <a:fld id="{85A5DE44-605B-4D3B-B2B7-94543DF81A36}" type="datetimeFigureOut">
               <a:rPr lang="ru-RU" smtClean="0"/>
               <a:pPr/>
-              <a:t>16.12.2025</a:t>
+              <a:t>30.01.2026</a:t>
             </a:fld>
             <a:endParaRPr lang="ru-RU"/>
           </a:p>
@@ -20105,106 +20105,6 @@
           </a:p>
         </p:txBody>
       </p:sp>
-      <p:sp>
-        <p:nvSpPr>
-          <p:cNvPr id="1479" name="Прямоугольник 1478">
-            <a:extLst>
-              <a:ext uri="{FF2B5EF4-FFF2-40B4-BE49-F238E27FC236}">
-                <a16:creationId xmlns:a16="http://schemas.microsoft.com/office/drawing/2014/main" id="{214BF47C-6A41-4957-8473-E730ED14F329}"/>
-              </a:ext>
-            </a:extLst>
-          </p:cNvPr>
-          <p:cNvSpPr/>
-          <p:nvPr/>
-        </p:nvSpPr>
-        <p:spPr>
-          <a:xfrm>
-            <a:off x="4647883" y="1551449"/>
-            <a:ext cx="1156124" cy="645064"/>
-          </a:xfrm>
-          <a:prstGeom prst="rect">
-            <a:avLst/>
-          </a:prstGeom>
-          <a:solidFill>
-            <a:schemeClr val="accent2"/>
-          </a:solidFill>
-          <a:ln w="28575"/>
-        </p:spPr>
-        <p:style>
-          <a:lnRef idx="2">
-            <a:schemeClr val="accent1"/>
-          </a:lnRef>
-          <a:fillRef idx="1">
-            <a:schemeClr val="lt1"/>
-          </a:fillRef>
-          <a:effectRef idx="0">
-            <a:schemeClr val="accent1"/>
-          </a:effectRef>
-          <a:fontRef idx="minor">
-            <a:schemeClr val="dk1"/>
-          </a:fontRef>
-        </p:style>
-        <p:txBody>
-          <a:bodyPr lIns="124733" tIns="62367" rIns="124733" bIns="62367" rtlCol="0" anchor="ctr"/>
-          <a:lstStyle/>
-          <a:p>
-            <a:pPr algn="ctr"/>
-            <a:r>
-              <a:rPr lang="ru-RU" sz="1100" dirty="0"/>
-              <a:t>Вооружённые отряды </a:t>
-            </a:r>
-            <a:r>
-              <a:rPr lang="ru-RU" sz="1100" dirty="0" err="1"/>
-              <a:t>серорубашечников</a:t>
-            </a:r>
-            <a:r>
-              <a:rPr lang="ru-RU" sz="1100" dirty="0"/>
-              <a:t> </a:t>
-            </a:r>
-            <a:r>
-              <a:rPr lang="ru-RU" sz="300" dirty="0"/>
-              <a:t>(</a:t>
-            </a:r>
-            <a:r>
-              <a:rPr lang="ru-RU" sz="300" dirty="0" err="1"/>
-              <a:t>кирино</a:t>
-            </a:r>
-            <a:r>
-              <a:rPr lang="en-US" sz="300" dirty="0"/>
-              <a:t>: </a:t>
-            </a:r>
-            <a:r>
-              <a:rPr lang="ru-RU" sz="300" dirty="0"/>
-              <a:t>НД -20% время подготовки, </a:t>
-            </a:r>
-            <a:r>
-              <a:rPr lang="ru-RU" sz="300" dirty="0" err="1"/>
-              <a:t>орагнизация</a:t>
-            </a:r>
-            <a:r>
-              <a:rPr lang="ru-RU" sz="300" dirty="0"/>
-              <a:t> +8%, </a:t>
-            </a:r>
-            <a:r>
-              <a:rPr lang="ru-RU" sz="300" dirty="0" err="1"/>
-              <a:t>военка</a:t>
-            </a:r>
-            <a:r>
-              <a:rPr lang="ru-RU" sz="300" dirty="0"/>
-              <a:t> +1%, решение на </a:t>
-            </a:r>
-            <a:r>
-              <a:rPr lang="ru-RU" sz="300" dirty="0" err="1"/>
-              <a:t>дивки</a:t>
-            </a:r>
-            <a:r>
-              <a:rPr lang="ru-RU" sz="300" dirty="0"/>
-              <a:t> рубашек)</a:t>
-            </a:r>
-            <a:endParaRPr lang="ru-RU" sz="600" dirty="0"/>
-          </a:p>
-        </p:txBody>
-      </p:sp>
       <p:cxnSp>
         <p:nvCxnSpPr>
           <p:cNvPr id="1480" name="Прямая соединительная линия 1479">
@@ -20416,7 +20316,7 @@
             <a:pPr algn="ctr"/>
             <a:r>
               <a:rPr lang="ru-RU" sz="1100" dirty="0"/>
-              <a:t>Возобновить связи с Британской империей</a:t>
+              <a:t>Возобновить связи с Нидерландами</a:t>
             </a:r>
           </a:p>
         </p:txBody>
@@ -20467,11 +20367,7 @@
             <a:pPr algn="ctr"/>
             <a:r>
               <a:rPr lang="ru-RU" sz="1100" dirty="0"/>
-              <a:t>Принять спонсирование от НДСАП </a:t>
-            </a:r>
-            <a:r>
-              <a:rPr lang="ru-RU" sz="300" dirty="0"/>
-              <a:t>(Южноафриканское нееврейское национал-социалистическое движение финансировалось НСДАП/АО и получило поддержку среди молодых немцев, южноафриканцев и буров)</a:t>
+              <a:t>Принять спонсирование от НДСАП</a:t>
             </a:r>
             <a:endParaRPr lang="ru-RU" sz="600" dirty="0"/>
           </a:p>
@@ -20599,7 +20495,7 @@
         </p:nvSpPr>
         <p:spPr>
           <a:xfrm>
-            <a:off x="3079876" y="1551449"/>
+            <a:off x="3872126" y="1551449"/>
             <a:ext cx="1156124" cy="645064"/>
           </a:xfrm>
           <a:prstGeom prst="rect">
@@ -20631,27 +20527,7 @@
             <a:pPr algn="ctr"/>
             <a:r>
               <a:rPr lang="ru-RU" sz="1100" dirty="0"/>
-              <a:t>Ввести </a:t>
-            </a:r>
-            <a:r>
-              <a:rPr lang="ru-RU" sz="1100" dirty="0" err="1"/>
-              <a:t>однопартийность</a:t>
-            </a:r>
-            <a:r>
-              <a:rPr lang="ru-RU" sz="1100" dirty="0"/>
-              <a:t> </a:t>
-            </a:r>
-            <a:r>
-              <a:rPr lang="ru-RU" sz="300" dirty="0"/>
-              <a:t>(Однако однопартийное государство, за которое выступал Ван </a:t>
-            </a:r>
-            <a:r>
-              <a:rPr lang="ru-RU" sz="300" dirty="0" err="1"/>
-              <a:t>Ренсбург</a:t>
-            </a:r>
-            <a:r>
-              <a:rPr lang="ru-RU" sz="300" dirty="0"/>
-              <a:t> , не было принято, а парламентская система — хотя и в пользу националистического правительства — сохранилась.)</a:t>
+              <a:t>Ввести однопартийную систему</a:t>
             </a:r>
             <a:endParaRPr lang="ru-RU" sz="600" dirty="0"/>
           </a:p>
@@ -20723,7 +20599,7 @@
         </p:nvSpPr>
         <p:spPr>
           <a:xfrm>
-            <a:off x="3079876" y="2618185"/>
+            <a:off x="3869366" y="2626035"/>
             <a:ext cx="1156124" cy="645064"/>
           </a:xfrm>
           <a:prstGeom prst="rect">
@@ -20755,19 +20631,7 @@
             <a:pPr algn="ctr"/>
             <a:r>
               <a:rPr lang="ru-RU" sz="1100" dirty="0"/>
-              <a:t>Ввести дисциплину в государство </a:t>
-            </a:r>
-            <a:r>
-              <a:rPr lang="ru-RU" sz="200" dirty="0"/>
-              <a:t>(Цель </a:t>
-            </a:r>
-            <a:r>
-              <a:rPr lang="ru-RU" sz="200" dirty="0" err="1"/>
-              <a:t>Оссевабрандваг</a:t>
-            </a:r>
-            <a:r>
-              <a:rPr lang="ru-RU" sz="200" dirty="0"/>
-              <a:t> — создание однопартийного авторитарного и дисциплинированного государства, в котором люди не позволят себе говорить и делать что им заблагорассудится в ущерб народу и правительству (29 мая 1942). )</a:t>
+              <a:t>Ввести дисциплину в государство</a:t>
             </a:r>
             <a:endParaRPr lang="ru-RU" sz="100" dirty="0"/>
           </a:p>
@@ -20871,43 +20735,7 @@
             <a:pPr algn="ctr"/>
             <a:r>
               <a:rPr lang="ru-RU" sz="1100" dirty="0"/>
-              <a:t>Прогнать евреев и национализировать их имущество </a:t>
-            </a:r>
-            <a:r>
-              <a:rPr lang="ru-RU" sz="200" dirty="0"/>
-              <a:t>(</a:t>
-            </a:r>
-            <a:r>
-              <a:rPr lang="ru-RU" sz="200" dirty="0" err="1"/>
-              <a:t>грышемде</a:t>
-            </a:r>
-            <a:r>
-              <a:rPr lang="ru-RU" sz="200" dirty="0"/>
-              <a:t> якобы предназначались для защиты митингов южноафриканского нацистского движения, но на самом деле это были банды, избивавшие противников движения. </a:t>
-            </a:r>
-            <a:r>
-              <a:rPr lang="ru-RU" sz="200" dirty="0" err="1"/>
-              <a:t>Грышемде</a:t>
-            </a:r>
-            <a:r>
-              <a:rPr lang="ru-RU" sz="200" dirty="0"/>
-              <a:t> также разрушили некоторые синагоги и запугали евреев . Поскольку </a:t>
-            </a:r>
-            <a:r>
-              <a:rPr lang="ru-RU" sz="200" dirty="0" err="1"/>
-              <a:t>Гришемде</a:t>
-            </a:r>
-            <a:r>
-              <a:rPr lang="ru-RU" sz="200" dirty="0"/>
-              <a:t> занимал такое важное место в южноафриканском нееврейском национал-социалистическом движении, это движение вскоре стало широко известно как </a:t>
-            </a:r>
-            <a:r>
-              <a:rPr lang="ru-RU" sz="200" dirty="0" err="1"/>
-              <a:t>Гришемде</a:t>
-            </a:r>
-            <a:r>
-              <a:rPr lang="ru-RU" sz="200" dirty="0"/>
-              <a:t>.)</a:t>
+              <a:t>Прогнать евреев и национализировать их имущество</a:t>
             </a:r>
             <a:endParaRPr lang="ru-RU" sz="800" dirty="0"/>
           </a:p>
@@ -20961,22 +20789,7 @@
               <a:rPr lang="en-US" sz="1100" dirty="0" err="1"/>
               <a:t>Reddingsdaadbond</a:t>
             </a:r>
-            <a:r>
-              <a:rPr lang="ru-RU" sz="1100" dirty="0"/>
-              <a:t> </a:t>
-            </a:r>
-            <a:r>
-              <a:rPr lang="ru-RU" sz="600" dirty="0"/>
-              <a:t>(</a:t>
-            </a:r>
-            <a:r>
-              <a:rPr lang="en-US" sz="600" dirty="0"/>
-              <a:t>https://af.m.wikipedia.org/wiki/Reddingsdaadbond</a:t>
-            </a:r>
-            <a:r>
-              <a:rPr lang="ru-RU" sz="600" dirty="0"/>
-              <a:t>)</a:t>
-            </a:r>
+            <a:endParaRPr lang="ru-RU" sz="600" dirty="0"/>
           </a:p>
         </p:txBody>
       </p:sp>
@@ -25510,9 +25323,9 @@
           <p:nvPr/>
         </p:nvCxnSpPr>
         <p:spPr>
-          <a:xfrm>
-            <a:off x="3657938" y="2196513"/>
-            <a:ext cx="0" cy="421672"/>
+          <a:xfrm flipH="1">
+            <a:off x="4447428" y="2196513"/>
+            <a:ext cx="2760" cy="429522"/>
           </a:xfrm>
           <a:prstGeom prst="straightConnector1">
             <a:avLst/>
@@ -25548,14 +25361,14 @@
           <p:cNvCxnSpPr>
             <a:cxnSpLocks/>
             <a:stCxn id="1496" idx="2"/>
-            <a:endCxn id="1499" idx="0"/>
+            <a:endCxn id="549" idx="0"/>
           </p:cNvCxnSpPr>
           <p:nvPr/>
         </p:nvCxnSpPr>
         <p:spPr>
           <a:xfrm>
-            <a:off x="3657938" y="3263249"/>
-            <a:ext cx="3036" cy="373621"/>
+            <a:off x="4447428" y="3271099"/>
+            <a:ext cx="2760" cy="1462689"/>
           </a:xfrm>
           <a:prstGeom prst="straightConnector1">
             <a:avLst/>
@@ -26044,7 +25857,7 @@
         </p:nvSpPr>
         <p:spPr>
           <a:xfrm>
-            <a:off x="6223776" y="1551449"/>
+            <a:off x="5397843" y="1558142"/>
             <a:ext cx="1156124" cy="645064"/>
           </a:xfrm>
           <a:prstGeom prst="rect">
@@ -26077,154 +25890,6 @@
             <a:r>
               <a:rPr lang="en-US" sz="1100" dirty="0" err="1"/>
               <a:t>Stormjaers</a:t>
-            </a:r>
-            <a:r>
-              <a:rPr lang="en-US" sz="1100" dirty="0"/>
-              <a:t> ( </a:t>
-            </a:r>
-            <a:r>
-              <a:rPr lang="ru-RU" sz="1100" dirty="0"/>
-              <a:t>Охотники за бурями ) </a:t>
-            </a:r>
-            <a:r>
-              <a:rPr lang="ru-RU" sz="200" dirty="0"/>
-              <a:t>(военизированного крыла ОБ. Характер </a:t>
-            </a:r>
-            <a:r>
-              <a:rPr lang="ru-RU" sz="200" dirty="0" err="1"/>
-              <a:t>Stormjaers</a:t>
-            </a:r>
-            <a:r>
-              <a:rPr lang="ru-RU" sz="200" dirty="0"/>
-              <a:t> был подтвержден клятвой, которую приносили новые рекруты: «Если я отступлю, стреляйте в меня. Если я упаду, отомстите за меня. Если я атакую, следуйте за мной» ( африкаанс : </a:t>
-            </a:r>
-            <a:r>
-              <a:rPr lang="ru-RU" sz="200" dirty="0" err="1"/>
-              <a:t>As</a:t>
-            </a:r>
-            <a:r>
-              <a:rPr lang="ru-RU" sz="200" dirty="0"/>
-              <a:t> </a:t>
-            </a:r>
-            <a:r>
-              <a:rPr lang="ru-RU" sz="200" dirty="0" err="1"/>
-              <a:t>ek</a:t>
-            </a:r>
-            <a:r>
-              <a:rPr lang="ru-RU" sz="200" dirty="0"/>
-              <a:t> </a:t>
-            </a:r>
-            <a:r>
-              <a:rPr lang="ru-RU" sz="200" dirty="0" err="1"/>
-              <a:t>omdraai</a:t>
-            </a:r>
-            <a:r>
-              <a:rPr lang="ru-RU" sz="200" dirty="0"/>
-              <a:t>, </a:t>
-            </a:r>
-            <a:r>
-              <a:rPr lang="ru-RU" sz="200" dirty="0" err="1"/>
-              <a:t>skiet</a:t>
-            </a:r>
-            <a:r>
-              <a:rPr lang="ru-RU" sz="200" dirty="0"/>
-              <a:t> </a:t>
-            </a:r>
-            <a:r>
-              <a:rPr lang="ru-RU" sz="200" dirty="0" err="1"/>
-              <a:t>my</a:t>
-            </a:r>
-            <a:r>
-              <a:rPr lang="ru-RU" sz="200" dirty="0"/>
-              <a:t>. </a:t>
-            </a:r>
-            <a:r>
-              <a:rPr lang="ru-RU" sz="200" dirty="0" err="1"/>
-              <a:t>As</a:t>
-            </a:r>
-            <a:r>
-              <a:rPr lang="ru-RU" sz="200" dirty="0"/>
-              <a:t> </a:t>
-            </a:r>
-            <a:r>
-              <a:rPr lang="ru-RU" sz="200" dirty="0" err="1"/>
-              <a:t>ek</a:t>
-            </a:r>
-            <a:r>
-              <a:rPr lang="ru-RU" sz="200" dirty="0"/>
-              <a:t> </a:t>
-            </a:r>
-            <a:r>
-              <a:rPr lang="ru-RU" sz="200" dirty="0" err="1"/>
-              <a:t>val</a:t>
-            </a:r>
-            <a:r>
-              <a:rPr lang="ru-RU" sz="200" dirty="0"/>
-              <a:t>, </a:t>
-            </a:r>
-            <a:r>
-              <a:rPr lang="ru-RU" sz="200" dirty="0" err="1"/>
-              <a:t>wrek</a:t>
-            </a:r>
-            <a:r>
-              <a:rPr lang="ru-RU" sz="200" dirty="0"/>
-              <a:t> </a:t>
-            </a:r>
-            <a:r>
-              <a:rPr lang="ru-RU" sz="200" dirty="0" err="1"/>
-              <a:t>my</a:t>
-            </a:r>
-            <a:r>
-              <a:rPr lang="ru-RU" sz="200" dirty="0"/>
-              <a:t>. </a:t>
-            </a:r>
-            <a:r>
-              <a:rPr lang="ru-RU" sz="200" dirty="0" err="1"/>
-              <a:t>As</a:t>
-            </a:r>
-            <a:r>
-              <a:rPr lang="ru-RU" sz="200" dirty="0"/>
-              <a:t> </a:t>
-            </a:r>
-            <a:r>
-              <a:rPr lang="ru-RU" sz="200" dirty="0" err="1"/>
-              <a:t>ek</a:t>
-            </a:r>
-            <a:r>
-              <a:rPr lang="ru-RU" sz="200" dirty="0"/>
-              <a:t> </a:t>
-            </a:r>
-            <a:r>
-              <a:rPr lang="ru-RU" sz="200" dirty="0" err="1"/>
-              <a:t>storm</a:t>
-            </a:r>
-            <a:r>
-              <a:rPr lang="ru-RU" sz="200" dirty="0"/>
-              <a:t>, </a:t>
-            </a:r>
-            <a:r>
-              <a:rPr lang="ru-RU" sz="200" dirty="0" err="1"/>
-              <a:t>volg</a:t>
-            </a:r>
-            <a:r>
-              <a:rPr lang="ru-RU" sz="200" dirty="0"/>
-              <a:t> </a:t>
-            </a:r>
-            <a:r>
-              <a:rPr lang="ru-RU" sz="200" dirty="0" err="1"/>
-              <a:t>my</a:t>
-            </a:r>
-            <a:r>
-              <a:rPr lang="ru-RU" sz="200" dirty="0"/>
-              <a:t> ). [ 7 ] Этот девиз первоначально приписывается французскому роялисту Анри де ла </a:t>
-            </a:r>
-            <a:r>
-              <a:rPr lang="ru-RU" sz="200" dirty="0" err="1"/>
-              <a:t>Рошжаклену</a:t>
-            </a:r>
-            <a:r>
-              <a:rPr lang="ru-RU" sz="200" dirty="0"/>
-              <a:t> в 1793 году, но также был популярным лозунгом фашистов Бенито Муссолини в 1930-х годах.)</a:t>
             </a:r>
             <a:endParaRPr lang="ru-RU" sz="600" dirty="0"/>
           </a:p>
@@ -28676,26 +28341,78 @@
           </a:fontRef>
         </p:style>
       </p:cxnSp>
+      <p:sp>
+        <p:nvSpPr>
+          <p:cNvPr id="603" name="Прямоугольник 602">
+            <a:extLst>
+              <a:ext uri="{FF2B5EF4-FFF2-40B4-BE49-F238E27FC236}">
+                <a16:creationId xmlns:a16="http://schemas.microsoft.com/office/drawing/2014/main" id="{18E91F26-A50D-4BF6-8A8F-AE67F9D07CE8}"/>
+              </a:ext>
+            </a:extLst>
+          </p:cNvPr>
+          <p:cNvSpPr/>
+          <p:nvPr/>
+        </p:nvSpPr>
+        <p:spPr>
+          <a:xfrm>
+            <a:off x="7043919" y="2619179"/>
+            <a:ext cx="1156124" cy="645064"/>
+          </a:xfrm>
+          <a:prstGeom prst="rect">
+            <a:avLst/>
+          </a:prstGeom>
+          <a:solidFill>
+            <a:schemeClr val="accent2"/>
+          </a:solidFill>
+          <a:ln w="28575"/>
+        </p:spPr>
+        <p:style>
+          <a:lnRef idx="2">
+            <a:schemeClr val="accent1"/>
+          </a:lnRef>
+          <a:fillRef idx="1">
+            <a:schemeClr val="lt1"/>
+          </a:fillRef>
+          <a:effectRef idx="0">
+            <a:schemeClr val="accent1"/>
+          </a:effectRef>
+          <a:fontRef idx="minor">
+            <a:schemeClr val="dk1"/>
+          </a:fontRef>
+        </p:style>
+        <p:txBody>
+          <a:bodyPr lIns="124733" tIns="62367" rIns="124733" bIns="62367" rtlCol="0" anchor="ctr"/>
+          <a:lstStyle/>
+          <a:p>
+            <a:pPr algn="ctr"/>
+            <a:r>
+              <a:rPr lang="ru-RU" sz="1100" dirty="0"/>
+              <a:t>Отказ от парламента и капитализма</a:t>
+            </a:r>
+            <a:endParaRPr lang="ru-RU" sz="600" dirty="0"/>
+          </a:p>
+        </p:txBody>
+      </p:sp>
       <p:cxnSp>
         <p:nvCxnSpPr>
-          <p:cNvPr id="602" name="Прямая соединительная линия 601">
-            <a:extLst>
-              <a:ext uri="{FF2B5EF4-FFF2-40B4-BE49-F238E27FC236}">
-                <a16:creationId xmlns:a16="http://schemas.microsoft.com/office/drawing/2014/main" id="{5706F8EC-BA96-42DF-A651-81560F4B312E}"/>
+          <p:cNvPr id="613" name="Прямая соединительная линия 612">
+            <a:extLst>
+              <a:ext uri="{FF2B5EF4-FFF2-40B4-BE49-F238E27FC236}">
+                <a16:creationId xmlns:a16="http://schemas.microsoft.com/office/drawing/2014/main" id="{4ECF9963-01EF-4349-9BFD-418568C1A594}"/>
               </a:ext>
             </a:extLst>
           </p:cNvPr>
           <p:cNvCxnSpPr>
             <a:cxnSpLocks/>
-            <a:stCxn id="1479" idx="3"/>
-            <a:endCxn id="524" idx="1"/>
+            <a:stCxn id="603" idx="3"/>
+            <a:endCxn id="1495" idx="1"/>
           </p:cNvCxnSpPr>
           <p:nvPr/>
         </p:nvCxnSpPr>
         <p:spPr>
-          <a:xfrm>
-            <a:off x="5804007" y="1873981"/>
-            <a:ext cx="419769" cy="0"/>
+          <a:xfrm flipV="1">
+            <a:off x="8200043" y="2939724"/>
+            <a:ext cx="511685" cy="1987"/>
           </a:xfrm>
           <a:prstGeom prst="line">
             <a:avLst/>
@@ -28721,103 +28438,6 @@
           </a:fontRef>
         </p:style>
       </p:cxnSp>
-      <p:sp>
-        <p:nvSpPr>
-          <p:cNvPr id="603" name="Прямоугольник 602">
-            <a:extLst>
-              <a:ext uri="{FF2B5EF4-FFF2-40B4-BE49-F238E27FC236}">
-                <a16:creationId xmlns:a16="http://schemas.microsoft.com/office/drawing/2014/main" id="{18E91F26-A50D-4BF6-8A8F-AE67F9D07CE8}"/>
-              </a:ext>
-            </a:extLst>
-          </p:cNvPr>
-          <p:cNvSpPr/>
-          <p:nvPr/>
-        </p:nvSpPr>
-        <p:spPr>
-          <a:xfrm>
-            <a:off x="7043919" y="2619179"/>
-            <a:ext cx="1156124" cy="645064"/>
-          </a:xfrm>
-          <a:prstGeom prst="rect">
-            <a:avLst/>
-          </a:prstGeom>
-          <a:solidFill>
-            <a:schemeClr val="accent2"/>
-          </a:solidFill>
-          <a:ln w="28575"/>
-        </p:spPr>
-        <p:style>
-          <a:lnRef idx="2">
-            <a:schemeClr val="accent1"/>
-          </a:lnRef>
-          <a:fillRef idx="1">
-            <a:schemeClr val="lt1"/>
-          </a:fillRef>
-          <a:effectRef idx="0">
-            <a:schemeClr val="accent1"/>
-          </a:effectRef>
-          <a:fontRef idx="minor">
-            <a:schemeClr val="dk1"/>
-          </a:fontRef>
-        </p:style>
-        <p:txBody>
-          <a:bodyPr lIns="124733" tIns="62367" rIns="124733" bIns="62367" rtlCol="0" anchor="ctr"/>
-          <a:lstStyle/>
-          <a:p>
-            <a:pPr algn="ctr"/>
-            <a:r>
-              <a:rPr lang="ru-RU" sz="1100" dirty="0"/>
-              <a:t>Отказ от парламента и капитализма</a:t>
-            </a:r>
-            <a:endParaRPr lang="ru-RU" sz="600" dirty="0"/>
-          </a:p>
-        </p:txBody>
-      </p:sp>
-      <p:cxnSp>
-        <p:nvCxnSpPr>
-          <p:cNvPr id="613" name="Прямая соединительная линия 612">
-            <a:extLst>
-              <a:ext uri="{FF2B5EF4-FFF2-40B4-BE49-F238E27FC236}">
-                <a16:creationId xmlns:a16="http://schemas.microsoft.com/office/drawing/2014/main" id="{4ECF9963-01EF-4349-9BFD-418568C1A594}"/>
-              </a:ext>
-            </a:extLst>
-          </p:cNvPr>
-          <p:cNvCxnSpPr>
-            <a:cxnSpLocks/>
-            <a:stCxn id="603" idx="3"/>
-            <a:endCxn id="1495" idx="1"/>
-          </p:cNvCxnSpPr>
-          <p:nvPr/>
-        </p:nvCxnSpPr>
-        <p:spPr>
-          <a:xfrm flipV="1">
-            <a:off x="8200043" y="2939724"/>
-            <a:ext cx="511685" cy="1987"/>
-          </a:xfrm>
-          <a:prstGeom prst="line">
-            <a:avLst/>
-          </a:prstGeom>
-          <a:ln w="38100">
-            <a:solidFill>
-              <a:srgbClr val="FF0000"/>
-            </a:solidFill>
-          </a:ln>
-        </p:spPr>
-        <p:style>
-          <a:lnRef idx="1">
-            <a:schemeClr val="accent2"/>
-          </a:lnRef>
-          <a:fillRef idx="0">
-            <a:schemeClr val="accent2"/>
-          </a:fillRef>
-          <a:effectRef idx="0">
-            <a:schemeClr val="accent2"/>
-          </a:effectRef>
-          <a:fontRef idx="minor">
-            <a:schemeClr val="tx1"/>
-          </a:fontRef>
-        </p:style>
-      </p:cxnSp>
       <p:cxnSp>
         <p:nvCxnSpPr>
           <p:cNvPr id="614" name="Shape 248">
@@ -29061,53 +28681,8 @@
         </p:nvCxnSpPr>
         <p:spPr>
           <a:xfrm rot="5400000">
-            <a:off x="7439072" y="542421"/>
-            <a:ext cx="371795" cy="1646261"/>
-          </a:xfrm>
-          <a:prstGeom prst="bentConnector3">
-            <a:avLst>
-              <a:gd name="adj1" fmla="val 50000"/>
-            </a:avLst>
-          </a:prstGeom>
-          <a:ln w="28575">
-            <a:tailEnd type="arrow"/>
-          </a:ln>
-        </p:spPr>
-        <p:style>
-          <a:lnRef idx="1">
-            <a:schemeClr val="accent1"/>
-          </a:lnRef>
-          <a:fillRef idx="0">
-            <a:schemeClr val="accent1"/>
-          </a:fillRef>
-          <a:effectRef idx="0">
-            <a:schemeClr val="accent1"/>
-          </a:effectRef>
-          <a:fontRef idx="minor">
-            <a:schemeClr val="tx1"/>
-          </a:fontRef>
-        </p:style>
-      </p:cxnSp>
-      <p:cxnSp>
-        <p:nvCxnSpPr>
-          <p:cNvPr id="622" name="Shape 248">
-            <a:extLst>
-              <a:ext uri="{FF2B5EF4-FFF2-40B4-BE49-F238E27FC236}">
-                <a16:creationId xmlns:a16="http://schemas.microsoft.com/office/drawing/2014/main" id="{957320AC-BC9A-4553-96A1-C68D585CBFA2}"/>
-              </a:ext>
-            </a:extLst>
-          </p:cNvPr>
-          <p:cNvCxnSpPr>
-            <a:cxnSpLocks/>
-            <a:stCxn id="1478" idx="2"/>
-            <a:endCxn id="1479" idx="0"/>
-          </p:cNvCxnSpPr>
-          <p:nvPr/>
-        </p:nvCxnSpPr>
-        <p:spPr>
-          <a:xfrm rot="5400000">
-            <a:off x="6651125" y="-245526"/>
-            <a:ext cx="371795" cy="3222154"/>
+            <a:off x="7022758" y="132801"/>
+            <a:ext cx="378488" cy="2472194"/>
           </a:xfrm>
           <a:prstGeom prst="bentConnector3">
             <a:avLst>
@@ -29151,8 +28726,8 @@
         </p:nvCxnSpPr>
         <p:spPr>
           <a:xfrm rot="5400000">
-            <a:off x="5867122" y="-1029529"/>
-            <a:ext cx="371795" cy="4790161"/>
+            <a:off x="6263247" y="-633404"/>
+            <a:ext cx="371795" cy="3997911"/>
           </a:xfrm>
           <a:prstGeom prst="bentConnector3">
             <a:avLst>
@@ -29160,52 +28735,6 @@
             </a:avLst>
           </a:prstGeom>
           <a:ln w="28575">
-            <a:tailEnd type="arrow"/>
-          </a:ln>
-        </p:spPr>
-        <p:style>
-          <a:lnRef idx="1">
-            <a:schemeClr val="accent1"/>
-          </a:lnRef>
-          <a:fillRef idx="0">
-            <a:schemeClr val="accent1"/>
-          </a:fillRef>
-          <a:effectRef idx="0">
-            <a:schemeClr val="accent1"/>
-          </a:effectRef>
-          <a:fontRef idx="minor">
-            <a:schemeClr val="tx1"/>
-          </a:fontRef>
-        </p:style>
-      </p:cxnSp>
-      <p:cxnSp>
-        <p:nvCxnSpPr>
-          <p:cNvPr id="642" name="Shape 248">
-            <a:extLst>
-              <a:ext uri="{FF2B5EF4-FFF2-40B4-BE49-F238E27FC236}">
-                <a16:creationId xmlns:a16="http://schemas.microsoft.com/office/drawing/2014/main" id="{EB9C1D6D-E446-47FB-9E95-E8008A51CAB7}"/>
-              </a:ext>
-            </a:extLst>
-          </p:cNvPr>
-          <p:cNvCxnSpPr>
-            <a:cxnSpLocks/>
-            <a:stCxn id="1479" idx="2"/>
-            <a:endCxn id="1493" idx="0"/>
-          </p:cNvCxnSpPr>
-          <p:nvPr/>
-        </p:nvCxnSpPr>
-        <p:spPr>
-          <a:xfrm rot="16200000" flipH="1">
-            <a:off x="5398787" y="2023671"/>
-            <a:ext cx="421672" cy="767356"/>
-          </a:xfrm>
-          <a:prstGeom prst="bentConnector3">
-            <a:avLst>
-              <a:gd name="adj1" fmla="val 50000"/>
-            </a:avLst>
-          </a:prstGeom>
-          <a:ln w="28575">
-            <a:prstDash val="dash"/>
             <a:tailEnd type="arrow"/>
           </a:ln>
         </p:spPr>
@@ -29241,9 +28770,9 @@
           <p:nvPr/>
         </p:nvCxnSpPr>
         <p:spPr>
-          <a:xfrm rot="5400000">
-            <a:off x="6186734" y="2003081"/>
-            <a:ext cx="421672" cy="808537"/>
+          <a:xfrm rot="16200000" flipH="1">
+            <a:off x="5777114" y="2401997"/>
+            <a:ext cx="414979" cy="17396"/>
           </a:xfrm>
           <a:prstGeom prst="bentConnector3">
             <a:avLst>
@@ -29288,104 +28817,12 @@
         </p:nvCxnSpPr>
         <p:spPr>
           <a:xfrm rot="16200000" flipH="1">
-            <a:off x="6086490" y="2911861"/>
-            <a:ext cx="1433780" cy="3084"/>
+            <a:off x="5676870" y="2502240"/>
+            <a:ext cx="1427087" cy="829017"/>
           </a:xfrm>
           <a:prstGeom prst="bentConnector3">
             <a:avLst>
-              <a:gd name="adj1" fmla="val 50000"/>
-            </a:avLst>
-          </a:prstGeom>
-          <a:ln w="28575">
-            <a:prstDash val="dash"/>
-            <a:tailEnd type="arrow"/>
-          </a:ln>
-        </p:spPr>
-        <p:style>
-          <a:lnRef idx="1">
-            <a:schemeClr val="accent1"/>
-          </a:lnRef>
-          <a:fillRef idx="0">
-            <a:schemeClr val="accent1"/>
-          </a:fillRef>
-          <a:effectRef idx="0">
-            <a:schemeClr val="accent1"/>
-          </a:effectRef>
-          <a:fontRef idx="minor">
-            <a:schemeClr val="tx1"/>
-          </a:fontRef>
-        </p:style>
-      </p:cxnSp>
-      <p:cxnSp>
-        <p:nvCxnSpPr>
-          <p:cNvPr id="646" name="Shape 248">
-            <a:extLst>
-              <a:ext uri="{FF2B5EF4-FFF2-40B4-BE49-F238E27FC236}">
-                <a16:creationId xmlns:a16="http://schemas.microsoft.com/office/drawing/2014/main" id="{458C9804-AC82-491B-AC3F-13F54D808902}"/>
-              </a:ext>
-            </a:extLst>
-          </p:cNvPr>
-          <p:cNvCxnSpPr>
-            <a:cxnSpLocks/>
-            <a:stCxn id="1479" idx="2"/>
-            <a:endCxn id="1491" idx="0"/>
-          </p:cNvCxnSpPr>
-          <p:nvPr/>
-        </p:nvCxnSpPr>
-        <p:spPr>
-          <a:xfrm rot="16200000" flipH="1">
-            <a:off x="5298543" y="2123914"/>
-            <a:ext cx="1433780" cy="1578977"/>
-          </a:xfrm>
-          <a:prstGeom prst="bentConnector3">
-            <a:avLst>
-              <a:gd name="adj1" fmla="val 14392"/>
-            </a:avLst>
-          </a:prstGeom>
-          <a:ln w="28575">
-            <a:prstDash val="dash"/>
-            <a:tailEnd type="arrow"/>
-          </a:ln>
-        </p:spPr>
-        <p:style>
-          <a:lnRef idx="1">
-            <a:schemeClr val="accent1"/>
-          </a:lnRef>
-          <a:fillRef idx="0">
-            <a:schemeClr val="accent1"/>
-          </a:fillRef>
-          <a:effectRef idx="0">
-            <a:schemeClr val="accent1"/>
-          </a:effectRef>
-          <a:fontRef idx="minor">
-            <a:schemeClr val="tx1"/>
-          </a:fontRef>
-        </p:style>
-      </p:cxnSp>
-      <p:cxnSp>
-        <p:nvCxnSpPr>
-          <p:cNvPr id="648" name="Shape 248">
-            <a:extLst>
-              <a:ext uri="{FF2B5EF4-FFF2-40B4-BE49-F238E27FC236}">
-                <a16:creationId xmlns:a16="http://schemas.microsoft.com/office/drawing/2014/main" id="{EA426D8B-FEF3-403F-B620-49C1C5E57428}"/>
-              </a:ext>
-            </a:extLst>
-          </p:cNvPr>
-          <p:cNvCxnSpPr>
-            <a:cxnSpLocks/>
-            <a:stCxn id="1479" idx="2"/>
-            <a:endCxn id="573" idx="0"/>
-          </p:cNvCxnSpPr>
-          <p:nvPr/>
-        </p:nvCxnSpPr>
-        <p:spPr>
-          <a:xfrm rot="5400000">
-            <a:off x="4508911" y="2910305"/>
-            <a:ext cx="1430827" cy="3243"/>
-          </a:xfrm>
-          <a:prstGeom prst="bentConnector3">
-            <a:avLst>
-              <a:gd name="adj1" fmla="val 50000"/>
+              <a:gd name="adj1" fmla="val 12138"/>
             </a:avLst>
           </a:prstGeom>
           <a:ln w="28575">
@@ -29426,12 +28863,12 @@
         </p:nvCxnSpPr>
         <p:spPr>
           <a:xfrm rot="5400000">
-            <a:off x="5296857" y="2122358"/>
-            <a:ext cx="1430827" cy="1579136"/>
+            <a:off x="4887237" y="2538672"/>
+            <a:ext cx="1424134" cy="753203"/>
           </a:xfrm>
           <a:prstGeom prst="bentConnector3">
             <a:avLst>
-              <a:gd name="adj1" fmla="val 14318"/>
+              <a:gd name="adj1" fmla="val 12059"/>
             </a:avLst>
           </a:prstGeom>
           <a:ln w="28575">
@@ -29606,18 +29043,18 @@
           <p:cNvCxnSpPr>
             <a:cxnSpLocks/>
             <a:stCxn id="1496" idx="2"/>
-            <a:endCxn id="549" idx="0"/>
+            <a:endCxn id="1499" idx="0"/>
           </p:cNvCxnSpPr>
           <p:nvPr/>
         </p:nvCxnSpPr>
         <p:spPr>
-          <a:xfrm rot="16200000" flipH="1">
-            <a:off x="3318794" y="3602393"/>
-            <a:ext cx="1470539" cy="792250"/>
+          <a:xfrm rot="5400000">
+            <a:off x="3871316" y="3060757"/>
+            <a:ext cx="365771" cy="786454"/>
           </a:xfrm>
           <a:prstGeom prst="bentConnector3">
             <a:avLst>
-              <a:gd name="adj1" fmla="val 8546"/>
+              <a:gd name="adj1" fmla="val 50000"/>
             </a:avLst>
           </a:prstGeom>
           <a:ln w="28575">
@@ -29685,7 +29122,7 @@
             <a:pPr algn="ctr"/>
             <a:r>
               <a:rPr lang="ru-RU" sz="1100" dirty="0"/>
-              <a:t>Поглотить остатки фашистских партий (+ министры)</a:t>
+              <a:t>Поглотить остатки фашистских партий</a:t>
             </a:r>
             <a:endParaRPr lang="ru-RU" sz="600" dirty="0"/>
           </a:p>

--- a/Наработки/диздоки/ЮАС/ЮАС общая.pptx
+++ b/Наработки/диздоки/ЮАС/ЮАС общая.pptx
@@ -209,7 +209,7 @@
             <a:fld id="{33E3D7F9-E251-484C-A6FF-FA958879DF69}" type="datetimeFigureOut">
               <a:rPr lang="ru-RU" smtClean="0"/>
               <a:pPr/>
-              <a:t>30.01.2026</a:t>
+              <a:t>03.02.2026</a:t>
             </a:fld>
             <a:endParaRPr lang="ru-RU"/>
           </a:p>
@@ -699,7 +699,7 @@
             <a:fld id="{85A5DE44-605B-4D3B-B2B7-94543DF81A36}" type="datetimeFigureOut">
               <a:rPr lang="ru-RU" smtClean="0"/>
               <a:pPr/>
-              <a:t>30.01.2026</a:t>
+              <a:t>03.02.2026</a:t>
             </a:fld>
             <a:endParaRPr lang="ru-RU"/>
           </a:p>
@@ -871,7 +871,7 @@
             <a:fld id="{85A5DE44-605B-4D3B-B2B7-94543DF81A36}" type="datetimeFigureOut">
               <a:rPr lang="ru-RU" smtClean="0"/>
               <a:pPr/>
-              <a:t>30.01.2026</a:t>
+              <a:t>03.02.2026</a:t>
             </a:fld>
             <a:endParaRPr lang="ru-RU"/>
           </a:p>
@@ -1053,7 +1053,7 @@
             <a:fld id="{85A5DE44-605B-4D3B-B2B7-94543DF81A36}" type="datetimeFigureOut">
               <a:rPr lang="ru-RU" smtClean="0"/>
               <a:pPr/>
-              <a:t>30.01.2026</a:t>
+              <a:t>03.02.2026</a:t>
             </a:fld>
             <a:endParaRPr lang="ru-RU"/>
           </a:p>
@@ -1225,7 +1225,7 @@
             <a:fld id="{85A5DE44-605B-4D3B-B2B7-94543DF81A36}" type="datetimeFigureOut">
               <a:rPr lang="ru-RU" smtClean="0"/>
               <a:pPr/>
-              <a:t>30.01.2026</a:t>
+              <a:t>03.02.2026</a:t>
             </a:fld>
             <a:endParaRPr lang="ru-RU"/>
           </a:p>
@@ -1473,7 +1473,7 @@
             <a:fld id="{85A5DE44-605B-4D3B-B2B7-94543DF81A36}" type="datetimeFigureOut">
               <a:rPr lang="ru-RU" smtClean="0"/>
               <a:pPr/>
-              <a:t>30.01.2026</a:t>
+              <a:t>03.02.2026</a:t>
             </a:fld>
             <a:endParaRPr lang="ru-RU"/>
           </a:p>
@@ -1707,7 +1707,7 @@
             <a:fld id="{85A5DE44-605B-4D3B-B2B7-94543DF81A36}" type="datetimeFigureOut">
               <a:rPr lang="ru-RU" smtClean="0"/>
               <a:pPr/>
-              <a:t>30.01.2026</a:t>
+              <a:t>03.02.2026</a:t>
             </a:fld>
             <a:endParaRPr lang="ru-RU"/>
           </a:p>
@@ -2076,7 +2076,7 @@
             <a:fld id="{85A5DE44-605B-4D3B-B2B7-94543DF81A36}" type="datetimeFigureOut">
               <a:rPr lang="ru-RU" smtClean="0"/>
               <a:pPr/>
-              <a:t>30.01.2026</a:t>
+              <a:t>03.02.2026</a:t>
             </a:fld>
             <a:endParaRPr lang="ru-RU"/>
           </a:p>
@@ -2196,7 +2196,7 @@
             <a:fld id="{85A5DE44-605B-4D3B-B2B7-94543DF81A36}" type="datetimeFigureOut">
               <a:rPr lang="ru-RU" smtClean="0"/>
               <a:pPr/>
-              <a:t>30.01.2026</a:t>
+              <a:t>03.02.2026</a:t>
             </a:fld>
             <a:endParaRPr lang="ru-RU"/>
           </a:p>
@@ -2293,7 +2293,7 @@
             <a:fld id="{85A5DE44-605B-4D3B-B2B7-94543DF81A36}" type="datetimeFigureOut">
               <a:rPr lang="ru-RU" smtClean="0"/>
               <a:pPr/>
-              <a:t>30.01.2026</a:t>
+              <a:t>03.02.2026</a:t>
             </a:fld>
             <a:endParaRPr lang="ru-RU"/>
           </a:p>
@@ -2572,7 +2572,7 @@
             <a:fld id="{85A5DE44-605B-4D3B-B2B7-94543DF81A36}" type="datetimeFigureOut">
               <a:rPr lang="ru-RU" smtClean="0"/>
               <a:pPr/>
-              <a:t>30.01.2026</a:t>
+              <a:t>03.02.2026</a:t>
             </a:fld>
             <a:endParaRPr lang="ru-RU"/>
           </a:p>
@@ -2831,7 +2831,7 @@
             <a:fld id="{85A5DE44-605B-4D3B-B2B7-94543DF81A36}" type="datetimeFigureOut">
               <a:rPr lang="ru-RU" smtClean="0"/>
               <a:pPr/>
-              <a:t>30.01.2026</a:t>
+              <a:t>03.02.2026</a:t>
             </a:fld>
             <a:endParaRPr lang="ru-RU"/>
           </a:p>
@@ -3046,7 +3046,7 @@
             <a:fld id="{85A5DE44-605B-4D3B-B2B7-94543DF81A36}" type="datetimeFigureOut">
               <a:rPr lang="ru-RU" smtClean="0"/>
               <a:pPr/>
-              <a:t>30.01.2026</a:t>
+              <a:t>03.02.2026</a:t>
             </a:fld>
             <a:endParaRPr lang="ru-RU"/>
           </a:p>
@@ -26527,10 +26527,10 @@
           <a:p>
             <a:pPr algn="ctr"/>
             <a:r>
-              <a:rPr lang="ru-RU" sz="900" dirty="0"/>
+              <a:rPr lang="ru-RU" sz="1050" dirty="0"/>
               <a:t>Ввести военизированные отряды в малые протектораты</a:t>
             </a:r>
-            <a:endParaRPr lang="ru-RU" sz="300" dirty="0"/>
+            <a:endParaRPr lang="ru-RU" sz="500" dirty="0"/>
           </a:p>
         </p:txBody>
       </p:sp>
@@ -26548,7 +26548,7 @@
         </p:nvSpPr>
         <p:spPr>
           <a:xfrm>
-            <a:off x="7886821" y="6759915"/>
+            <a:off x="9472896" y="6747430"/>
             <a:ext cx="1156124" cy="645064"/>
           </a:xfrm>
           <a:prstGeom prst="rect">
@@ -26580,7 +26580,7 @@
             <a:pPr algn="ctr"/>
             <a:r>
               <a:rPr lang="ru-RU" sz="1100" dirty="0"/>
-              <a:t>Захват Португальских колоний</a:t>
+              <a:t>Сражение за Родезию</a:t>
             </a:r>
             <a:endParaRPr lang="ru-RU" sz="600" dirty="0"/>
           </a:p>
@@ -26592,153 +26592,6 @@
             <a:extLst>
               <a:ext uri="{FF2B5EF4-FFF2-40B4-BE49-F238E27FC236}">
                 <a16:creationId xmlns:a16="http://schemas.microsoft.com/office/drawing/2014/main" id="{5A930D5F-F356-4A1B-AA2F-B26396932C35}"/>
-              </a:ext>
-            </a:extLst>
-          </p:cNvPr>
-          <p:cNvCxnSpPr>
-            <a:cxnSpLocks/>
-            <a:stCxn id="567" idx="2"/>
-            <a:endCxn id="576" idx="0"/>
-          </p:cNvCxnSpPr>
-          <p:nvPr/>
-        </p:nvCxnSpPr>
-        <p:spPr>
-          <a:xfrm>
-            <a:off x="8464511" y="6377666"/>
-            <a:ext cx="372" cy="382249"/>
-          </a:xfrm>
-          <a:prstGeom prst="straightConnector1">
-            <a:avLst/>
-          </a:prstGeom>
-          <a:ln w="28575">
-            <a:tailEnd type="arrow"/>
-          </a:ln>
-        </p:spPr>
-        <p:style>
-          <a:lnRef idx="1">
-            <a:schemeClr val="accent1"/>
-          </a:lnRef>
-          <a:fillRef idx="0">
-            <a:schemeClr val="accent1"/>
-          </a:fillRef>
-          <a:effectRef idx="0">
-            <a:schemeClr val="accent1"/>
-          </a:effectRef>
-          <a:fontRef idx="minor">
-            <a:schemeClr val="tx1"/>
-          </a:fontRef>
-        </p:style>
-      </p:cxnSp>
-      <p:sp>
-        <p:nvSpPr>
-          <p:cNvPr id="580" name="Прямоугольник 579">
-            <a:extLst>
-              <a:ext uri="{FF2B5EF4-FFF2-40B4-BE49-F238E27FC236}">
-                <a16:creationId xmlns:a16="http://schemas.microsoft.com/office/drawing/2014/main" id="{2A34584E-AD6B-4CC0-AEDE-8FE4506E1A2A}"/>
-              </a:ext>
-            </a:extLst>
-          </p:cNvPr>
-          <p:cNvSpPr/>
-          <p:nvPr/>
-        </p:nvSpPr>
-        <p:spPr>
-          <a:xfrm>
-            <a:off x="7886821" y="7740593"/>
-            <a:ext cx="1156124" cy="645064"/>
-          </a:xfrm>
-          <a:prstGeom prst="rect">
-            <a:avLst/>
-          </a:prstGeom>
-          <a:solidFill>
-            <a:schemeClr val="accent2"/>
-          </a:solidFill>
-          <a:ln w="28575"/>
-        </p:spPr>
-        <p:style>
-          <a:lnRef idx="2">
-            <a:schemeClr val="accent1"/>
-          </a:lnRef>
-          <a:fillRef idx="1">
-            <a:schemeClr val="lt1"/>
-          </a:fillRef>
-          <a:effectRef idx="0">
-            <a:schemeClr val="accent1"/>
-          </a:effectRef>
-          <a:fontRef idx="minor">
-            <a:schemeClr val="dk1"/>
-          </a:fontRef>
-        </p:style>
-        <p:txBody>
-          <a:bodyPr lIns="124733" tIns="62367" rIns="124733" bIns="62367" rtlCol="0" anchor="ctr"/>
-          <a:lstStyle/>
-          <a:p>
-            <a:pPr algn="ctr"/>
-            <a:r>
-              <a:rPr lang="ru-RU" sz="1100" dirty="0"/>
-              <a:t>Потребовать подчинения от Конго</a:t>
-            </a:r>
-            <a:endParaRPr lang="ru-RU" sz="600" dirty="0"/>
-          </a:p>
-        </p:txBody>
-      </p:sp>
-      <p:sp>
-        <p:nvSpPr>
-          <p:cNvPr id="581" name="Прямоугольник 580">
-            <a:extLst>
-              <a:ext uri="{FF2B5EF4-FFF2-40B4-BE49-F238E27FC236}">
-                <a16:creationId xmlns:a16="http://schemas.microsoft.com/office/drawing/2014/main" id="{AF7AB04E-9F3F-45A6-8B07-F6BCAB679DDB}"/>
-              </a:ext>
-            </a:extLst>
-          </p:cNvPr>
-          <p:cNvSpPr/>
-          <p:nvPr/>
-        </p:nvSpPr>
-        <p:spPr>
-          <a:xfrm>
-            <a:off x="9473046" y="6772328"/>
-            <a:ext cx="1156124" cy="645064"/>
-          </a:xfrm>
-          <a:prstGeom prst="rect">
-            <a:avLst/>
-          </a:prstGeom>
-          <a:solidFill>
-            <a:schemeClr val="accent2"/>
-          </a:solidFill>
-          <a:ln w="28575"/>
-        </p:spPr>
-        <p:style>
-          <a:lnRef idx="2">
-            <a:schemeClr val="accent1"/>
-          </a:lnRef>
-          <a:fillRef idx="1">
-            <a:schemeClr val="lt1"/>
-          </a:fillRef>
-          <a:effectRef idx="0">
-            <a:schemeClr val="accent1"/>
-          </a:effectRef>
-          <a:fontRef idx="minor">
-            <a:schemeClr val="dk1"/>
-          </a:fontRef>
-        </p:style>
-        <p:txBody>
-          <a:bodyPr lIns="124733" tIns="62367" rIns="124733" bIns="62367" rtlCol="0" anchor="ctr"/>
-          <a:lstStyle/>
-          <a:p>
-            <a:pPr algn="ctr"/>
-            <a:r>
-              <a:rPr lang="ru-RU" sz="900" dirty="0"/>
-              <a:t>Аннексировать ЮЗА</a:t>
-            </a:r>
-            <a:endParaRPr lang="ru-RU" sz="300" dirty="0"/>
-          </a:p>
-        </p:txBody>
-      </p:sp>
-      <p:cxnSp>
-        <p:nvCxnSpPr>
-          <p:cNvPr id="583" name="Shape 248">
-            <a:extLst>
-              <a:ext uri="{FF2B5EF4-FFF2-40B4-BE49-F238E27FC236}">
-                <a16:creationId xmlns:a16="http://schemas.microsoft.com/office/drawing/2014/main" id="{490E5924-92BD-4AF0-A0E6-79C8CE10E997}"/>
               </a:ext>
             </a:extLst>
           </p:cNvPr>
@@ -26750,14 +26603,12 @@
           <p:nvPr/>
         </p:nvCxnSpPr>
         <p:spPr>
-          <a:xfrm rot="16200000" flipH="1">
-            <a:off x="9060478" y="5781698"/>
-            <a:ext cx="394662" cy="1586597"/>
-          </a:xfrm>
-          <a:prstGeom prst="bentConnector3">
-            <a:avLst>
-              <a:gd name="adj1" fmla="val 50000"/>
-            </a:avLst>
+          <a:xfrm>
+            <a:off x="8464511" y="6377666"/>
+            <a:ext cx="0" cy="362057"/>
+          </a:xfrm>
+          <a:prstGeom prst="straightConnector1">
+            <a:avLst/>
           </a:prstGeom>
           <a:ln w="28575">
             <a:tailEnd type="arrow"/>
@@ -26778,49 +26629,110 @@
           </a:fontRef>
         </p:style>
       </p:cxnSp>
-      <p:cxnSp>
-        <p:nvCxnSpPr>
-          <p:cNvPr id="584" name="Прямая со стрелкой 583">
-            <a:extLst>
-              <a:ext uri="{FF2B5EF4-FFF2-40B4-BE49-F238E27FC236}">
-                <a16:creationId xmlns:a16="http://schemas.microsoft.com/office/drawing/2014/main" id="{F49FA684-7C20-472C-84C4-B6265F52BF04}"/>
-              </a:ext>
-            </a:extLst>
-          </p:cNvPr>
-          <p:cNvCxnSpPr>
-            <a:cxnSpLocks/>
-            <a:stCxn id="576" idx="2"/>
-            <a:endCxn id="580" idx="0"/>
-          </p:cNvCxnSpPr>
-          <p:nvPr/>
-        </p:nvCxnSpPr>
-        <p:spPr>
-          <a:xfrm>
-            <a:off x="8464883" y="7404979"/>
-            <a:ext cx="0" cy="335614"/>
-          </a:xfrm>
-          <a:prstGeom prst="straightConnector1">
-            <a:avLst/>
-          </a:prstGeom>
-          <a:ln w="28575">
-            <a:tailEnd type="arrow"/>
-          </a:ln>
-        </p:spPr>
-        <p:style>
-          <a:lnRef idx="1">
-            <a:schemeClr val="accent1"/>
-          </a:lnRef>
-          <a:fillRef idx="0">
-            <a:schemeClr val="accent1"/>
-          </a:fillRef>
-          <a:effectRef idx="0">
-            <a:schemeClr val="accent1"/>
-          </a:effectRef>
-          <a:fontRef idx="minor">
-            <a:schemeClr val="tx1"/>
-          </a:fontRef>
-        </p:style>
-      </p:cxnSp>
+      <p:sp>
+        <p:nvSpPr>
+          <p:cNvPr id="580" name="Прямоугольник 579">
+            <a:extLst>
+              <a:ext uri="{FF2B5EF4-FFF2-40B4-BE49-F238E27FC236}">
+                <a16:creationId xmlns:a16="http://schemas.microsoft.com/office/drawing/2014/main" id="{2A34584E-AD6B-4CC0-AEDE-8FE4506E1A2A}"/>
+              </a:ext>
+            </a:extLst>
+          </p:cNvPr>
+          <p:cNvSpPr/>
+          <p:nvPr/>
+        </p:nvSpPr>
+        <p:spPr>
+          <a:xfrm>
+            <a:off x="7886821" y="7740593"/>
+            <a:ext cx="1156124" cy="645064"/>
+          </a:xfrm>
+          <a:prstGeom prst="rect">
+            <a:avLst/>
+          </a:prstGeom>
+          <a:solidFill>
+            <a:schemeClr val="accent2"/>
+          </a:solidFill>
+          <a:ln w="28575"/>
+        </p:spPr>
+        <p:style>
+          <a:lnRef idx="2">
+            <a:schemeClr val="accent1"/>
+          </a:lnRef>
+          <a:fillRef idx="1">
+            <a:schemeClr val="lt1"/>
+          </a:fillRef>
+          <a:effectRef idx="0">
+            <a:schemeClr val="accent1"/>
+          </a:effectRef>
+          <a:fontRef idx="minor">
+            <a:schemeClr val="dk1"/>
+          </a:fontRef>
+        </p:style>
+        <p:txBody>
+          <a:bodyPr lIns="124733" tIns="62367" rIns="124733" bIns="62367" rtlCol="0" anchor="ctr"/>
+          <a:lstStyle/>
+          <a:p>
+            <a:pPr algn="ctr"/>
+            <a:r>
+              <a:rPr lang="ru-RU" sz="1100" dirty="0"/>
+              <a:t>Потребовать Португальскую Ост и Вест-Африку</a:t>
+            </a:r>
+            <a:endParaRPr lang="ru-RU" sz="600" dirty="0"/>
+          </a:p>
+        </p:txBody>
+      </p:sp>
+      <p:sp>
+        <p:nvSpPr>
+          <p:cNvPr id="581" name="Прямоугольник 580">
+            <a:extLst>
+              <a:ext uri="{FF2B5EF4-FFF2-40B4-BE49-F238E27FC236}">
+                <a16:creationId xmlns:a16="http://schemas.microsoft.com/office/drawing/2014/main" id="{AF7AB04E-9F3F-45A6-8B07-F6BCAB679DDB}"/>
+              </a:ext>
+            </a:extLst>
+          </p:cNvPr>
+          <p:cNvSpPr/>
+          <p:nvPr/>
+        </p:nvSpPr>
+        <p:spPr>
+          <a:xfrm>
+            <a:off x="7886449" y="6739723"/>
+            <a:ext cx="1156124" cy="645064"/>
+          </a:xfrm>
+          <a:prstGeom prst="rect">
+            <a:avLst/>
+          </a:prstGeom>
+          <a:solidFill>
+            <a:schemeClr val="accent2"/>
+          </a:solidFill>
+          <a:ln w="28575"/>
+        </p:spPr>
+        <p:style>
+          <a:lnRef idx="2">
+            <a:schemeClr val="accent1"/>
+          </a:lnRef>
+          <a:fillRef idx="1">
+            <a:schemeClr val="lt1"/>
+          </a:fillRef>
+          <a:effectRef idx="0">
+            <a:schemeClr val="accent1"/>
+          </a:effectRef>
+          <a:fontRef idx="minor">
+            <a:schemeClr val="dk1"/>
+          </a:fontRef>
+        </p:style>
+        <p:txBody>
+          <a:bodyPr lIns="124733" tIns="62367" rIns="124733" bIns="62367" rtlCol="0" anchor="ctr"/>
+          <a:lstStyle/>
+          <a:p>
+            <a:pPr algn="ctr"/>
+            <a:r>
+              <a:rPr lang="ru-RU" sz="1050" dirty="0"/>
+              <a:t>Аннексировать ЮЗА</a:t>
+            </a:r>
+            <a:endParaRPr lang="ru-RU" sz="500" dirty="0"/>
+          </a:p>
+        </p:txBody>
+      </p:sp>
       <p:cxnSp>
         <p:nvCxnSpPr>
           <p:cNvPr id="550" name="Shape 248">
@@ -27779,7 +27691,7 @@
         </p:nvSpPr>
         <p:spPr>
           <a:xfrm>
-            <a:off x="20251870" y="9626666"/>
+            <a:off x="20249159" y="9806492"/>
             <a:ext cx="1144480" cy="639015"/>
           </a:xfrm>
           <a:prstGeom prst="rect">
@@ -27924,7 +27836,7 @@
         </p:nvSpPr>
         <p:spPr>
           <a:xfrm>
-            <a:off x="20251870" y="8610528"/>
+            <a:off x="20251870" y="8748757"/>
             <a:ext cx="1144480" cy="639015"/>
           </a:xfrm>
           <a:prstGeom prst="rect">
@@ -27988,9 +27900,9 @@
           <p:nvPr/>
         </p:nvCxnSpPr>
         <p:spPr>
-          <a:xfrm>
-            <a:off x="20824110" y="9249543"/>
-            <a:ext cx="0" cy="377123"/>
+          <a:xfrm flipH="1">
+            <a:off x="20821399" y="9387772"/>
+            <a:ext cx="2711" cy="418720"/>
           </a:xfrm>
           <a:prstGeom prst="straightConnector1">
             <a:avLst/>
@@ -28032,8 +27944,8 @@
         </p:nvCxnSpPr>
         <p:spPr>
           <a:xfrm rot="5400000">
-            <a:off x="21118516" y="8048287"/>
-            <a:ext cx="267835" cy="856646"/>
+            <a:off x="21049401" y="8117402"/>
+            <a:ext cx="406064" cy="856646"/>
           </a:xfrm>
           <a:prstGeom prst="bentConnector3">
             <a:avLst>
@@ -28079,7 +27991,7 @@
         <p:spPr>
           <a:xfrm flipH="1">
             <a:off x="20824110" y="7386446"/>
-            <a:ext cx="1" cy="1224082"/>
+            <a:ext cx="1" cy="1362311"/>
           </a:xfrm>
           <a:prstGeom prst="straightConnector1">
             <a:avLst/>
@@ -28118,7 +28030,7 @@
         </p:nvSpPr>
         <p:spPr>
           <a:xfrm>
-            <a:off x="21968589" y="8610528"/>
+            <a:off x="21968589" y="8748757"/>
             <a:ext cx="1144480" cy="639015"/>
           </a:xfrm>
           <a:prstGeom prst="rect">
@@ -28175,8 +28087,8 @@
         </p:nvCxnSpPr>
         <p:spPr>
           <a:xfrm rot="16200000" flipH="1">
-            <a:off x="21976875" y="8046573"/>
-            <a:ext cx="267835" cy="860073"/>
+            <a:off x="21907760" y="8115688"/>
+            <a:ext cx="406064" cy="860073"/>
           </a:xfrm>
           <a:prstGeom prst="bentConnector3">
             <a:avLst>
@@ -28221,12 +28133,12 @@
         </p:nvCxnSpPr>
         <p:spPr>
           <a:xfrm rot="16200000" flipH="1">
-            <a:off x="21070429" y="7140128"/>
-            <a:ext cx="1224082" cy="1716718"/>
+            <a:off x="21001315" y="7209242"/>
+            <a:ext cx="1362311" cy="1716718"/>
           </a:xfrm>
           <a:prstGeom prst="bentConnector3">
             <a:avLst>
-              <a:gd name="adj1" fmla="val 12974"/>
+              <a:gd name="adj1" fmla="val 11756"/>
             </a:avLst>
           </a:prstGeom>
           <a:ln w="28575">
@@ -28395,51 +28307,6 @@
       </p:sp>
       <p:cxnSp>
         <p:nvCxnSpPr>
-          <p:cNvPr id="613" name="Прямая соединительная линия 612">
-            <a:extLst>
-              <a:ext uri="{FF2B5EF4-FFF2-40B4-BE49-F238E27FC236}">
-                <a16:creationId xmlns:a16="http://schemas.microsoft.com/office/drawing/2014/main" id="{4ECF9963-01EF-4349-9BFD-418568C1A594}"/>
-              </a:ext>
-            </a:extLst>
-          </p:cNvPr>
-          <p:cNvCxnSpPr>
-            <a:cxnSpLocks/>
-            <a:stCxn id="603" idx="3"/>
-            <a:endCxn id="1495" idx="1"/>
-          </p:cNvCxnSpPr>
-          <p:nvPr/>
-        </p:nvCxnSpPr>
-        <p:spPr>
-          <a:xfrm flipV="1">
-            <a:off x="8200043" y="2939724"/>
-            <a:ext cx="511685" cy="1987"/>
-          </a:xfrm>
-          <a:prstGeom prst="line">
-            <a:avLst/>
-          </a:prstGeom>
-          <a:ln w="38100">
-            <a:solidFill>
-              <a:srgbClr val="FF0000"/>
-            </a:solidFill>
-          </a:ln>
-        </p:spPr>
-        <p:style>
-          <a:lnRef idx="1">
-            <a:schemeClr val="accent2"/>
-          </a:lnRef>
-          <a:fillRef idx="0">
-            <a:schemeClr val="accent2"/>
-          </a:fillRef>
-          <a:effectRef idx="0">
-            <a:schemeClr val="accent2"/>
-          </a:effectRef>
-          <a:fontRef idx="minor">
-            <a:schemeClr val="tx1"/>
-          </a:fontRef>
-        </p:style>
-      </p:cxnSp>
-      <p:cxnSp>
-        <p:nvCxnSpPr>
           <p:cNvPr id="614" name="Shape 248">
             <a:extLst>
               <a:ext uri="{FF2B5EF4-FFF2-40B4-BE49-F238E27FC236}">
@@ -28530,10 +28397,610 @@
       </p:cxnSp>
       <p:cxnSp>
         <p:nvCxnSpPr>
-          <p:cNvPr id="617" name="Shape 248">
-            <a:extLst>
-              <a:ext uri="{FF2B5EF4-FFF2-40B4-BE49-F238E27FC236}">
-                <a16:creationId xmlns:a16="http://schemas.microsoft.com/office/drawing/2014/main" id="{D772A9E1-4909-4DF7-BB75-3D8677B4CE13}"/>
+          <p:cNvPr id="620" name="Прямая со стрелкой 619">
+            <a:extLst>
+              <a:ext uri="{FF2B5EF4-FFF2-40B4-BE49-F238E27FC236}">
+                <a16:creationId xmlns:a16="http://schemas.microsoft.com/office/drawing/2014/main" id="{E42CDB59-9E95-4E26-A6B1-F477D3D85B35}"/>
+              </a:ext>
+            </a:extLst>
+          </p:cNvPr>
+          <p:cNvCxnSpPr>
+            <a:cxnSpLocks/>
+            <a:stCxn id="1478" idx="2"/>
+            <a:endCxn id="1492" idx="0"/>
+          </p:cNvCxnSpPr>
+          <p:nvPr/>
+        </p:nvCxnSpPr>
+        <p:spPr>
+          <a:xfrm>
+            <a:off x="8448099" y="1179654"/>
+            <a:ext cx="5396" cy="387013"/>
+          </a:xfrm>
+          <a:prstGeom prst="straightConnector1">
+            <a:avLst/>
+          </a:prstGeom>
+          <a:ln w="28575">
+            <a:tailEnd type="arrow"/>
+          </a:ln>
+        </p:spPr>
+        <p:style>
+          <a:lnRef idx="1">
+            <a:schemeClr val="accent1"/>
+          </a:lnRef>
+          <a:fillRef idx="0">
+            <a:schemeClr val="accent1"/>
+          </a:fillRef>
+          <a:effectRef idx="0">
+            <a:schemeClr val="accent1"/>
+          </a:effectRef>
+          <a:fontRef idx="minor">
+            <a:schemeClr val="tx1"/>
+          </a:fontRef>
+        </p:style>
+      </p:cxnSp>
+      <p:cxnSp>
+        <p:nvCxnSpPr>
+          <p:cNvPr id="621" name="Shape 248">
+            <a:extLst>
+              <a:ext uri="{FF2B5EF4-FFF2-40B4-BE49-F238E27FC236}">
+                <a16:creationId xmlns:a16="http://schemas.microsoft.com/office/drawing/2014/main" id="{9036A22A-21B4-44AC-9D44-3D79E43DD9FD}"/>
+              </a:ext>
+            </a:extLst>
+          </p:cNvPr>
+          <p:cNvCxnSpPr>
+            <a:cxnSpLocks/>
+            <a:stCxn id="1478" idx="2"/>
+            <a:endCxn id="524" idx="0"/>
+          </p:cNvCxnSpPr>
+          <p:nvPr/>
+        </p:nvCxnSpPr>
+        <p:spPr>
+          <a:xfrm rot="5400000">
+            <a:off x="7022758" y="132801"/>
+            <a:ext cx="378488" cy="2472194"/>
+          </a:xfrm>
+          <a:prstGeom prst="bentConnector3">
+            <a:avLst>
+              <a:gd name="adj1" fmla="val 50000"/>
+            </a:avLst>
+          </a:prstGeom>
+          <a:ln w="28575">
+            <a:tailEnd type="arrow"/>
+          </a:ln>
+        </p:spPr>
+        <p:style>
+          <a:lnRef idx="1">
+            <a:schemeClr val="accent1"/>
+          </a:lnRef>
+          <a:fillRef idx="0">
+            <a:schemeClr val="accent1"/>
+          </a:fillRef>
+          <a:effectRef idx="0">
+            <a:schemeClr val="accent1"/>
+          </a:effectRef>
+          <a:fontRef idx="minor">
+            <a:schemeClr val="tx1"/>
+          </a:fontRef>
+        </p:style>
+      </p:cxnSp>
+      <p:cxnSp>
+        <p:nvCxnSpPr>
+          <p:cNvPr id="623" name="Shape 248">
+            <a:extLst>
+              <a:ext uri="{FF2B5EF4-FFF2-40B4-BE49-F238E27FC236}">
+                <a16:creationId xmlns:a16="http://schemas.microsoft.com/office/drawing/2014/main" id="{BC288100-1E5C-4932-993A-4E95A253CA1D}"/>
+              </a:ext>
+            </a:extLst>
+          </p:cNvPr>
+          <p:cNvCxnSpPr>
+            <a:cxnSpLocks/>
+            <a:stCxn id="1478" idx="2"/>
+            <a:endCxn id="1494" idx="0"/>
+          </p:cNvCxnSpPr>
+          <p:nvPr/>
+        </p:nvCxnSpPr>
+        <p:spPr>
+          <a:xfrm rot="5400000">
+            <a:off x="6263247" y="-633404"/>
+            <a:ext cx="371795" cy="3997911"/>
+          </a:xfrm>
+          <a:prstGeom prst="bentConnector3">
+            <a:avLst>
+              <a:gd name="adj1" fmla="val 50000"/>
+            </a:avLst>
+          </a:prstGeom>
+          <a:ln w="28575">
+            <a:tailEnd type="arrow"/>
+          </a:ln>
+        </p:spPr>
+        <p:style>
+          <a:lnRef idx="1">
+            <a:schemeClr val="accent1"/>
+          </a:lnRef>
+          <a:fillRef idx="0">
+            <a:schemeClr val="accent1"/>
+          </a:fillRef>
+          <a:effectRef idx="0">
+            <a:schemeClr val="accent1"/>
+          </a:effectRef>
+          <a:fontRef idx="minor">
+            <a:schemeClr val="tx1"/>
+          </a:fontRef>
+        </p:style>
+      </p:cxnSp>
+      <p:cxnSp>
+        <p:nvCxnSpPr>
+          <p:cNvPr id="643" name="Shape 248">
+            <a:extLst>
+              <a:ext uri="{FF2B5EF4-FFF2-40B4-BE49-F238E27FC236}">
+                <a16:creationId xmlns:a16="http://schemas.microsoft.com/office/drawing/2014/main" id="{8F728FDD-25B3-40AF-9994-4CC67545C95A}"/>
+              </a:ext>
+            </a:extLst>
+          </p:cNvPr>
+          <p:cNvCxnSpPr>
+            <a:cxnSpLocks/>
+            <a:stCxn id="524" idx="2"/>
+            <a:endCxn id="1493" idx="0"/>
+          </p:cNvCxnSpPr>
+          <p:nvPr/>
+        </p:nvCxnSpPr>
+        <p:spPr>
+          <a:xfrm rot="16200000" flipH="1">
+            <a:off x="5777114" y="2401997"/>
+            <a:ext cx="414979" cy="17396"/>
+          </a:xfrm>
+          <a:prstGeom prst="bentConnector3">
+            <a:avLst>
+              <a:gd name="adj1" fmla="val 50000"/>
+            </a:avLst>
+          </a:prstGeom>
+          <a:ln w="28575">
+            <a:prstDash val="dash"/>
+            <a:tailEnd type="arrow"/>
+          </a:ln>
+        </p:spPr>
+        <p:style>
+          <a:lnRef idx="1">
+            <a:schemeClr val="accent1"/>
+          </a:lnRef>
+          <a:fillRef idx="0">
+            <a:schemeClr val="accent1"/>
+          </a:fillRef>
+          <a:effectRef idx="0">
+            <a:schemeClr val="accent1"/>
+          </a:effectRef>
+          <a:fontRef idx="minor">
+            <a:schemeClr val="tx1"/>
+          </a:fontRef>
+        </p:style>
+      </p:cxnSp>
+      <p:cxnSp>
+        <p:nvCxnSpPr>
+          <p:cNvPr id="645" name="Shape 248">
+            <a:extLst>
+              <a:ext uri="{FF2B5EF4-FFF2-40B4-BE49-F238E27FC236}">
+                <a16:creationId xmlns:a16="http://schemas.microsoft.com/office/drawing/2014/main" id="{DE8D053D-6BBF-4676-9BC7-4EA2FE4F9DF7}"/>
+              </a:ext>
+            </a:extLst>
+          </p:cNvPr>
+          <p:cNvCxnSpPr>
+            <a:cxnSpLocks/>
+            <a:stCxn id="524" idx="2"/>
+            <a:endCxn id="1491" idx="0"/>
+          </p:cNvCxnSpPr>
+          <p:nvPr/>
+        </p:nvCxnSpPr>
+        <p:spPr>
+          <a:xfrm rot="16200000" flipH="1">
+            <a:off x="5676870" y="2502240"/>
+            <a:ext cx="1427087" cy="829017"/>
+          </a:xfrm>
+          <a:prstGeom prst="bentConnector3">
+            <a:avLst>
+              <a:gd name="adj1" fmla="val 12138"/>
+            </a:avLst>
+          </a:prstGeom>
+          <a:ln w="28575">
+            <a:prstDash val="dash"/>
+            <a:tailEnd type="arrow"/>
+          </a:ln>
+        </p:spPr>
+        <p:style>
+          <a:lnRef idx="1">
+            <a:schemeClr val="accent1"/>
+          </a:lnRef>
+          <a:fillRef idx="0">
+            <a:schemeClr val="accent1"/>
+          </a:fillRef>
+          <a:effectRef idx="0">
+            <a:schemeClr val="accent1"/>
+          </a:effectRef>
+          <a:fontRef idx="minor">
+            <a:schemeClr val="tx1"/>
+          </a:fontRef>
+        </p:style>
+      </p:cxnSp>
+      <p:cxnSp>
+        <p:nvCxnSpPr>
+          <p:cNvPr id="649" name="Shape 248">
+            <a:extLst>
+              <a:ext uri="{FF2B5EF4-FFF2-40B4-BE49-F238E27FC236}">
+                <a16:creationId xmlns:a16="http://schemas.microsoft.com/office/drawing/2014/main" id="{BD96531F-F010-4CD1-8E94-F7868720C5FF}"/>
+              </a:ext>
+            </a:extLst>
+          </p:cNvPr>
+          <p:cNvCxnSpPr>
+            <a:cxnSpLocks/>
+            <a:stCxn id="524" idx="2"/>
+            <a:endCxn id="573" idx="0"/>
+          </p:cNvCxnSpPr>
+          <p:nvPr/>
+        </p:nvCxnSpPr>
+        <p:spPr>
+          <a:xfrm rot="5400000">
+            <a:off x="4887237" y="2538672"/>
+            <a:ext cx="1424134" cy="753203"/>
+          </a:xfrm>
+          <a:prstGeom prst="bentConnector3">
+            <a:avLst>
+              <a:gd name="adj1" fmla="val 12059"/>
+            </a:avLst>
+          </a:prstGeom>
+          <a:ln w="28575">
+            <a:prstDash val="dash"/>
+            <a:tailEnd type="arrow"/>
+          </a:ln>
+        </p:spPr>
+        <p:style>
+          <a:lnRef idx="1">
+            <a:schemeClr val="accent1"/>
+          </a:lnRef>
+          <a:fillRef idx="0">
+            <a:schemeClr val="accent1"/>
+          </a:fillRef>
+          <a:effectRef idx="0">
+            <a:schemeClr val="accent1"/>
+          </a:effectRef>
+          <a:fontRef idx="minor">
+            <a:schemeClr val="tx1"/>
+          </a:fontRef>
+        </p:style>
+      </p:cxnSp>
+      <p:cxnSp>
+        <p:nvCxnSpPr>
+          <p:cNvPr id="651" name="Прямая со стрелкой 650">
+            <a:extLst>
+              <a:ext uri="{FF2B5EF4-FFF2-40B4-BE49-F238E27FC236}">
+                <a16:creationId xmlns:a16="http://schemas.microsoft.com/office/drawing/2014/main" id="{363989CC-6490-4FD9-A8BB-61E7E26CBB06}"/>
+              </a:ext>
+            </a:extLst>
+          </p:cNvPr>
+          <p:cNvCxnSpPr>
+            <a:cxnSpLocks/>
+            <a:stCxn id="1493" idx="2"/>
+            <a:endCxn id="1498" idx="0"/>
+          </p:cNvCxnSpPr>
+          <p:nvPr/>
+        </p:nvCxnSpPr>
+        <p:spPr>
+          <a:xfrm>
+            <a:off x="5993301" y="3263249"/>
+            <a:ext cx="2331" cy="1472386"/>
+          </a:xfrm>
+          <a:prstGeom prst="straightConnector1">
+            <a:avLst/>
+          </a:prstGeom>
+          <a:ln w="28575">
+            <a:tailEnd type="arrow"/>
+          </a:ln>
+        </p:spPr>
+        <p:style>
+          <a:lnRef idx="1">
+            <a:schemeClr val="accent1"/>
+          </a:lnRef>
+          <a:fillRef idx="0">
+            <a:schemeClr val="accent1"/>
+          </a:fillRef>
+          <a:effectRef idx="0">
+            <a:schemeClr val="accent1"/>
+          </a:effectRef>
+          <a:fontRef idx="minor">
+            <a:schemeClr val="tx1"/>
+          </a:fontRef>
+        </p:style>
+      </p:cxnSp>
+      <p:cxnSp>
+        <p:nvCxnSpPr>
+          <p:cNvPr id="652" name="Shape 248">
+            <a:extLst>
+              <a:ext uri="{FF2B5EF4-FFF2-40B4-BE49-F238E27FC236}">
+                <a16:creationId xmlns:a16="http://schemas.microsoft.com/office/drawing/2014/main" id="{A19F7194-6229-4E94-B53A-331E5689F5FF}"/>
+              </a:ext>
+            </a:extLst>
+          </p:cNvPr>
+          <p:cNvCxnSpPr>
+            <a:cxnSpLocks/>
+            <a:stCxn id="1491" idx="2"/>
+            <a:endCxn id="1482" idx="0"/>
+          </p:cNvCxnSpPr>
+          <p:nvPr/>
+        </p:nvCxnSpPr>
+        <p:spPr>
+          <a:xfrm rot="16200000" flipH="1">
+            <a:off x="6992641" y="4087637"/>
+            <a:ext cx="446613" cy="822051"/>
+          </a:xfrm>
+          <a:prstGeom prst="bentConnector3">
+            <a:avLst>
+              <a:gd name="adj1" fmla="val 50000"/>
+            </a:avLst>
+          </a:prstGeom>
+          <a:ln w="28575">
+            <a:tailEnd type="arrow"/>
+          </a:ln>
+        </p:spPr>
+        <p:style>
+          <a:lnRef idx="1">
+            <a:schemeClr val="accent1"/>
+          </a:lnRef>
+          <a:fillRef idx="0">
+            <a:schemeClr val="accent1"/>
+          </a:fillRef>
+          <a:effectRef idx="0">
+            <a:schemeClr val="accent1"/>
+          </a:effectRef>
+          <a:fontRef idx="minor">
+            <a:schemeClr val="tx1"/>
+          </a:fontRef>
+        </p:style>
+      </p:cxnSp>
+      <p:sp>
+        <p:nvSpPr>
+          <p:cNvPr id="549" name="Прямоугольник 548">
+            <a:extLst>
+              <a:ext uri="{FF2B5EF4-FFF2-40B4-BE49-F238E27FC236}">
+                <a16:creationId xmlns:a16="http://schemas.microsoft.com/office/drawing/2014/main" id="{82858932-5B18-44D1-BE01-A6B33EAE7542}"/>
+              </a:ext>
+            </a:extLst>
+          </p:cNvPr>
+          <p:cNvSpPr/>
+          <p:nvPr/>
+        </p:nvSpPr>
+        <p:spPr>
+          <a:xfrm>
+            <a:off x="3872126" y="4733788"/>
+            <a:ext cx="1156124" cy="645064"/>
+          </a:xfrm>
+          <a:prstGeom prst="rect">
+            <a:avLst/>
+          </a:prstGeom>
+          <a:solidFill>
+            <a:schemeClr val="accent2"/>
+          </a:solidFill>
+          <a:ln w="28575"/>
+        </p:spPr>
+        <p:style>
+          <a:lnRef idx="2">
+            <a:schemeClr val="accent1"/>
+          </a:lnRef>
+          <a:fillRef idx="1">
+            <a:schemeClr val="lt1"/>
+          </a:fillRef>
+          <a:effectRef idx="0">
+            <a:schemeClr val="accent1"/>
+          </a:effectRef>
+          <a:fontRef idx="minor">
+            <a:schemeClr val="dk1"/>
+          </a:fontRef>
+        </p:style>
+        <p:txBody>
+          <a:bodyPr lIns="124733" tIns="62367" rIns="124733" bIns="62367" rtlCol="0" anchor="ctr"/>
+          <a:lstStyle/>
+          <a:p>
+            <a:pPr algn="ctr"/>
+            <a:r>
+              <a:rPr lang="ru-RU" sz="1100" dirty="0"/>
+              <a:t>Создание корпоративизма</a:t>
+            </a:r>
+            <a:endParaRPr lang="ru-RU" sz="600" dirty="0"/>
+          </a:p>
+        </p:txBody>
+      </p:sp>
+      <p:cxnSp>
+        <p:nvCxnSpPr>
+          <p:cNvPr id="552" name="Shape 248">
+            <a:extLst>
+              <a:ext uri="{FF2B5EF4-FFF2-40B4-BE49-F238E27FC236}">
+                <a16:creationId xmlns:a16="http://schemas.microsoft.com/office/drawing/2014/main" id="{FA9DF7EB-2A76-46A5-9DCB-A5BD64AA209A}"/>
+              </a:ext>
+            </a:extLst>
+          </p:cNvPr>
+          <p:cNvCxnSpPr>
+            <a:cxnSpLocks/>
+            <a:stCxn id="1496" idx="2"/>
+            <a:endCxn id="1499" idx="0"/>
+          </p:cNvCxnSpPr>
+          <p:nvPr/>
+        </p:nvCxnSpPr>
+        <p:spPr>
+          <a:xfrm rot="5400000">
+            <a:off x="3871316" y="3060757"/>
+            <a:ext cx="365771" cy="786454"/>
+          </a:xfrm>
+          <a:prstGeom prst="bentConnector3">
+            <a:avLst>
+              <a:gd name="adj1" fmla="val 50000"/>
+            </a:avLst>
+          </a:prstGeom>
+          <a:ln w="28575">
+            <a:tailEnd type="arrow"/>
+          </a:ln>
+        </p:spPr>
+        <p:style>
+          <a:lnRef idx="1">
+            <a:schemeClr val="accent1"/>
+          </a:lnRef>
+          <a:fillRef idx="0">
+            <a:schemeClr val="accent1"/>
+          </a:fillRef>
+          <a:effectRef idx="0">
+            <a:schemeClr val="accent1"/>
+          </a:effectRef>
+          <a:fontRef idx="minor">
+            <a:schemeClr val="tx1"/>
+          </a:fontRef>
+        </p:style>
+      </p:cxnSp>
+      <p:sp>
+        <p:nvSpPr>
+          <p:cNvPr id="564" name="Прямоугольник 563">
+            <a:extLst>
+              <a:ext uri="{FF2B5EF4-FFF2-40B4-BE49-F238E27FC236}">
+                <a16:creationId xmlns:a16="http://schemas.microsoft.com/office/drawing/2014/main" id="{338F98CE-7AEF-4C10-8AAC-957F1E6381E6}"/>
+              </a:ext>
+            </a:extLst>
+          </p:cNvPr>
+          <p:cNvSpPr/>
+          <p:nvPr/>
+        </p:nvSpPr>
+        <p:spPr>
+          <a:xfrm>
+            <a:off x="12668893" y="2610029"/>
+            <a:ext cx="1156124" cy="645064"/>
+          </a:xfrm>
+          <a:prstGeom prst="rect">
+            <a:avLst/>
+          </a:prstGeom>
+          <a:solidFill>
+            <a:schemeClr val="accent2"/>
+          </a:solidFill>
+          <a:ln w="28575"/>
+        </p:spPr>
+        <p:style>
+          <a:lnRef idx="2">
+            <a:schemeClr val="accent1"/>
+          </a:lnRef>
+          <a:fillRef idx="1">
+            <a:schemeClr val="lt1"/>
+          </a:fillRef>
+          <a:effectRef idx="0">
+            <a:schemeClr val="accent1"/>
+          </a:effectRef>
+          <a:fontRef idx="minor">
+            <a:schemeClr val="dk1"/>
+          </a:fontRef>
+        </p:style>
+        <p:txBody>
+          <a:bodyPr lIns="124733" tIns="62367" rIns="124733" bIns="62367" rtlCol="0" anchor="ctr"/>
+          <a:lstStyle/>
+          <a:p>
+            <a:pPr algn="ctr"/>
+            <a:r>
+              <a:rPr lang="ru-RU" sz="1100" dirty="0"/>
+              <a:t>Поглотить остатки фашистских партий</a:t>
+            </a:r>
+            <a:endParaRPr lang="ru-RU" sz="600" dirty="0"/>
+          </a:p>
+        </p:txBody>
+      </p:sp>
+      <p:cxnSp>
+        <p:nvCxnSpPr>
+          <p:cNvPr id="568" name="Shape 248">
+            <a:extLst>
+              <a:ext uri="{FF2B5EF4-FFF2-40B4-BE49-F238E27FC236}">
+                <a16:creationId xmlns:a16="http://schemas.microsoft.com/office/drawing/2014/main" id="{B769464E-8754-4046-8368-89A9BF7ECD8F}"/>
+              </a:ext>
+            </a:extLst>
+          </p:cNvPr>
+          <p:cNvCxnSpPr>
+            <a:cxnSpLocks/>
+            <a:stCxn id="374" idx="2"/>
+            <a:endCxn id="564" idx="0"/>
+          </p:cNvCxnSpPr>
+          <p:nvPr/>
+        </p:nvCxnSpPr>
+        <p:spPr>
+          <a:xfrm rot="5400000">
+            <a:off x="13845916" y="1597554"/>
+            <a:ext cx="413515" cy="1611435"/>
+          </a:xfrm>
+          <a:prstGeom prst="bentConnector3">
+            <a:avLst>
+              <a:gd name="adj1" fmla="val 50000"/>
+            </a:avLst>
+          </a:prstGeom>
+          <a:ln w="28575">
+            <a:prstDash val="dash"/>
+            <a:tailEnd type="arrow"/>
+          </a:ln>
+        </p:spPr>
+        <p:style>
+          <a:lnRef idx="1">
+            <a:schemeClr val="accent1"/>
+          </a:lnRef>
+          <a:fillRef idx="0">
+            <a:schemeClr val="accent1"/>
+          </a:fillRef>
+          <a:effectRef idx="0">
+            <a:schemeClr val="accent1"/>
+          </a:effectRef>
+          <a:fontRef idx="minor">
+            <a:schemeClr val="tx1"/>
+          </a:fontRef>
+        </p:style>
+      </p:cxnSp>
+      <p:cxnSp>
+        <p:nvCxnSpPr>
+          <p:cNvPr id="577" name="Shape 248">
+            <a:extLst>
+              <a:ext uri="{FF2B5EF4-FFF2-40B4-BE49-F238E27FC236}">
+                <a16:creationId xmlns:a16="http://schemas.microsoft.com/office/drawing/2014/main" id="{DF793703-55F8-4062-9747-50404B29250D}"/>
+              </a:ext>
+            </a:extLst>
+          </p:cNvPr>
+          <p:cNvCxnSpPr>
+            <a:cxnSpLocks/>
+            <a:stCxn id="1497" idx="2"/>
+            <a:endCxn id="564" idx="0"/>
+          </p:cNvCxnSpPr>
+          <p:nvPr/>
+        </p:nvCxnSpPr>
+        <p:spPr>
+          <a:xfrm rot="16200000" flipH="1">
+            <a:off x="11450173" y="813246"/>
+            <a:ext cx="397567" cy="3195997"/>
+          </a:xfrm>
+          <a:prstGeom prst="bentConnector3">
+            <a:avLst>
+              <a:gd name="adj1" fmla="val 50000"/>
+            </a:avLst>
+          </a:prstGeom>
+          <a:ln w="28575">
+            <a:prstDash val="dash"/>
+            <a:tailEnd type="arrow"/>
+          </a:ln>
+        </p:spPr>
+        <p:style>
+          <a:lnRef idx="1">
+            <a:schemeClr val="accent1"/>
+          </a:lnRef>
+          <a:fillRef idx="0">
+            <a:schemeClr val="accent1"/>
+          </a:fillRef>
+          <a:effectRef idx="0">
+            <a:schemeClr val="accent1"/>
+          </a:effectRef>
+          <a:fontRef idx="minor">
+            <a:schemeClr val="tx1"/>
+          </a:fontRef>
+        </p:style>
+      </p:cxnSp>
+      <p:cxnSp>
+        <p:nvCxnSpPr>
+          <p:cNvPr id="565" name="Shape 248">
+            <a:extLst>
+              <a:ext uri="{FF2B5EF4-FFF2-40B4-BE49-F238E27FC236}">
+                <a16:creationId xmlns:a16="http://schemas.microsoft.com/office/drawing/2014/main" id="{6DDACF0C-7C13-47CC-90FA-1593CFD68C2F}"/>
               </a:ext>
             </a:extLst>
           </p:cNvPr>
@@ -28555,7 +29022,530 @@
             </a:avLst>
           </a:prstGeom>
           <a:ln w="28575">
-            <a:prstDash val="dash"/>
+            <a:tailEnd type="arrow"/>
+          </a:ln>
+        </p:spPr>
+        <p:style>
+          <a:lnRef idx="1">
+            <a:schemeClr val="accent1"/>
+          </a:lnRef>
+          <a:fillRef idx="0">
+            <a:schemeClr val="accent1"/>
+          </a:fillRef>
+          <a:effectRef idx="0">
+            <a:schemeClr val="accent1"/>
+          </a:effectRef>
+          <a:fontRef idx="minor">
+            <a:schemeClr val="tx1"/>
+          </a:fontRef>
+        </p:style>
+      </p:cxnSp>
+      <p:cxnSp>
+        <p:nvCxnSpPr>
+          <p:cNvPr id="585" name="Прямая со стрелкой 584">
+            <a:extLst>
+              <a:ext uri="{FF2B5EF4-FFF2-40B4-BE49-F238E27FC236}">
+                <a16:creationId xmlns:a16="http://schemas.microsoft.com/office/drawing/2014/main" id="{291B2CB7-9934-4D6A-8A40-95FEC822F256}"/>
+              </a:ext>
+            </a:extLst>
+          </p:cNvPr>
+          <p:cNvCxnSpPr>
+            <a:cxnSpLocks/>
+            <a:stCxn id="581" idx="2"/>
+            <a:endCxn id="580" idx="0"/>
+          </p:cNvCxnSpPr>
+          <p:nvPr/>
+        </p:nvCxnSpPr>
+        <p:spPr>
+          <a:xfrm>
+            <a:off x="8464511" y="7384787"/>
+            <a:ext cx="372" cy="355806"/>
+          </a:xfrm>
+          <a:prstGeom prst="straightConnector1">
+            <a:avLst/>
+          </a:prstGeom>
+          <a:ln w="28575">
+            <a:tailEnd type="arrow"/>
+          </a:ln>
+        </p:spPr>
+        <p:style>
+          <a:lnRef idx="1">
+            <a:schemeClr val="accent1"/>
+          </a:lnRef>
+          <a:fillRef idx="0">
+            <a:schemeClr val="accent1"/>
+          </a:fillRef>
+          <a:effectRef idx="0">
+            <a:schemeClr val="accent1"/>
+          </a:effectRef>
+          <a:fontRef idx="minor">
+            <a:schemeClr val="tx1"/>
+          </a:fontRef>
+        </p:style>
+      </p:cxnSp>
+      <p:cxnSp>
+        <p:nvCxnSpPr>
+          <p:cNvPr id="588" name="Shape 248">
+            <a:extLst>
+              <a:ext uri="{FF2B5EF4-FFF2-40B4-BE49-F238E27FC236}">
+                <a16:creationId xmlns:a16="http://schemas.microsoft.com/office/drawing/2014/main" id="{9536F20D-B439-4E60-9398-FE87C0B00B2C}"/>
+              </a:ext>
+            </a:extLst>
+          </p:cNvPr>
+          <p:cNvCxnSpPr>
+            <a:cxnSpLocks/>
+            <a:stCxn id="567" idx="2"/>
+            <a:endCxn id="576" idx="0"/>
+          </p:cNvCxnSpPr>
+          <p:nvPr/>
+        </p:nvCxnSpPr>
+        <p:spPr>
+          <a:xfrm rot="16200000" flipH="1">
+            <a:off x="9072852" y="5769324"/>
+            <a:ext cx="369764" cy="1586447"/>
+          </a:xfrm>
+          <a:prstGeom prst="bentConnector3">
+            <a:avLst>
+              <a:gd name="adj1" fmla="val 50000"/>
+            </a:avLst>
+          </a:prstGeom>
+          <a:ln w="28575">
+            <a:tailEnd type="arrow"/>
+          </a:ln>
+        </p:spPr>
+        <p:style>
+          <a:lnRef idx="1">
+            <a:schemeClr val="accent1"/>
+          </a:lnRef>
+          <a:fillRef idx="0">
+            <a:schemeClr val="accent1"/>
+          </a:fillRef>
+          <a:effectRef idx="0">
+            <a:schemeClr val="accent1"/>
+          </a:effectRef>
+          <a:fontRef idx="minor">
+            <a:schemeClr val="tx1"/>
+          </a:fontRef>
+        </p:style>
+      </p:cxnSp>
+      <p:sp>
+        <p:nvSpPr>
+          <p:cNvPr id="591" name="Прямоугольник 590">
+            <a:extLst>
+              <a:ext uri="{FF2B5EF4-FFF2-40B4-BE49-F238E27FC236}">
+                <a16:creationId xmlns:a16="http://schemas.microsoft.com/office/drawing/2014/main" id="{3087B603-08DA-433E-9357-A61BD3FEBE1A}"/>
+              </a:ext>
+            </a:extLst>
+          </p:cNvPr>
+          <p:cNvSpPr/>
+          <p:nvPr/>
+        </p:nvSpPr>
+        <p:spPr>
+          <a:xfrm>
+            <a:off x="6226860" y="6739723"/>
+            <a:ext cx="1156124" cy="645064"/>
+          </a:xfrm>
+          <a:prstGeom prst="rect">
+            <a:avLst/>
+          </a:prstGeom>
+          <a:solidFill>
+            <a:schemeClr val="accent2"/>
+          </a:solidFill>
+          <a:ln w="28575"/>
+        </p:spPr>
+        <p:style>
+          <a:lnRef idx="2">
+            <a:schemeClr val="accent1"/>
+          </a:lnRef>
+          <a:fillRef idx="1">
+            <a:schemeClr val="lt1"/>
+          </a:fillRef>
+          <a:effectRef idx="0">
+            <a:schemeClr val="accent1"/>
+          </a:effectRef>
+          <a:fontRef idx="minor">
+            <a:schemeClr val="dk1"/>
+          </a:fontRef>
+        </p:style>
+        <p:txBody>
+          <a:bodyPr lIns="124733" tIns="62367" rIns="124733" bIns="62367" rtlCol="0" anchor="ctr"/>
+          <a:lstStyle/>
+          <a:p>
+            <a:pPr algn="ctr"/>
+            <a:r>
+              <a:rPr lang="ru-RU" sz="1100" dirty="0"/>
+              <a:t>Подготовиться к морским сражениям</a:t>
+            </a:r>
+            <a:endParaRPr lang="ru-RU" sz="600" dirty="0"/>
+          </a:p>
+        </p:txBody>
+      </p:sp>
+      <p:sp>
+        <p:nvSpPr>
+          <p:cNvPr id="595" name="Прямоугольник 594">
+            <a:extLst>
+              <a:ext uri="{FF2B5EF4-FFF2-40B4-BE49-F238E27FC236}">
+                <a16:creationId xmlns:a16="http://schemas.microsoft.com/office/drawing/2014/main" id="{CD5D1CC7-9A61-412B-88F7-274A3F635509}"/>
+              </a:ext>
+            </a:extLst>
+          </p:cNvPr>
+          <p:cNvSpPr/>
+          <p:nvPr/>
+        </p:nvSpPr>
+        <p:spPr>
+          <a:xfrm>
+            <a:off x="6226655" y="7743186"/>
+            <a:ext cx="1156124" cy="645064"/>
+          </a:xfrm>
+          <a:prstGeom prst="rect">
+            <a:avLst/>
+          </a:prstGeom>
+          <a:solidFill>
+            <a:schemeClr val="accent2"/>
+          </a:solidFill>
+          <a:ln w="28575"/>
+        </p:spPr>
+        <p:style>
+          <a:lnRef idx="2">
+            <a:schemeClr val="accent1"/>
+          </a:lnRef>
+          <a:fillRef idx="1">
+            <a:schemeClr val="lt1"/>
+          </a:fillRef>
+          <a:effectRef idx="0">
+            <a:schemeClr val="accent1"/>
+          </a:effectRef>
+          <a:fontRef idx="minor">
+            <a:schemeClr val="dk1"/>
+          </a:fontRef>
+        </p:style>
+        <p:txBody>
+          <a:bodyPr lIns="124733" tIns="62367" rIns="124733" bIns="62367" rtlCol="0" anchor="ctr"/>
+          <a:lstStyle/>
+          <a:p>
+            <a:pPr algn="ctr"/>
+            <a:r>
+              <a:rPr lang="ru-RU" sz="1050" dirty="0"/>
+              <a:t>Реализовать Германские претензии на Мадагаскар</a:t>
+            </a:r>
+            <a:endParaRPr lang="ru-RU" sz="500" dirty="0"/>
+          </a:p>
+        </p:txBody>
+      </p:sp>
+      <p:cxnSp>
+        <p:nvCxnSpPr>
+          <p:cNvPr id="597" name="Shape 248">
+            <a:extLst>
+              <a:ext uri="{FF2B5EF4-FFF2-40B4-BE49-F238E27FC236}">
+                <a16:creationId xmlns:a16="http://schemas.microsoft.com/office/drawing/2014/main" id="{F2B556EF-3F95-4572-AD62-3371DFE58299}"/>
+              </a:ext>
+            </a:extLst>
+          </p:cNvPr>
+          <p:cNvCxnSpPr>
+            <a:cxnSpLocks/>
+            <a:stCxn id="567" idx="2"/>
+            <a:endCxn id="591" idx="0"/>
+          </p:cNvCxnSpPr>
+          <p:nvPr/>
+        </p:nvCxnSpPr>
+        <p:spPr>
+          <a:xfrm rot="5400000">
+            <a:off x="7453689" y="5728900"/>
+            <a:ext cx="362057" cy="1659589"/>
+          </a:xfrm>
+          <a:prstGeom prst="bentConnector3">
+            <a:avLst>
+              <a:gd name="adj1" fmla="val 50000"/>
+            </a:avLst>
+          </a:prstGeom>
+          <a:ln w="28575">
+            <a:tailEnd type="arrow"/>
+          </a:ln>
+        </p:spPr>
+        <p:style>
+          <a:lnRef idx="1">
+            <a:schemeClr val="accent1"/>
+          </a:lnRef>
+          <a:fillRef idx="0">
+            <a:schemeClr val="accent1"/>
+          </a:fillRef>
+          <a:effectRef idx="0">
+            <a:schemeClr val="accent1"/>
+          </a:effectRef>
+          <a:fontRef idx="minor">
+            <a:schemeClr val="tx1"/>
+          </a:fontRef>
+        </p:style>
+      </p:cxnSp>
+      <p:cxnSp>
+        <p:nvCxnSpPr>
+          <p:cNvPr id="600" name="Прямая со стрелкой 599">
+            <a:extLst>
+              <a:ext uri="{FF2B5EF4-FFF2-40B4-BE49-F238E27FC236}">
+                <a16:creationId xmlns:a16="http://schemas.microsoft.com/office/drawing/2014/main" id="{BFB97289-389B-4E0B-9DB7-83C8425966D1}"/>
+              </a:ext>
+            </a:extLst>
+          </p:cNvPr>
+          <p:cNvCxnSpPr>
+            <a:cxnSpLocks/>
+            <a:stCxn id="591" idx="2"/>
+            <a:endCxn id="595" idx="0"/>
+          </p:cNvCxnSpPr>
+          <p:nvPr/>
+        </p:nvCxnSpPr>
+        <p:spPr>
+          <a:xfrm flipH="1">
+            <a:off x="6804717" y="7384787"/>
+            <a:ext cx="205" cy="358399"/>
+          </a:xfrm>
+          <a:prstGeom prst="straightConnector1">
+            <a:avLst/>
+          </a:prstGeom>
+          <a:ln w="28575">
+            <a:tailEnd type="arrow"/>
+          </a:ln>
+        </p:spPr>
+        <p:style>
+          <a:lnRef idx="1">
+            <a:schemeClr val="accent1"/>
+          </a:lnRef>
+          <a:fillRef idx="0">
+            <a:schemeClr val="accent1"/>
+          </a:fillRef>
+          <a:effectRef idx="0">
+            <a:schemeClr val="accent1"/>
+          </a:effectRef>
+          <a:fontRef idx="minor">
+            <a:schemeClr val="tx1"/>
+          </a:fontRef>
+        </p:style>
+      </p:cxnSp>
+      <p:sp>
+        <p:nvSpPr>
+          <p:cNvPr id="602" name="Прямоугольник 601">
+            <a:extLst>
+              <a:ext uri="{FF2B5EF4-FFF2-40B4-BE49-F238E27FC236}">
+                <a16:creationId xmlns:a16="http://schemas.microsoft.com/office/drawing/2014/main" id="{D83061F8-C21A-46E5-9B9C-A2DB5CD77725}"/>
+              </a:ext>
+            </a:extLst>
+          </p:cNvPr>
+          <p:cNvSpPr/>
+          <p:nvPr/>
+        </p:nvSpPr>
+        <p:spPr>
+          <a:xfrm>
+            <a:off x="9472896" y="7739720"/>
+            <a:ext cx="1156124" cy="645064"/>
+          </a:xfrm>
+          <a:prstGeom prst="rect">
+            <a:avLst/>
+          </a:prstGeom>
+          <a:solidFill>
+            <a:schemeClr val="accent2"/>
+          </a:solidFill>
+          <a:ln w="28575"/>
+        </p:spPr>
+        <p:style>
+          <a:lnRef idx="2">
+            <a:schemeClr val="accent1"/>
+          </a:lnRef>
+          <a:fillRef idx="1">
+            <a:schemeClr val="lt1"/>
+          </a:fillRef>
+          <a:effectRef idx="0">
+            <a:schemeClr val="accent1"/>
+          </a:effectRef>
+          <a:fontRef idx="minor">
+            <a:schemeClr val="dk1"/>
+          </a:fontRef>
+        </p:style>
+        <p:txBody>
+          <a:bodyPr lIns="124733" tIns="62367" rIns="124733" bIns="62367" rtlCol="0" anchor="ctr"/>
+          <a:lstStyle/>
+          <a:p>
+            <a:pPr algn="ctr"/>
+            <a:r>
+              <a:rPr lang="ru-RU" sz="1100" dirty="0"/>
+              <a:t>Вернуть немецкую Ост-Африку</a:t>
+            </a:r>
+            <a:endParaRPr lang="ru-RU" sz="600" dirty="0"/>
+          </a:p>
+        </p:txBody>
+      </p:sp>
+      <p:cxnSp>
+        <p:nvCxnSpPr>
+          <p:cNvPr id="610" name="Прямая со стрелкой 609">
+            <a:extLst>
+              <a:ext uri="{FF2B5EF4-FFF2-40B4-BE49-F238E27FC236}">
+                <a16:creationId xmlns:a16="http://schemas.microsoft.com/office/drawing/2014/main" id="{B5BCF7FD-E1AD-4262-8879-278452FAD625}"/>
+              </a:ext>
+            </a:extLst>
+          </p:cNvPr>
+          <p:cNvCxnSpPr>
+            <a:cxnSpLocks/>
+            <a:stCxn id="576" idx="2"/>
+            <a:endCxn id="602" idx="0"/>
+          </p:cNvCxnSpPr>
+          <p:nvPr/>
+        </p:nvCxnSpPr>
+        <p:spPr>
+          <a:xfrm>
+            <a:off x="10050958" y="7392494"/>
+            <a:ext cx="0" cy="347226"/>
+          </a:xfrm>
+          <a:prstGeom prst="straightConnector1">
+            <a:avLst/>
+          </a:prstGeom>
+          <a:ln w="28575">
+            <a:tailEnd type="arrow"/>
+          </a:ln>
+        </p:spPr>
+        <p:style>
+          <a:lnRef idx="1">
+            <a:schemeClr val="accent1"/>
+          </a:lnRef>
+          <a:fillRef idx="0">
+            <a:schemeClr val="accent1"/>
+          </a:fillRef>
+          <a:effectRef idx="0">
+            <a:schemeClr val="accent1"/>
+          </a:effectRef>
+          <a:fontRef idx="minor">
+            <a:schemeClr val="tx1"/>
+          </a:fontRef>
+        </p:style>
+      </p:cxnSp>
+      <p:sp>
+        <p:nvSpPr>
+          <p:cNvPr id="611" name="Прямоугольник 610">
+            <a:extLst>
+              <a:ext uri="{FF2B5EF4-FFF2-40B4-BE49-F238E27FC236}">
+                <a16:creationId xmlns:a16="http://schemas.microsoft.com/office/drawing/2014/main" id="{21CC329F-CAB2-4C25-B4B2-92D8E197941C}"/>
+              </a:ext>
+            </a:extLst>
+          </p:cNvPr>
+          <p:cNvSpPr/>
+          <p:nvPr/>
+        </p:nvSpPr>
+        <p:spPr>
+          <a:xfrm>
+            <a:off x="8692732" y="8809829"/>
+            <a:ext cx="1156124" cy="645064"/>
+          </a:xfrm>
+          <a:prstGeom prst="rect">
+            <a:avLst/>
+          </a:prstGeom>
+          <a:solidFill>
+            <a:schemeClr val="accent2"/>
+          </a:solidFill>
+          <a:ln w="28575"/>
+        </p:spPr>
+        <p:style>
+          <a:lnRef idx="2">
+            <a:schemeClr val="accent1"/>
+          </a:lnRef>
+          <a:fillRef idx="1">
+            <a:schemeClr val="lt1"/>
+          </a:fillRef>
+          <a:effectRef idx="0">
+            <a:schemeClr val="accent1"/>
+          </a:effectRef>
+          <a:fontRef idx="minor">
+            <a:schemeClr val="dk1"/>
+          </a:fontRef>
+        </p:style>
+        <p:txBody>
+          <a:bodyPr lIns="124733" tIns="62367" rIns="124733" bIns="62367" rtlCol="0" anchor="ctr"/>
+          <a:lstStyle/>
+          <a:p>
+            <a:pPr algn="ctr"/>
+            <a:r>
+              <a:rPr lang="ru-RU" sz="1050" dirty="0"/>
+              <a:t>Захватить окружённое Конго</a:t>
+            </a:r>
+            <a:endParaRPr lang="ru-RU" sz="500" dirty="0"/>
+          </a:p>
+        </p:txBody>
+      </p:sp>
+      <p:sp>
+        <p:nvSpPr>
+          <p:cNvPr id="613" name="Прямоугольник 612">
+            <a:extLst>
+              <a:ext uri="{FF2B5EF4-FFF2-40B4-BE49-F238E27FC236}">
+                <a16:creationId xmlns:a16="http://schemas.microsoft.com/office/drawing/2014/main" id="{7283AFB6-D368-4705-8299-3C9BD3091A27}"/>
+              </a:ext>
+            </a:extLst>
+          </p:cNvPr>
+          <p:cNvSpPr/>
+          <p:nvPr/>
+        </p:nvSpPr>
+        <p:spPr>
+          <a:xfrm>
+            <a:off x="7046775" y="8809829"/>
+            <a:ext cx="1156124" cy="645064"/>
+          </a:xfrm>
+          <a:prstGeom prst="rect">
+            <a:avLst/>
+          </a:prstGeom>
+          <a:solidFill>
+            <a:schemeClr val="accent2"/>
+          </a:solidFill>
+          <a:ln w="28575"/>
+        </p:spPr>
+        <p:style>
+          <a:lnRef idx="2">
+            <a:schemeClr val="accent1"/>
+          </a:lnRef>
+          <a:fillRef idx="1">
+            <a:schemeClr val="lt1"/>
+          </a:fillRef>
+          <a:effectRef idx="0">
+            <a:schemeClr val="accent1"/>
+          </a:effectRef>
+          <a:fontRef idx="minor">
+            <a:schemeClr val="dk1"/>
+          </a:fontRef>
+        </p:style>
+        <p:txBody>
+          <a:bodyPr lIns="124733" tIns="62367" rIns="124733" bIns="62367" rtlCol="0" anchor="ctr"/>
+          <a:lstStyle/>
+          <a:p>
+            <a:pPr algn="ctr"/>
+            <a:r>
+              <a:rPr lang="ru-RU" sz="1050" dirty="0"/>
+              <a:t>Расшириться на западное побережье</a:t>
+            </a:r>
+            <a:endParaRPr lang="ru-RU" sz="500" dirty="0"/>
+          </a:p>
+        </p:txBody>
+      </p:sp>
+      <p:cxnSp>
+        <p:nvCxnSpPr>
+          <p:cNvPr id="617" name="Shape 248">
+            <a:extLst>
+              <a:ext uri="{FF2B5EF4-FFF2-40B4-BE49-F238E27FC236}">
+                <a16:creationId xmlns:a16="http://schemas.microsoft.com/office/drawing/2014/main" id="{69C4231D-857D-4155-8CF5-5FDA56782EA5}"/>
+              </a:ext>
+            </a:extLst>
+          </p:cNvPr>
+          <p:cNvCxnSpPr>
+            <a:cxnSpLocks/>
+            <a:stCxn id="602" idx="2"/>
+            <a:endCxn id="611" idx="0"/>
+          </p:cNvCxnSpPr>
+          <p:nvPr/>
+        </p:nvCxnSpPr>
+        <p:spPr>
+          <a:xfrm rot="5400000">
+            <a:off x="9448354" y="8207224"/>
+            <a:ext cx="425045" cy="780164"/>
+          </a:xfrm>
+          <a:prstGeom prst="bentConnector3">
+            <a:avLst>
+              <a:gd name="adj1" fmla="val 50000"/>
+            </a:avLst>
+          </a:prstGeom>
+          <a:ln w="28575">
             <a:tailEnd type="arrow"/>
           </a:ln>
         </p:spPr>
@@ -28579,21 +29569,21 @@
           <p:cNvPr id="619" name="Shape 248">
             <a:extLst>
               <a:ext uri="{FF2B5EF4-FFF2-40B4-BE49-F238E27FC236}">
-                <a16:creationId xmlns:a16="http://schemas.microsoft.com/office/drawing/2014/main" id="{0370A54B-7A7D-47F2-8143-8C0BAAD8AF99}"/>
+                <a16:creationId xmlns:a16="http://schemas.microsoft.com/office/drawing/2014/main" id="{1E1475D4-9E54-4052-8747-C48C6A99F70C}"/>
               </a:ext>
             </a:extLst>
           </p:cNvPr>
           <p:cNvCxnSpPr>
             <a:cxnSpLocks/>
-            <a:stCxn id="1495" idx="2"/>
-            <a:endCxn id="1481" idx="0"/>
+            <a:stCxn id="580" idx="2"/>
+            <a:endCxn id="611" idx="0"/>
           </p:cNvCxnSpPr>
           <p:nvPr/>
         </p:nvCxnSpPr>
         <p:spPr>
-          <a:xfrm rot="5400000">
-            <a:off x="8687681" y="3028711"/>
-            <a:ext cx="368564" cy="835655"/>
+          <a:xfrm rot="16200000" flipH="1">
+            <a:off x="8655752" y="8194787"/>
+            <a:ext cx="424172" cy="805911"/>
           </a:xfrm>
           <a:prstGeom prst="bentConnector3">
             <a:avLst>
@@ -28601,7 +29591,6 @@
             </a:avLst>
           </a:prstGeom>
           <a:ln w="28575">
-            <a:prstDash val="dash"/>
             <a:tailEnd type="arrow"/>
           </a:ln>
         </p:spPr>
@@ -28622,67 +29611,24 @@
       </p:cxnSp>
       <p:cxnSp>
         <p:nvCxnSpPr>
-          <p:cNvPr id="620" name="Прямая со стрелкой 619">
-            <a:extLst>
-              <a:ext uri="{FF2B5EF4-FFF2-40B4-BE49-F238E27FC236}">
-                <a16:creationId xmlns:a16="http://schemas.microsoft.com/office/drawing/2014/main" id="{E42CDB59-9E95-4E26-A6B1-F477D3D85B35}"/>
+          <p:cNvPr id="622" name="Shape 248">
+            <a:extLst>
+              <a:ext uri="{FF2B5EF4-FFF2-40B4-BE49-F238E27FC236}">
+                <a16:creationId xmlns:a16="http://schemas.microsoft.com/office/drawing/2014/main" id="{7787AD86-04C7-43B7-91AD-71853EB2F7ED}"/>
               </a:ext>
             </a:extLst>
           </p:cNvPr>
           <p:cNvCxnSpPr>
             <a:cxnSpLocks/>
-            <a:stCxn id="1478" idx="2"/>
-            <a:endCxn id="1492" idx="0"/>
+            <a:stCxn id="580" idx="2"/>
+            <a:endCxn id="613" idx="0"/>
           </p:cNvCxnSpPr>
           <p:nvPr/>
         </p:nvCxnSpPr>
         <p:spPr>
-          <a:xfrm>
-            <a:off x="8448099" y="1179654"/>
-            <a:ext cx="5396" cy="387013"/>
-          </a:xfrm>
-          <a:prstGeom prst="straightConnector1">
-            <a:avLst/>
-          </a:prstGeom>
-          <a:ln w="28575">
-            <a:tailEnd type="arrow"/>
-          </a:ln>
-        </p:spPr>
-        <p:style>
-          <a:lnRef idx="1">
-            <a:schemeClr val="accent1"/>
-          </a:lnRef>
-          <a:fillRef idx="0">
-            <a:schemeClr val="accent1"/>
-          </a:fillRef>
-          <a:effectRef idx="0">
-            <a:schemeClr val="accent1"/>
-          </a:effectRef>
-          <a:fontRef idx="minor">
-            <a:schemeClr val="tx1"/>
-          </a:fontRef>
-        </p:style>
-      </p:cxnSp>
-      <p:cxnSp>
-        <p:nvCxnSpPr>
-          <p:cNvPr id="621" name="Shape 248">
-            <a:extLst>
-              <a:ext uri="{FF2B5EF4-FFF2-40B4-BE49-F238E27FC236}">
-                <a16:creationId xmlns:a16="http://schemas.microsoft.com/office/drawing/2014/main" id="{9036A22A-21B4-44AC-9D44-3D79E43DD9FD}"/>
-              </a:ext>
-            </a:extLst>
-          </p:cNvPr>
-          <p:cNvCxnSpPr>
-            <a:cxnSpLocks/>
-            <a:stCxn id="1478" idx="2"/>
-            <a:endCxn id="524" idx="0"/>
-          </p:cNvCxnSpPr>
-          <p:nvPr/>
-        </p:nvCxnSpPr>
-        <p:spPr>
           <a:xfrm rot="5400000">
-            <a:off x="7022758" y="132801"/>
-            <a:ext cx="378488" cy="2472194"/>
+            <a:off x="7832774" y="8177720"/>
+            <a:ext cx="424172" cy="840046"/>
           </a:xfrm>
           <a:prstGeom prst="bentConnector3">
             <a:avLst>
@@ -28710,24 +29656,24 @@
       </p:cxnSp>
       <p:cxnSp>
         <p:nvCxnSpPr>
-          <p:cNvPr id="623" name="Shape 248">
-            <a:extLst>
-              <a:ext uri="{FF2B5EF4-FFF2-40B4-BE49-F238E27FC236}">
-                <a16:creationId xmlns:a16="http://schemas.microsoft.com/office/drawing/2014/main" id="{BC288100-1E5C-4932-993A-4E95A253CA1D}"/>
+          <p:cNvPr id="642" name="Shape 248">
+            <a:extLst>
+              <a:ext uri="{FF2B5EF4-FFF2-40B4-BE49-F238E27FC236}">
+                <a16:creationId xmlns:a16="http://schemas.microsoft.com/office/drawing/2014/main" id="{E47C16FE-2138-44CF-897B-A6B2320BB371}"/>
               </a:ext>
             </a:extLst>
           </p:cNvPr>
           <p:cNvCxnSpPr>
             <a:cxnSpLocks/>
-            <a:stCxn id="1478" idx="2"/>
-            <a:endCxn id="1494" idx="0"/>
+            <a:stCxn id="595" idx="2"/>
+            <a:endCxn id="613" idx="0"/>
           </p:cNvCxnSpPr>
           <p:nvPr/>
         </p:nvCxnSpPr>
         <p:spPr>
-          <a:xfrm rot="5400000">
-            <a:off x="6263247" y="-633404"/>
-            <a:ext cx="371795" cy="3997911"/>
+          <a:xfrm rot="16200000" flipH="1">
+            <a:off x="7003988" y="8188979"/>
+            <a:ext cx="421579" cy="820120"/>
           </a:xfrm>
           <a:prstGeom prst="bentConnector3">
             <a:avLst>
@@ -28753,26 +29699,78 @@
           </a:fontRef>
         </p:style>
       </p:cxnSp>
+      <p:sp>
+        <p:nvSpPr>
+          <p:cNvPr id="646" name="Прямоугольник 645">
+            <a:extLst>
+              <a:ext uri="{FF2B5EF4-FFF2-40B4-BE49-F238E27FC236}">
+                <a16:creationId xmlns:a16="http://schemas.microsoft.com/office/drawing/2014/main" id="{677FE684-BBCF-47A3-8D1F-4951D59DC222}"/>
+              </a:ext>
+            </a:extLst>
+          </p:cNvPr>
+          <p:cNvSpPr/>
+          <p:nvPr/>
+        </p:nvSpPr>
+        <p:spPr>
+          <a:xfrm>
+            <a:off x="7865215" y="9797238"/>
+            <a:ext cx="1156124" cy="645064"/>
+          </a:xfrm>
+          <a:prstGeom prst="rect">
+            <a:avLst/>
+          </a:prstGeom>
+          <a:solidFill>
+            <a:schemeClr val="accent2"/>
+          </a:solidFill>
+          <a:ln w="28575"/>
+        </p:spPr>
+        <p:style>
+          <a:lnRef idx="2">
+            <a:schemeClr val="accent1"/>
+          </a:lnRef>
+          <a:fillRef idx="1">
+            <a:schemeClr val="lt1"/>
+          </a:fillRef>
+          <a:effectRef idx="0">
+            <a:schemeClr val="accent1"/>
+          </a:effectRef>
+          <a:fontRef idx="minor">
+            <a:schemeClr val="dk1"/>
+          </a:fontRef>
+        </p:style>
+        <p:txBody>
+          <a:bodyPr lIns="124733" tIns="62367" rIns="124733" bIns="62367" rtlCol="0" anchor="ctr"/>
+          <a:lstStyle/>
+          <a:p>
+            <a:pPr algn="ctr"/>
+            <a:r>
+              <a:rPr lang="ru-RU" sz="1100" dirty="0"/>
+              <a:t>Перераспределить сферы влияния в Африке</a:t>
+            </a:r>
+            <a:endParaRPr lang="ru-RU" sz="600" dirty="0"/>
+          </a:p>
+        </p:txBody>
+      </p:sp>
       <p:cxnSp>
         <p:nvCxnSpPr>
-          <p:cNvPr id="643" name="Shape 248">
-            <a:extLst>
-              <a:ext uri="{FF2B5EF4-FFF2-40B4-BE49-F238E27FC236}">
-                <a16:creationId xmlns:a16="http://schemas.microsoft.com/office/drawing/2014/main" id="{8F728FDD-25B3-40AF-9994-4CC67545C95A}"/>
+          <p:cNvPr id="648" name="Shape 248">
+            <a:extLst>
+              <a:ext uri="{FF2B5EF4-FFF2-40B4-BE49-F238E27FC236}">
+                <a16:creationId xmlns:a16="http://schemas.microsoft.com/office/drawing/2014/main" id="{4A616F87-47AF-48D5-A740-7ABA7EC69C06}"/>
               </a:ext>
             </a:extLst>
           </p:cNvPr>
           <p:cNvCxnSpPr>
             <a:cxnSpLocks/>
-            <a:stCxn id="524" idx="2"/>
-            <a:endCxn id="1493" idx="0"/>
+            <a:stCxn id="613" idx="2"/>
+            <a:endCxn id="646" idx="0"/>
           </p:cNvCxnSpPr>
           <p:nvPr/>
         </p:nvCxnSpPr>
         <p:spPr>
           <a:xfrm rot="16200000" flipH="1">
-            <a:off x="5777114" y="2401997"/>
-            <a:ext cx="414979" cy="17396"/>
+            <a:off x="7862885" y="9216845"/>
+            <a:ext cx="342345" cy="818440"/>
           </a:xfrm>
           <a:prstGeom prst="bentConnector3">
             <a:avLst>
@@ -28780,7 +29778,6 @@
             </a:avLst>
           </a:prstGeom>
           <a:ln w="28575">
-            <a:prstDash val="dash"/>
             <a:tailEnd type="arrow"/>
           </a:ln>
         </p:spPr>
@@ -28801,159 +29798,24 @@
       </p:cxnSp>
       <p:cxnSp>
         <p:nvCxnSpPr>
-          <p:cNvPr id="645" name="Shape 248">
-            <a:extLst>
-              <a:ext uri="{FF2B5EF4-FFF2-40B4-BE49-F238E27FC236}">
-                <a16:creationId xmlns:a16="http://schemas.microsoft.com/office/drawing/2014/main" id="{DE8D053D-6BBF-4676-9BC7-4EA2FE4F9DF7}"/>
+          <p:cNvPr id="653" name="Shape 248">
+            <a:extLst>
+              <a:ext uri="{FF2B5EF4-FFF2-40B4-BE49-F238E27FC236}">
+                <a16:creationId xmlns:a16="http://schemas.microsoft.com/office/drawing/2014/main" id="{7BA58155-8478-4C9D-997F-2FE893C1D04B}"/>
               </a:ext>
             </a:extLst>
           </p:cNvPr>
           <p:cNvCxnSpPr>
             <a:cxnSpLocks/>
-            <a:stCxn id="524" idx="2"/>
-            <a:endCxn id="1491" idx="0"/>
+            <a:stCxn id="611" idx="2"/>
+            <a:endCxn id="646" idx="0"/>
           </p:cNvCxnSpPr>
           <p:nvPr/>
         </p:nvCxnSpPr>
         <p:spPr>
-          <a:xfrm rot="16200000" flipH="1">
-            <a:off x="5676870" y="2502240"/>
-            <a:ext cx="1427087" cy="829017"/>
-          </a:xfrm>
-          <a:prstGeom prst="bentConnector3">
-            <a:avLst>
-              <a:gd name="adj1" fmla="val 12138"/>
-            </a:avLst>
-          </a:prstGeom>
-          <a:ln w="28575">
-            <a:prstDash val="dash"/>
-            <a:tailEnd type="arrow"/>
-          </a:ln>
-        </p:spPr>
-        <p:style>
-          <a:lnRef idx="1">
-            <a:schemeClr val="accent1"/>
-          </a:lnRef>
-          <a:fillRef idx="0">
-            <a:schemeClr val="accent1"/>
-          </a:fillRef>
-          <a:effectRef idx="0">
-            <a:schemeClr val="accent1"/>
-          </a:effectRef>
-          <a:fontRef idx="minor">
-            <a:schemeClr val="tx1"/>
-          </a:fontRef>
-        </p:style>
-      </p:cxnSp>
-      <p:cxnSp>
-        <p:nvCxnSpPr>
-          <p:cNvPr id="649" name="Shape 248">
-            <a:extLst>
-              <a:ext uri="{FF2B5EF4-FFF2-40B4-BE49-F238E27FC236}">
-                <a16:creationId xmlns:a16="http://schemas.microsoft.com/office/drawing/2014/main" id="{BD96531F-F010-4CD1-8E94-F7868720C5FF}"/>
-              </a:ext>
-            </a:extLst>
-          </p:cNvPr>
-          <p:cNvCxnSpPr>
-            <a:cxnSpLocks/>
-            <a:stCxn id="524" idx="2"/>
-            <a:endCxn id="573" idx="0"/>
-          </p:cNvCxnSpPr>
-          <p:nvPr/>
-        </p:nvCxnSpPr>
-        <p:spPr>
           <a:xfrm rot="5400000">
-            <a:off x="4887237" y="2538672"/>
-            <a:ext cx="1424134" cy="753203"/>
-          </a:xfrm>
-          <a:prstGeom prst="bentConnector3">
-            <a:avLst>
-              <a:gd name="adj1" fmla="val 12059"/>
-            </a:avLst>
-          </a:prstGeom>
-          <a:ln w="28575">
-            <a:prstDash val="dash"/>
-            <a:tailEnd type="arrow"/>
-          </a:ln>
-        </p:spPr>
-        <p:style>
-          <a:lnRef idx="1">
-            <a:schemeClr val="accent1"/>
-          </a:lnRef>
-          <a:fillRef idx="0">
-            <a:schemeClr val="accent1"/>
-          </a:fillRef>
-          <a:effectRef idx="0">
-            <a:schemeClr val="accent1"/>
-          </a:effectRef>
-          <a:fontRef idx="minor">
-            <a:schemeClr val="tx1"/>
-          </a:fontRef>
-        </p:style>
-      </p:cxnSp>
-      <p:cxnSp>
-        <p:nvCxnSpPr>
-          <p:cNvPr id="651" name="Прямая со стрелкой 650">
-            <a:extLst>
-              <a:ext uri="{FF2B5EF4-FFF2-40B4-BE49-F238E27FC236}">
-                <a16:creationId xmlns:a16="http://schemas.microsoft.com/office/drawing/2014/main" id="{363989CC-6490-4FD9-A8BB-61E7E26CBB06}"/>
-              </a:ext>
-            </a:extLst>
-          </p:cNvPr>
-          <p:cNvCxnSpPr>
-            <a:cxnSpLocks/>
-            <a:stCxn id="1493" idx="2"/>
-            <a:endCxn id="1498" idx="0"/>
-          </p:cNvCxnSpPr>
-          <p:nvPr/>
-        </p:nvCxnSpPr>
-        <p:spPr>
-          <a:xfrm>
-            <a:off x="5993301" y="3263249"/>
-            <a:ext cx="2331" cy="1472386"/>
-          </a:xfrm>
-          <a:prstGeom prst="straightConnector1">
-            <a:avLst/>
-          </a:prstGeom>
-          <a:ln w="28575">
-            <a:tailEnd type="arrow"/>
-          </a:ln>
-        </p:spPr>
-        <p:style>
-          <a:lnRef idx="1">
-            <a:schemeClr val="accent1"/>
-          </a:lnRef>
-          <a:fillRef idx="0">
-            <a:schemeClr val="accent1"/>
-          </a:fillRef>
-          <a:effectRef idx="0">
-            <a:schemeClr val="accent1"/>
-          </a:effectRef>
-          <a:fontRef idx="minor">
-            <a:schemeClr val="tx1"/>
-          </a:fontRef>
-        </p:style>
-      </p:cxnSp>
-      <p:cxnSp>
-        <p:nvCxnSpPr>
-          <p:cNvPr id="652" name="Shape 248">
-            <a:extLst>
-              <a:ext uri="{FF2B5EF4-FFF2-40B4-BE49-F238E27FC236}">
-                <a16:creationId xmlns:a16="http://schemas.microsoft.com/office/drawing/2014/main" id="{A19F7194-6229-4E94-B53A-331E5689F5FF}"/>
-              </a:ext>
-            </a:extLst>
-          </p:cNvPr>
-          <p:cNvCxnSpPr>
-            <a:cxnSpLocks/>
-            <a:stCxn id="1491" idx="2"/>
-            <a:endCxn id="1482" idx="0"/>
-          </p:cNvCxnSpPr>
-          <p:nvPr/>
-        </p:nvCxnSpPr>
-        <p:spPr>
-          <a:xfrm rot="16200000" flipH="1">
-            <a:off x="6992641" y="4087637"/>
-            <a:ext cx="446613" cy="822051"/>
+            <a:off x="8685864" y="9212307"/>
+            <a:ext cx="342345" cy="827517"/>
           </a:xfrm>
           <a:prstGeom prst="bentConnector3">
             <a:avLst>
@@ -28981,10 +29843,10 @@
       </p:cxnSp>
       <p:sp>
         <p:nvSpPr>
-          <p:cNvPr id="549" name="Прямоугольник 548">
-            <a:extLst>
-              <a:ext uri="{FF2B5EF4-FFF2-40B4-BE49-F238E27FC236}">
-                <a16:creationId xmlns:a16="http://schemas.microsoft.com/office/drawing/2014/main" id="{82858932-5B18-44D1-BE01-A6B33EAE7542}"/>
+          <p:cNvPr id="654" name="Прямоугольник 653">
+            <a:extLst>
+              <a:ext uri="{FF2B5EF4-FFF2-40B4-BE49-F238E27FC236}">
+                <a16:creationId xmlns:a16="http://schemas.microsoft.com/office/drawing/2014/main" id="{D017FDE9-E7F4-4904-9BFA-D32282268B2F}"/>
               </a:ext>
             </a:extLst>
           </p:cNvPr>
@@ -28993,7 +29855,7 @@
         </p:nvSpPr>
         <p:spPr>
           <a:xfrm>
-            <a:off x="3872126" y="4733788"/>
+            <a:off x="4649277" y="5736764"/>
             <a:ext cx="1156124" cy="645064"/>
           </a:xfrm>
           <a:prstGeom prst="rect">
@@ -29025,7 +29887,11 @@
             <a:pPr algn="ctr"/>
             <a:r>
               <a:rPr lang="ru-RU" sz="1100" dirty="0"/>
-              <a:t>Создание корпоративизма</a:t>
+              <a:t>Прекратить практику </a:t>
+            </a:r>
+            <a:r>
+              <a:rPr lang="en-US" sz="1100" dirty="0" err="1"/>
+              <a:t>mengelmoes</a:t>
             </a:r>
             <a:endParaRPr lang="ru-RU" sz="600" dirty="0"/>
           </a:p>
@@ -29033,24 +29899,24 @@
       </p:sp>
       <p:cxnSp>
         <p:nvCxnSpPr>
-          <p:cNvPr id="552" name="Shape 248">
-            <a:extLst>
-              <a:ext uri="{FF2B5EF4-FFF2-40B4-BE49-F238E27FC236}">
-                <a16:creationId xmlns:a16="http://schemas.microsoft.com/office/drawing/2014/main" id="{FA9DF7EB-2A76-46A5-9DCB-A5BD64AA209A}"/>
+          <p:cNvPr id="656" name="Shape 248">
+            <a:extLst>
+              <a:ext uri="{FF2B5EF4-FFF2-40B4-BE49-F238E27FC236}">
+                <a16:creationId xmlns:a16="http://schemas.microsoft.com/office/drawing/2014/main" id="{2F498C4F-644D-4FD6-BB9B-61F36B3CA0F0}"/>
               </a:ext>
             </a:extLst>
           </p:cNvPr>
           <p:cNvCxnSpPr>
             <a:cxnSpLocks/>
-            <a:stCxn id="1496" idx="2"/>
-            <a:endCxn id="1499" idx="0"/>
+            <a:stCxn id="1498" idx="2"/>
+            <a:endCxn id="654" idx="0"/>
           </p:cNvCxnSpPr>
           <p:nvPr/>
         </p:nvCxnSpPr>
         <p:spPr>
           <a:xfrm rot="5400000">
-            <a:off x="3871316" y="3060757"/>
-            <a:ext cx="365771" cy="786454"/>
+            <a:off x="5433454" y="5174585"/>
+            <a:ext cx="356065" cy="768293"/>
           </a:xfrm>
           <a:prstGeom prst="bentConnector3">
             <a:avLst>
@@ -29078,10 +29944,10 @@
       </p:cxnSp>
       <p:sp>
         <p:nvSpPr>
-          <p:cNvPr id="564" name="Прямоугольник 563">
-            <a:extLst>
-              <a:ext uri="{FF2B5EF4-FFF2-40B4-BE49-F238E27FC236}">
-                <a16:creationId xmlns:a16="http://schemas.microsoft.com/office/drawing/2014/main" id="{338F98CE-7AEF-4C10-8AAC-957F1E6381E6}"/>
+          <p:cNvPr id="657" name="Прямоугольник 656">
+            <a:extLst>
+              <a:ext uri="{FF2B5EF4-FFF2-40B4-BE49-F238E27FC236}">
+                <a16:creationId xmlns:a16="http://schemas.microsoft.com/office/drawing/2014/main" id="{6BA5B4A5-1B79-46A7-AA7C-298D8B8CDD27}"/>
               </a:ext>
             </a:extLst>
           </p:cNvPr>
@@ -29090,7 +29956,7 @@
         </p:nvSpPr>
         <p:spPr>
           <a:xfrm>
-            <a:off x="12668893" y="2610029"/>
+            <a:off x="4641523" y="6747430"/>
             <a:ext cx="1156124" cy="645064"/>
           </a:xfrm>
           <a:prstGeom prst="rect">
@@ -29122,7 +29988,7 @@
             <a:pPr algn="ctr"/>
             <a:r>
               <a:rPr lang="ru-RU" sz="1100" dirty="0"/>
-              <a:t>Поглотить остатки фашистских партий</a:t>
+              <a:t>Углубить расовую сегрегацию</a:t>
             </a:r>
             <a:endParaRPr lang="ru-RU" sz="600" dirty="0"/>
           </a:p>
@@ -29130,32 +29996,29 @@
       </p:sp>
       <p:cxnSp>
         <p:nvCxnSpPr>
-          <p:cNvPr id="568" name="Shape 248">
-            <a:extLst>
-              <a:ext uri="{FF2B5EF4-FFF2-40B4-BE49-F238E27FC236}">
-                <a16:creationId xmlns:a16="http://schemas.microsoft.com/office/drawing/2014/main" id="{B769464E-8754-4046-8368-89A9BF7ECD8F}"/>
+          <p:cNvPr id="663" name="Прямая со стрелкой 662">
+            <a:extLst>
+              <a:ext uri="{FF2B5EF4-FFF2-40B4-BE49-F238E27FC236}">
+                <a16:creationId xmlns:a16="http://schemas.microsoft.com/office/drawing/2014/main" id="{93C0142D-DECC-4D52-AFDF-6531A1B4968A}"/>
               </a:ext>
             </a:extLst>
           </p:cNvPr>
           <p:cNvCxnSpPr>
             <a:cxnSpLocks/>
-            <a:stCxn id="374" idx="2"/>
-            <a:endCxn id="564" idx="0"/>
+            <a:stCxn id="654" idx="2"/>
+            <a:endCxn id="657" idx="0"/>
           </p:cNvCxnSpPr>
           <p:nvPr/>
         </p:nvCxnSpPr>
         <p:spPr>
-          <a:xfrm rot="5400000">
-            <a:off x="13845916" y="1597554"/>
-            <a:ext cx="413515" cy="1611435"/>
-          </a:xfrm>
-          <a:prstGeom prst="bentConnector3">
-            <a:avLst>
-              <a:gd name="adj1" fmla="val 50000"/>
-            </a:avLst>
+          <a:xfrm flipH="1">
+            <a:off x="5219585" y="6381828"/>
+            <a:ext cx="7754" cy="365602"/>
+          </a:xfrm>
+          <a:prstGeom prst="straightConnector1">
+            <a:avLst/>
           </a:prstGeom>
           <a:ln w="28575">
-            <a:prstDash val="dash"/>
             <a:tailEnd type="arrow"/>
           </a:ln>
         </p:spPr>
@@ -29174,52 +30037,130 @@
           </a:fontRef>
         </p:style>
       </p:cxnSp>
-      <p:cxnSp>
-        <p:nvCxnSpPr>
-          <p:cNvPr id="577" name="Shape 248">
-            <a:extLst>
-              <a:ext uri="{FF2B5EF4-FFF2-40B4-BE49-F238E27FC236}">
-                <a16:creationId xmlns:a16="http://schemas.microsoft.com/office/drawing/2014/main" id="{DF793703-55F8-4062-9747-50404B29250D}"/>
-              </a:ext>
-            </a:extLst>
-          </p:cNvPr>
-          <p:cNvCxnSpPr>
-            <a:cxnSpLocks/>
-            <a:stCxn id="1497" idx="2"/>
-            <a:endCxn id="564" idx="0"/>
-          </p:cNvCxnSpPr>
-          <p:nvPr/>
-        </p:nvCxnSpPr>
-        <p:spPr>
-          <a:xfrm rot="16200000" flipH="1">
-            <a:off x="11450173" y="813246"/>
-            <a:ext cx="397567" cy="3195997"/>
-          </a:xfrm>
-          <a:prstGeom prst="bentConnector3">
-            <a:avLst>
-              <a:gd name="adj1" fmla="val 50000"/>
-            </a:avLst>
-          </a:prstGeom>
-          <a:ln w="28575">
-            <a:prstDash val="dash"/>
-            <a:tailEnd type="arrow"/>
-          </a:ln>
-        </p:spPr>
-        <p:style>
-          <a:lnRef idx="1">
-            <a:schemeClr val="accent1"/>
-          </a:lnRef>
-          <a:fillRef idx="0">
-            <a:schemeClr val="accent1"/>
-          </a:fillRef>
-          <a:effectRef idx="0">
-            <a:schemeClr val="accent1"/>
-          </a:effectRef>
-          <a:fontRef idx="minor">
-            <a:schemeClr val="tx1"/>
-          </a:fontRef>
-        </p:style>
-      </p:cxnSp>
+      <p:sp>
+        <p:nvSpPr>
+          <p:cNvPr id="665" name="Прямоугольник 664">
+            <a:extLst>
+              <a:ext uri="{FF2B5EF4-FFF2-40B4-BE49-F238E27FC236}">
+                <a16:creationId xmlns:a16="http://schemas.microsoft.com/office/drawing/2014/main" id="{3632E3CE-D247-48AB-B9F7-A0CAB71E56FA}"/>
+              </a:ext>
+            </a:extLst>
+          </p:cNvPr>
+          <p:cNvSpPr/>
+          <p:nvPr/>
+        </p:nvSpPr>
+        <p:spPr>
+          <a:xfrm>
+            <a:off x="25885097" y="7678741"/>
+            <a:ext cx="1144480" cy="639015"/>
+          </a:xfrm>
+          <a:prstGeom prst="rect">
+            <a:avLst/>
+          </a:prstGeom>
+          <a:solidFill>
+            <a:srgbClr val="00B0F0"/>
+          </a:solidFill>
+          <a:ln w="28575"/>
+        </p:spPr>
+        <p:style>
+          <a:lnRef idx="2">
+            <a:schemeClr val="accent1"/>
+          </a:lnRef>
+          <a:fillRef idx="1">
+            <a:schemeClr val="lt1"/>
+          </a:fillRef>
+          <a:effectRef idx="0">
+            <a:schemeClr val="accent1"/>
+          </a:effectRef>
+          <a:fontRef idx="minor">
+            <a:schemeClr val="dk1"/>
+          </a:fontRef>
+        </p:style>
+        <p:txBody>
+          <a:bodyPr lIns="124733" tIns="62367" rIns="124733" bIns="62367" rtlCol="0" anchor="ctr"/>
+          <a:lstStyle/>
+          <a:p>
+            <a:pPr algn="ctr"/>
+            <a:r>
+              <a:rPr lang="ru-RU" sz="1100" dirty="0"/>
+              <a:t>Создание Либеральной партии</a:t>
+            </a:r>
+            <a:endParaRPr lang="ru-RU" sz="600" dirty="0"/>
+          </a:p>
+        </p:txBody>
+      </p:sp>
+      <p:sp>
+        <p:nvSpPr>
+          <p:cNvPr id="666" name="Прямоугольник 665">
+            <a:extLst>
+              <a:ext uri="{FF2B5EF4-FFF2-40B4-BE49-F238E27FC236}">
+                <a16:creationId xmlns:a16="http://schemas.microsoft.com/office/drawing/2014/main" id="{ACF6C5B1-81B5-48D4-853F-684A1F678371}"/>
+              </a:ext>
+            </a:extLst>
+          </p:cNvPr>
+          <p:cNvSpPr/>
+          <p:nvPr/>
+        </p:nvSpPr>
+        <p:spPr>
+          <a:xfrm>
+            <a:off x="25887880" y="8744655"/>
+            <a:ext cx="1144480" cy="639015"/>
+          </a:xfrm>
+          <a:prstGeom prst="rect">
+            <a:avLst/>
+          </a:prstGeom>
+          <a:solidFill>
+            <a:srgbClr val="00B0F0"/>
+          </a:solidFill>
+          <a:ln w="28575"/>
+        </p:spPr>
+        <p:style>
+          <a:lnRef idx="2">
+            <a:schemeClr val="accent1"/>
+          </a:lnRef>
+          <a:fillRef idx="1">
+            <a:schemeClr val="lt1"/>
+          </a:fillRef>
+          <a:effectRef idx="0">
+            <a:schemeClr val="accent1"/>
+          </a:effectRef>
+          <a:fontRef idx="minor">
+            <a:schemeClr val="dk1"/>
+          </a:fontRef>
+        </p:style>
+        <p:txBody>
+          <a:bodyPr lIns="124733" tIns="62367" rIns="124733" bIns="62367" rtlCol="0" anchor="ctr"/>
+          <a:lstStyle/>
+          <a:p>
+            <a:pPr algn="ctr"/>
+            <a:r>
+              <a:rPr lang="ru-RU" sz="1100" dirty="0"/>
+              <a:t>Начать программу Интеграции </a:t>
+            </a:r>
+            <a:r>
+              <a:rPr lang="ru-RU" sz="1100" dirty="0" err="1"/>
+              <a:t>Фагана</a:t>
+            </a:r>
+            <a:r>
+              <a:rPr lang="ru-RU" sz="1100" dirty="0"/>
+              <a:t> </a:t>
+            </a:r>
+            <a:r>
+              <a:rPr lang="ru-RU" sz="400" dirty="0"/>
+              <a:t>(</a:t>
+            </a:r>
+            <a:r>
+              <a:rPr lang="en-US" sz="400" dirty="0"/>
+              <a:t>https://en.wikipedia.org/wiki/Fagan_Commission#:~:text=The%20Native%20Laws%20Commission%2C%20commonly,produced%20in%20the%20segregation%20era."</a:t>
+            </a:r>
+            <a:r>
+              <a:rPr lang="ru-RU" sz="400" dirty="0"/>
+              <a:t>)</a:t>
+            </a:r>
+            <a:endParaRPr lang="ru-RU" sz="600" dirty="0"/>
+          </a:p>
+        </p:txBody>
+      </p:sp>
     </p:spTree>
     <p:extLst>
       <p:ext uri="{BB962C8B-B14F-4D97-AF65-F5344CB8AC3E}">

--- a/Наработки/диздоки/ЮАС/ЮАС общая.pptx
+++ b/Наработки/диздоки/ЮАС/ЮАС общая.pptx
@@ -16606,7 +16606,7 @@
             <a:pPr algn="ctr"/>
             <a:r>
               <a:rPr lang="ru-RU" sz="1100" dirty="0"/>
-              <a:t>Открыть троллейбусное движение в Кейптауне (текущее)</a:t>
+              <a:t>Открыть троллейбусное движение в Кейптауне</a:t>
             </a:r>
             <a:endParaRPr lang="ru-RU" sz="600" dirty="0"/>
           </a:p>
@@ -16655,12 +16655,9 @@
             <a:pPr algn="ctr"/>
             <a:r>
               <a:rPr lang="ru-RU" sz="1100" dirty="0"/>
-              <a:t>Внедрить новые локомотивы (тут бы поезда) </a:t>
-            </a:r>
-            <a:r>
-              <a:rPr lang="ru-RU" sz="600" dirty="0"/>
-              <a:t>(текущее)</a:t>
-            </a:r>
+              <a:t>Внедрить новые локомотивы</a:t>
+            </a:r>
+            <a:endParaRPr lang="ru-RU" sz="600" dirty="0"/>
           </a:p>
         </p:txBody>
       </p:sp>
@@ -16707,12 +16704,9 @@
             <a:pPr algn="ctr"/>
             <a:r>
               <a:rPr lang="ru-RU" sz="1100" dirty="0"/>
-              <a:t>Вложения в пятую провинцию </a:t>
-            </a:r>
-            <a:r>
-              <a:rPr lang="ru-RU" sz="600" dirty="0"/>
-              <a:t>(текущее)</a:t>
-            </a:r>
+              <a:t>Вложения в пятую провинцию</a:t>
+            </a:r>
+            <a:endParaRPr lang="ru-RU" sz="600" dirty="0"/>
           </a:p>
         </p:txBody>
       </p:sp>
@@ -16761,10 +16755,7 @@
               <a:rPr lang="ru-RU" sz="1100" dirty="0"/>
               <a:t>Расширить автономию ЮЗА</a:t>
             </a:r>
-            <a:r>
-              <a:rPr lang="ru-RU" sz="600" dirty="0"/>
-              <a:t> (текущее)</a:t>
-            </a:r>
+            <a:endParaRPr lang="ru-RU" sz="600" dirty="0"/>
           </a:p>
         </p:txBody>
       </p:sp>
@@ -16811,12 +16802,9 @@
             <a:pPr algn="ctr"/>
             <a:r>
               <a:rPr lang="ru-RU" sz="1100" dirty="0"/>
-              <a:t>Дешёвая чернокожая сила </a:t>
-            </a:r>
-            <a:r>
-              <a:rPr lang="ru-RU" sz="600" dirty="0"/>
-              <a:t>(текущее)</a:t>
-            </a:r>
+              <a:t>Дешёвая чернокожая сила</a:t>
+            </a:r>
+            <a:endParaRPr lang="ru-RU" sz="600" dirty="0"/>
           </a:p>
         </p:txBody>
       </p:sp>
@@ -17045,15 +17033,7 @@
             <a:pPr algn="ctr"/>
             <a:r>
               <a:rPr lang="ru-RU" sz="1100" dirty="0"/>
-              <a:t>Заложить новые доки в Кейптауне (1945 </a:t>
-            </a:r>
-            <a:r>
-              <a:rPr lang="ru-RU" sz="1100" dirty="0" err="1"/>
-              <a:t>г.Построен</a:t>
-            </a:r>
-            <a:r>
-              <a:rPr lang="ru-RU" sz="1100" dirty="0"/>
-              <a:t> Дункан Док.) (изменить описание)</a:t>
+              <a:t>Заложить новые доки в Кейптауне</a:t>
             </a:r>
             <a:endParaRPr lang="ru-RU" sz="600" dirty="0"/>
           </a:p>
@@ -17102,7 +17082,7 @@
             <a:pPr algn="ctr"/>
             <a:r>
               <a:rPr lang="ru-RU" sz="1100" dirty="0"/>
-              <a:t>Развитие внутренних регионов (текущее)</a:t>
+              <a:t>Развитие внутренних регионов</a:t>
             </a:r>
             <a:endParaRPr lang="ru-RU" sz="600" dirty="0"/>
           </a:p>
@@ -17200,7 +17180,7 @@
             <a:pPr algn="ctr"/>
             <a:r>
               <a:rPr lang="ru-RU" sz="1100" dirty="0"/>
-              <a:t>Расширить сеть школ для чёрных(изменено)</a:t>
+              <a:t>Расширить сеть школ для чёрных</a:t>
             </a:r>
             <a:endParaRPr lang="ru-RU" sz="600" dirty="0"/>
           </a:p>
@@ -17249,7 +17229,7 @@
             <a:pPr algn="ctr"/>
             <a:r>
               <a:rPr lang="ru-RU" sz="1100" dirty="0"/>
-              <a:t>Вложиться в образование для белых (изменено) (1936)</a:t>
+              <a:t>Вложиться в образование для белых</a:t>
             </a:r>
             <a:endParaRPr lang="ru-RU" sz="600" dirty="0"/>
           </a:p>
@@ -17298,7 +17278,7 @@
             <a:pPr algn="ctr"/>
             <a:r>
               <a:rPr lang="ru-RU" sz="1100" dirty="0"/>
-              <a:t>Расширить университет Претории (текущее)</a:t>
+              <a:t>Расширить университет Претории</a:t>
             </a:r>
             <a:endParaRPr lang="ru-RU" sz="600" dirty="0"/>
           </a:p>
@@ -17347,7 +17327,7 @@
             <a:pPr algn="ctr"/>
             <a:r>
               <a:rPr lang="ru-RU" sz="1100" dirty="0"/>
-              <a:t>Изучение атомной энергетики (текущее)</a:t>
+              <a:t>Изучение атомной энергетики</a:t>
             </a:r>
             <a:endParaRPr lang="ru-RU" sz="600" dirty="0"/>
           </a:p>
@@ -17396,7 +17376,7 @@
             <a:pPr algn="ctr"/>
             <a:r>
               <a:rPr lang="ru-RU" sz="1100" dirty="0"/>
-              <a:t>Изучение ракетных технологий (текущее)</a:t>
+              <a:t>Изучение ракетных технологий</a:t>
             </a:r>
             <a:endParaRPr lang="ru-RU" sz="600" dirty="0"/>
           </a:p>
@@ -17670,7 +17650,7 @@
             <a:pPr algn="ctr"/>
             <a:r>
               <a:rPr lang="ru-RU" sz="1100" dirty="0"/>
-              <a:t>Внедрить современные стандарты образования (текущее)</a:t>
+              <a:t>Внедрить современные стандарты образования</a:t>
             </a:r>
             <a:endParaRPr lang="ru-RU" sz="600" dirty="0"/>
           </a:p>
@@ -17809,7 +17789,7 @@
             <a:pPr algn="ctr"/>
             <a:r>
               <a:rPr lang="ru-RU" sz="1100" dirty="0"/>
-              <a:t>Винодельни Пинотаж (1941)</a:t>
+              <a:t>Винодельни Пинотаж</a:t>
             </a:r>
             <a:endParaRPr lang="ru-RU" sz="600" dirty="0"/>
           </a:p>
@@ -18102,10 +18082,10 @@
           <a:p>
             <a:pPr algn="ctr"/>
             <a:r>
-              <a:rPr lang="ru-RU" sz="1100" dirty="0"/>
+              <a:rPr lang="ru-RU" sz="900" dirty="0"/>
               <a:t>Упрочнить лидирующее место в алмазной отрасли</a:t>
             </a:r>
-            <a:endParaRPr lang="ru-RU" sz="600" dirty="0"/>
+            <a:endParaRPr lang="ru-RU" sz="300" dirty="0"/>
           </a:p>
         </p:txBody>
       </p:sp>
@@ -18250,7 +18230,7 @@
             <a:pPr algn="ctr"/>
             <a:r>
               <a:rPr lang="ru-RU" sz="1100" dirty="0"/>
-              <a:t>Закон о туземном тресте и земле (1936)</a:t>
+              <a:t>Закон о туземном тресте и земле</a:t>
             </a:r>
             <a:endParaRPr lang="ru-RU" sz="600" dirty="0"/>
           </a:p>
@@ -18298,14 +18278,10 @@
           <a:p>
             <a:pPr algn="ctr"/>
             <a:r>
-              <a:rPr lang="ru-RU" sz="1100" dirty="0"/>
-              <a:t>Южноафриканская радиовещательная корпорация </a:t>
-            </a:r>
-            <a:r>
-              <a:rPr lang="ru-RU" sz="500" dirty="0"/>
-              <a:t>(1936)</a:t>
-            </a:r>
-            <a:endParaRPr lang="ru-RU" sz="600" dirty="0"/>
+              <a:rPr lang="ru-RU" sz="1000" dirty="0"/>
+              <a:t>Южноафриканская радиовещательная корпорация</a:t>
+            </a:r>
+            <a:endParaRPr lang="ru-RU" sz="400" dirty="0"/>
           </a:p>
         </p:txBody>
       </p:sp>
@@ -18351,10 +18327,10 @@
           <a:p>
             <a:pPr algn="ctr"/>
             <a:r>
-              <a:rPr lang="ru-RU" sz="1100" dirty="0"/>
-              <a:t>Закон о промышленном примирении и заработной плате (1937)</a:t>
-            </a:r>
-            <a:endParaRPr lang="ru-RU" sz="600" dirty="0"/>
+              <a:rPr lang="ru-RU" sz="900" dirty="0"/>
+              <a:t>Закон о промышленном примирении и заработной плате</a:t>
+            </a:r>
+            <a:endParaRPr lang="ru-RU" sz="300" dirty="0"/>
           </a:p>
         </p:txBody>
       </p:sp>
@@ -18403,18 +18379,6 @@
               <a:rPr lang="ru-RU" sz="1100" dirty="0"/>
               <a:t>Закон о маркетинге</a:t>
             </a:r>
-            <a:r>
-              <a:rPr lang="ru-RU" sz="300" dirty="0"/>
-              <a:t> </a:t>
-            </a:r>
-            <a:r>
-              <a:rPr lang="ru-RU" sz="800" dirty="0"/>
-              <a:t>(</a:t>
-            </a:r>
-            <a:r>
-              <a:rPr lang="ru-RU" sz="900" dirty="0"/>
-              <a:t>1937) </a:t>
-            </a:r>
             <a:endParaRPr lang="ru-RU" sz="600" dirty="0"/>
           </a:p>
         </p:txBody>
@@ -18461,10 +18425,10 @@
           <a:p>
             <a:pPr algn="ctr"/>
             <a:r>
-              <a:rPr lang="ru-RU" sz="1100" dirty="0"/>
+              <a:rPr lang="ru-RU" sz="900" dirty="0"/>
               <a:t>Закончить постройку трансконтинентальной железной дороги</a:t>
             </a:r>
-            <a:endParaRPr lang="ru-RU" sz="600" dirty="0"/>
+            <a:endParaRPr lang="ru-RU" sz="300" dirty="0"/>
           </a:p>
         </p:txBody>
       </p:sp>
@@ -18609,7 +18573,7 @@
             <a:pPr algn="ctr"/>
             <a:r>
               <a:rPr lang="ru-RU" sz="1100" dirty="0"/>
-              <a:t>Запустить электростанцию Столовой бухты (1936)</a:t>
+              <a:t>Запустить электростанцию Столовой бухты</a:t>
             </a:r>
             <a:endParaRPr lang="ru-RU" sz="600" dirty="0"/>
           </a:p>
@@ -20578,10 +20542,10 @@
           <a:p>
             <a:pPr algn="ctr"/>
             <a:r>
-              <a:rPr lang="ru-RU" sz="1100" dirty="0"/>
+              <a:rPr lang="ru-RU" sz="1050" dirty="0"/>
               <a:t>Провести вербовку среди англоговорящего населения</a:t>
             </a:r>
-            <a:endParaRPr lang="ru-RU" sz="600" dirty="0"/>
+            <a:endParaRPr lang="ru-RU" sz="500" dirty="0"/>
           </a:p>
         </p:txBody>
       </p:sp>
@@ -20734,10 +20698,10 @@
           <a:p>
             <a:pPr algn="ctr"/>
             <a:r>
-              <a:rPr lang="ru-RU" sz="1100" dirty="0"/>
+              <a:rPr lang="ru-RU" sz="900" dirty="0"/>
               <a:t>Прогнать евреев и национализировать их имущество</a:t>
             </a:r>
-            <a:endParaRPr lang="ru-RU" sz="800" dirty="0"/>
+            <a:endParaRPr lang="ru-RU" sz="500" dirty="0"/>
           </a:p>
         </p:txBody>
       </p:sp>
@@ -21038,15 +21002,8 @@
             <a:pPr algn="ctr"/>
             <a:r>
               <a:rPr lang="ru-RU" sz="1100" dirty="0"/>
-              <a:t>Закон о представительстве коренных народов </a:t>
-            </a:r>
-            <a:r>
-              <a:rPr lang="ru-RU" sz="1000" dirty="0"/>
-              <a:t>(Выполнится 10 июля 1936)</a:t>
-            </a:r>
-          </a:p>
-          <a:p>
-            <a:pPr algn="ctr"/>
+              <a:t>Закон о представительстве коренных народов</a:t>
+            </a:r>
             <a:endParaRPr lang="ru-RU" sz="600" dirty="0"/>
           </a:p>
         </p:txBody>
@@ -23687,10 +23644,10 @@
           <a:p>
             <a:pPr algn="ctr"/>
             <a:r>
-              <a:rPr lang="ru-RU" sz="1100" dirty="0"/>
+              <a:rPr lang="ru-RU" sz="1000" dirty="0"/>
               <a:t>Расширить военные производства за счёт Союзников</a:t>
             </a:r>
-            <a:endParaRPr lang="ru-RU" sz="600" dirty="0"/>
+            <a:endParaRPr lang="ru-RU" sz="400" dirty="0"/>
           </a:p>
         </p:txBody>
       </p:sp>
@@ -25993,10 +25950,6 @@
               <a:rPr lang="ru-RU" sz="1100" dirty="0" err="1"/>
               <a:t>Брудербонд</a:t>
             </a:r>
-            <a:r>
-              <a:rPr lang="ru-RU" sz="1100" dirty="0"/>
-              <a:t> (не исторично)</a:t>
-            </a:r>
             <a:endParaRPr lang="ru-RU" sz="600" dirty="0"/>
           </a:p>
         </p:txBody>
@@ -26137,10 +26090,10 @@
           <a:p>
             <a:pPr algn="ctr"/>
             <a:r>
-              <a:rPr lang="ru-RU" sz="1050" dirty="0"/>
+              <a:rPr lang="ru-RU" sz="900" dirty="0"/>
               <a:t>Сделать окончание Великого похода Национальным праздником</a:t>
             </a:r>
-            <a:endParaRPr lang="ru-RU" sz="500" dirty="0"/>
+            <a:endParaRPr lang="ru-RU" sz="300" dirty="0"/>
           </a:p>
         </p:txBody>
       </p:sp>
@@ -26186,10 +26139,10 @@
           <a:p>
             <a:pPr algn="ctr"/>
             <a:r>
-              <a:rPr lang="ru-RU" sz="1100" dirty="0"/>
+              <a:rPr lang="ru-RU" sz="900" dirty="0"/>
               <a:t>Развить торговые отношения со странами содружества</a:t>
             </a:r>
-            <a:endParaRPr lang="ru-RU" sz="600" dirty="0"/>
+            <a:endParaRPr lang="ru-RU" sz="300" dirty="0"/>
           </a:p>
         </p:txBody>
       </p:sp>
@@ -26321,10 +26274,10 @@
           <a:p>
             <a:pPr algn="ctr"/>
             <a:r>
-              <a:rPr lang="ru-RU" sz="1100" dirty="0"/>
+              <a:rPr lang="ru-RU" sz="800" dirty="0"/>
               <a:t>Признать африкаанс диалектом голландского языка</a:t>
             </a:r>
-            <a:endParaRPr lang="ru-RU" sz="600" dirty="0"/>
+            <a:endParaRPr lang="ru-RU" sz="200" dirty="0"/>
           </a:p>
         </p:txBody>
       </p:sp>
@@ -26416,26 +26369,26 @@
           <a:p>
             <a:pPr algn="ctr"/>
             <a:r>
-              <a:rPr lang="ru-RU" sz="1100" dirty="0"/>
+              <a:rPr lang="ru-RU" sz="900" dirty="0"/>
               <a:t>Возродить проект </a:t>
             </a:r>
             <a:r>
-              <a:rPr lang="ru-RU" sz="1100" dirty="0" err="1"/>
+              <a:rPr lang="ru-RU" sz="900" dirty="0" err="1"/>
               <a:t>Миттельафрики</a:t>
             </a:r>
             <a:r>
-              <a:rPr lang="ru-RU" sz="1100" dirty="0"/>
+              <a:rPr lang="ru-RU" sz="900" dirty="0"/>
               <a:t> под </a:t>
             </a:r>
             <a:r>
-              <a:rPr lang="ru-RU" sz="1100" dirty="0" err="1"/>
+              <a:rPr lang="ru-RU" sz="900" dirty="0" err="1"/>
               <a:t>африкаанерским</a:t>
             </a:r>
             <a:r>
-              <a:rPr lang="ru-RU" sz="1100" dirty="0"/>
+              <a:rPr lang="ru-RU" sz="900" dirty="0"/>
               <a:t> началом</a:t>
             </a:r>
-            <a:endParaRPr lang="ru-RU" sz="600" dirty="0"/>
+            <a:endParaRPr lang="ru-RU" sz="300" dirty="0"/>
           </a:p>
         </p:txBody>
       </p:sp>
@@ -26527,10 +26480,10 @@
           <a:p>
             <a:pPr algn="ctr"/>
             <a:r>
-              <a:rPr lang="ru-RU" sz="1050" dirty="0"/>
+              <a:rPr lang="ru-RU" sz="900" dirty="0"/>
               <a:t>Ввести военизированные отряды в малые протектораты</a:t>
             </a:r>
-            <a:endParaRPr lang="ru-RU" sz="500" dirty="0"/>
+            <a:endParaRPr lang="ru-RU" sz="300" dirty="0"/>
           </a:p>
         </p:txBody>
       </p:sp>
@@ -27443,10 +27396,10 @@
           <a:p>
             <a:pPr algn="ctr"/>
             <a:r>
-              <a:rPr lang="ru-RU" sz="1100" dirty="0"/>
+              <a:rPr lang="ru-RU" sz="1000" dirty="0"/>
               <a:t>Провести повторный референдум в Южной Родезии</a:t>
             </a:r>
-            <a:endParaRPr lang="ru-RU" sz="600" dirty="0"/>
+            <a:endParaRPr lang="ru-RU" sz="400" dirty="0"/>
           </a:p>
         </p:txBody>
       </p:sp>

--- a/Наработки/диздоки/ЮАС/ЮАС общая.pptx
+++ b/Наработки/диздоки/ЮАС/ЮАС общая.pptx
@@ -209,7 +209,7 @@
             <a:fld id="{33E3D7F9-E251-484C-A6FF-FA958879DF69}" type="datetimeFigureOut">
               <a:rPr lang="ru-RU" smtClean="0"/>
               <a:pPr/>
-              <a:t>03.02.2026</a:t>
+              <a:t>05.02.2026</a:t>
             </a:fld>
             <a:endParaRPr lang="ru-RU"/>
           </a:p>
@@ -699,7 +699,7 @@
             <a:fld id="{85A5DE44-605B-4D3B-B2B7-94543DF81A36}" type="datetimeFigureOut">
               <a:rPr lang="ru-RU" smtClean="0"/>
               <a:pPr/>
-              <a:t>03.02.2026</a:t>
+              <a:t>05.02.2026</a:t>
             </a:fld>
             <a:endParaRPr lang="ru-RU"/>
           </a:p>
@@ -871,7 +871,7 @@
             <a:fld id="{85A5DE44-605B-4D3B-B2B7-94543DF81A36}" type="datetimeFigureOut">
               <a:rPr lang="ru-RU" smtClean="0"/>
               <a:pPr/>
-              <a:t>03.02.2026</a:t>
+              <a:t>05.02.2026</a:t>
             </a:fld>
             <a:endParaRPr lang="ru-RU"/>
           </a:p>
@@ -1053,7 +1053,7 @@
             <a:fld id="{85A5DE44-605B-4D3B-B2B7-94543DF81A36}" type="datetimeFigureOut">
               <a:rPr lang="ru-RU" smtClean="0"/>
               <a:pPr/>
-              <a:t>03.02.2026</a:t>
+              <a:t>05.02.2026</a:t>
             </a:fld>
             <a:endParaRPr lang="ru-RU"/>
           </a:p>
@@ -1225,7 +1225,7 @@
             <a:fld id="{85A5DE44-605B-4D3B-B2B7-94543DF81A36}" type="datetimeFigureOut">
               <a:rPr lang="ru-RU" smtClean="0"/>
               <a:pPr/>
-              <a:t>03.02.2026</a:t>
+              <a:t>05.02.2026</a:t>
             </a:fld>
             <a:endParaRPr lang="ru-RU"/>
           </a:p>
@@ -1473,7 +1473,7 @@
             <a:fld id="{85A5DE44-605B-4D3B-B2B7-94543DF81A36}" type="datetimeFigureOut">
               <a:rPr lang="ru-RU" smtClean="0"/>
               <a:pPr/>
-              <a:t>03.02.2026</a:t>
+              <a:t>05.02.2026</a:t>
             </a:fld>
             <a:endParaRPr lang="ru-RU"/>
           </a:p>
@@ -1707,7 +1707,7 @@
             <a:fld id="{85A5DE44-605B-4D3B-B2B7-94543DF81A36}" type="datetimeFigureOut">
               <a:rPr lang="ru-RU" smtClean="0"/>
               <a:pPr/>
-              <a:t>03.02.2026</a:t>
+              <a:t>05.02.2026</a:t>
             </a:fld>
             <a:endParaRPr lang="ru-RU"/>
           </a:p>
@@ -2076,7 +2076,7 @@
             <a:fld id="{85A5DE44-605B-4D3B-B2B7-94543DF81A36}" type="datetimeFigureOut">
               <a:rPr lang="ru-RU" smtClean="0"/>
               <a:pPr/>
-              <a:t>03.02.2026</a:t>
+              <a:t>05.02.2026</a:t>
             </a:fld>
             <a:endParaRPr lang="ru-RU"/>
           </a:p>
@@ -2196,7 +2196,7 @@
             <a:fld id="{85A5DE44-605B-4D3B-B2B7-94543DF81A36}" type="datetimeFigureOut">
               <a:rPr lang="ru-RU" smtClean="0"/>
               <a:pPr/>
-              <a:t>03.02.2026</a:t>
+              <a:t>05.02.2026</a:t>
             </a:fld>
             <a:endParaRPr lang="ru-RU"/>
           </a:p>
@@ -2293,7 +2293,7 @@
             <a:fld id="{85A5DE44-605B-4D3B-B2B7-94543DF81A36}" type="datetimeFigureOut">
               <a:rPr lang="ru-RU" smtClean="0"/>
               <a:pPr/>
-              <a:t>03.02.2026</a:t>
+              <a:t>05.02.2026</a:t>
             </a:fld>
             <a:endParaRPr lang="ru-RU"/>
           </a:p>
@@ -2572,7 +2572,7 @@
             <a:fld id="{85A5DE44-605B-4D3B-B2B7-94543DF81A36}" type="datetimeFigureOut">
               <a:rPr lang="ru-RU" smtClean="0"/>
               <a:pPr/>
-              <a:t>03.02.2026</a:t>
+              <a:t>05.02.2026</a:t>
             </a:fld>
             <a:endParaRPr lang="ru-RU"/>
           </a:p>
@@ -2831,7 +2831,7 @@
             <a:fld id="{85A5DE44-605B-4D3B-B2B7-94543DF81A36}" type="datetimeFigureOut">
               <a:rPr lang="ru-RU" smtClean="0"/>
               <a:pPr/>
-              <a:t>03.02.2026</a:t>
+              <a:t>05.02.2026</a:t>
             </a:fld>
             <a:endParaRPr lang="ru-RU"/>
           </a:p>
@@ -3046,7 +3046,7 @@
             <a:fld id="{85A5DE44-605B-4D3B-B2B7-94543DF81A36}" type="datetimeFigureOut">
               <a:rPr lang="ru-RU" smtClean="0"/>
               <a:pPr/>
-              <a:t>03.02.2026</a:t>
+              <a:t>05.02.2026</a:t>
             </a:fld>
             <a:endParaRPr lang="ru-RU"/>
           </a:p>
@@ -21752,7 +21752,7 @@
         </p:nvSpPr>
         <p:spPr>
           <a:xfrm>
-            <a:off x="15981859" y="4722516"/>
+            <a:off x="15972334" y="4722516"/>
             <a:ext cx="1144480" cy="639015"/>
           </a:xfrm>
           <a:prstGeom prst="rect">
@@ -22684,8 +22684,8 @@
         </p:nvCxnSpPr>
         <p:spPr>
           <a:xfrm rot="5400000">
-            <a:off x="18042518" y="2790195"/>
-            <a:ext cx="443902" cy="3420740"/>
+            <a:off x="18037756" y="2785433"/>
+            <a:ext cx="443902" cy="3430265"/>
           </a:xfrm>
           <a:prstGeom prst="bentConnector3">
             <a:avLst>
@@ -22918,96 +22918,6 @@
           </a:fontRef>
         </p:style>
       </p:cxnSp>
-      <p:cxnSp>
-        <p:nvCxnSpPr>
-          <p:cNvPr id="554" name="Shape 248">
-            <a:extLst>
-              <a:ext uri="{FF2B5EF4-FFF2-40B4-BE49-F238E27FC236}">
-                <a16:creationId xmlns:a16="http://schemas.microsoft.com/office/drawing/2014/main" id="{A5F70685-18C0-4B5C-A342-6CEDEEC9BB39}"/>
-              </a:ext>
-            </a:extLst>
-          </p:cNvPr>
-          <p:cNvCxnSpPr>
-            <a:cxnSpLocks/>
-            <a:stCxn id="416" idx="2"/>
-            <a:endCxn id="475" idx="0"/>
-          </p:cNvCxnSpPr>
-          <p:nvPr/>
-        </p:nvCxnSpPr>
-        <p:spPr>
-          <a:xfrm rot="5400000">
-            <a:off x="15936589" y="5144011"/>
-            <a:ext cx="399991" cy="835031"/>
-          </a:xfrm>
-          <a:prstGeom prst="bentConnector3">
-            <a:avLst>
-              <a:gd name="adj1" fmla="val 50000"/>
-            </a:avLst>
-          </a:prstGeom>
-          <a:ln w="28575">
-            <a:tailEnd type="arrow"/>
-          </a:ln>
-        </p:spPr>
-        <p:style>
-          <a:lnRef idx="1">
-            <a:schemeClr val="accent1"/>
-          </a:lnRef>
-          <a:fillRef idx="0">
-            <a:schemeClr val="accent1"/>
-          </a:fillRef>
-          <a:effectRef idx="0">
-            <a:schemeClr val="accent1"/>
-          </a:effectRef>
-          <a:fontRef idx="minor">
-            <a:schemeClr val="tx1"/>
-          </a:fontRef>
-        </p:style>
-      </p:cxnSp>
-      <p:cxnSp>
-        <p:nvCxnSpPr>
-          <p:cNvPr id="557" name="Shape 248">
-            <a:extLst>
-              <a:ext uri="{FF2B5EF4-FFF2-40B4-BE49-F238E27FC236}">
-                <a16:creationId xmlns:a16="http://schemas.microsoft.com/office/drawing/2014/main" id="{62AF6AF3-2F8C-4C61-A6BB-EB44C00E5674}"/>
-              </a:ext>
-            </a:extLst>
-          </p:cNvPr>
-          <p:cNvCxnSpPr>
-            <a:cxnSpLocks/>
-            <a:stCxn id="416" idx="2"/>
-            <a:endCxn id="476" idx="0"/>
-          </p:cNvCxnSpPr>
-          <p:nvPr/>
-        </p:nvCxnSpPr>
-        <p:spPr>
-          <a:xfrm rot="16200000" flipH="1">
-            <a:off x="16760064" y="5155565"/>
-            <a:ext cx="399992" cy="811923"/>
-          </a:xfrm>
-          <a:prstGeom prst="bentConnector3">
-            <a:avLst>
-              <a:gd name="adj1" fmla="val 50000"/>
-            </a:avLst>
-          </a:prstGeom>
-          <a:ln w="28575">
-            <a:tailEnd type="arrow"/>
-          </a:ln>
-        </p:spPr>
-        <p:style>
-          <a:lnRef idx="1">
-            <a:schemeClr val="accent1"/>
-          </a:lnRef>
-          <a:fillRef idx="0">
-            <a:schemeClr val="accent1"/>
-          </a:fillRef>
-          <a:effectRef idx="0">
-            <a:schemeClr val="accent1"/>
-          </a:effectRef>
-          <a:fontRef idx="minor">
-            <a:schemeClr val="tx1"/>
-          </a:fontRef>
-        </p:style>
-      </p:cxnSp>
       <p:sp>
         <p:nvSpPr>
           <p:cNvPr id="562" name="Прямоугольник 561">
@@ -23919,7 +23829,7 @@
         </p:nvSpPr>
         <p:spPr>
           <a:xfrm>
-            <a:off x="13419889" y="4722515"/>
+            <a:off x="14286150" y="4722515"/>
             <a:ext cx="1144480" cy="639015"/>
           </a:xfrm>
           <a:prstGeom prst="rect">
@@ -24086,7 +23996,7 @@
         </p:nvSpPr>
         <p:spPr>
           <a:xfrm>
-            <a:off x="13425264" y="5761522"/>
+            <a:off x="14290746" y="5761523"/>
             <a:ext cx="1144480" cy="639015"/>
           </a:xfrm>
           <a:prstGeom prst="rect">
@@ -24171,10 +24081,10 @@
       </p:cxnSp>
       <p:sp>
         <p:nvSpPr>
-          <p:cNvPr id="475" name="Прямоугольник 474">
-            <a:extLst>
-              <a:ext uri="{FF2B5EF4-FFF2-40B4-BE49-F238E27FC236}">
-                <a16:creationId xmlns:a16="http://schemas.microsoft.com/office/drawing/2014/main" id="{EA4BB7EB-7592-47EF-AC8C-1DB8DE02443B}"/>
+          <p:cNvPr id="476" name="Прямоугольник 475">
+            <a:extLst>
+              <a:ext uri="{FF2B5EF4-FFF2-40B4-BE49-F238E27FC236}">
+                <a16:creationId xmlns:a16="http://schemas.microsoft.com/office/drawing/2014/main" id="{EA057CC5-CBC0-4454-A91C-F5D916191492}"/>
               </a:ext>
             </a:extLst>
           </p:cNvPr>
@@ -24183,7 +24093,7 @@
         </p:nvSpPr>
         <p:spPr>
           <a:xfrm>
-            <a:off x="15146828" y="5761522"/>
+            <a:off x="15974836" y="5763449"/>
             <a:ext cx="1144480" cy="639015"/>
           </a:xfrm>
           <a:prstGeom prst="rect">
@@ -24212,286 +24122,12 @@
             <a:pPr algn="ctr"/>
             <a:r>
               <a:rPr lang="ru-RU" sz="1100" dirty="0"/>
-              <a:t>Пригласить нового монарха</a:t>
+              <a:t>Референдум о Республике</a:t>
             </a:r>
             <a:endParaRPr lang="ru-RU" sz="600" dirty="0"/>
           </a:p>
         </p:txBody>
       </p:sp>
-      <p:sp>
-        <p:nvSpPr>
-          <p:cNvPr id="476" name="Прямоугольник 475">
-            <a:extLst>
-              <a:ext uri="{FF2B5EF4-FFF2-40B4-BE49-F238E27FC236}">
-                <a16:creationId xmlns:a16="http://schemas.microsoft.com/office/drawing/2014/main" id="{EA057CC5-CBC0-4454-A91C-F5D916191492}"/>
-              </a:ext>
-            </a:extLst>
-          </p:cNvPr>
-          <p:cNvSpPr/>
-          <p:nvPr/>
-        </p:nvSpPr>
-        <p:spPr>
-          <a:xfrm>
-            <a:off x="16793782" y="5761523"/>
-            <a:ext cx="1144480" cy="639015"/>
-          </a:xfrm>
-          <a:prstGeom prst="rect">
-            <a:avLst/>
-          </a:prstGeom>
-          <a:ln w="28575"/>
-        </p:spPr>
-        <p:style>
-          <a:lnRef idx="2">
-            <a:schemeClr val="accent1"/>
-          </a:lnRef>
-          <a:fillRef idx="1">
-            <a:schemeClr val="lt1"/>
-          </a:fillRef>
-          <a:effectRef idx="0">
-            <a:schemeClr val="accent1"/>
-          </a:effectRef>
-          <a:fontRef idx="minor">
-            <a:schemeClr val="dk1"/>
-          </a:fontRef>
-        </p:style>
-        <p:txBody>
-          <a:bodyPr lIns="124733" tIns="62367" rIns="124733" bIns="62367" rtlCol="0" anchor="ctr"/>
-          <a:lstStyle/>
-          <a:p>
-            <a:pPr algn="ctr"/>
-            <a:r>
-              <a:rPr lang="ru-RU" sz="1100" dirty="0"/>
-              <a:t>Референдум о Республике</a:t>
-            </a:r>
-            <a:endParaRPr lang="ru-RU" sz="600" dirty="0"/>
-          </a:p>
-        </p:txBody>
-      </p:sp>
-      <p:cxnSp>
-        <p:nvCxnSpPr>
-          <p:cNvPr id="479" name="Прямая соединительная линия 478">
-            <a:extLst>
-              <a:ext uri="{FF2B5EF4-FFF2-40B4-BE49-F238E27FC236}">
-                <a16:creationId xmlns:a16="http://schemas.microsoft.com/office/drawing/2014/main" id="{F7E28F68-47E4-4628-99D2-85B6052C5331}"/>
-              </a:ext>
-            </a:extLst>
-          </p:cNvPr>
-          <p:cNvCxnSpPr>
-            <a:cxnSpLocks/>
-            <a:stCxn id="475" idx="3"/>
-            <a:endCxn id="476" idx="1"/>
-          </p:cNvCxnSpPr>
-          <p:nvPr/>
-        </p:nvCxnSpPr>
-        <p:spPr>
-          <a:xfrm>
-            <a:off x="16291308" y="6081030"/>
-            <a:ext cx="502474" cy="1"/>
-          </a:xfrm>
-          <a:prstGeom prst="line">
-            <a:avLst/>
-          </a:prstGeom>
-          <a:ln w="38100">
-            <a:solidFill>
-              <a:srgbClr val="FF0000"/>
-            </a:solidFill>
-          </a:ln>
-        </p:spPr>
-        <p:style>
-          <a:lnRef idx="1">
-            <a:schemeClr val="accent2"/>
-          </a:lnRef>
-          <a:fillRef idx="0">
-            <a:schemeClr val="accent2"/>
-          </a:fillRef>
-          <a:effectRef idx="0">
-            <a:schemeClr val="accent2"/>
-          </a:effectRef>
-          <a:fontRef idx="minor">
-            <a:schemeClr val="tx1"/>
-          </a:fontRef>
-        </p:style>
-      </p:cxnSp>
-      <p:cxnSp>
-        <p:nvCxnSpPr>
-          <p:cNvPr id="483" name="Shape 248">
-            <a:extLst>
-              <a:ext uri="{FF2B5EF4-FFF2-40B4-BE49-F238E27FC236}">
-                <a16:creationId xmlns:a16="http://schemas.microsoft.com/office/drawing/2014/main" id="{8FBF95FA-782B-44E5-8A5B-535BAD20D56C}"/>
-              </a:ext>
-            </a:extLst>
-          </p:cNvPr>
-          <p:cNvCxnSpPr>
-            <a:cxnSpLocks/>
-            <a:stCxn id="475" idx="2"/>
-            <a:endCxn id="546" idx="0"/>
-          </p:cNvCxnSpPr>
-          <p:nvPr/>
-        </p:nvCxnSpPr>
-        <p:spPr>
-          <a:xfrm rot="16200000" flipH="1">
-            <a:off x="16371088" y="5748517"/>
-            <a:ext cx="347870" cy="1651910"/>
-          </a:xfrm>
-          <a:prstGeom prst="bentConnector3">
-            <a:avLst>
-              <a:gd name="adj1" fmla="val 50000"/>
-            </a:avLst>
-          </a:prstGeom>
-          <a:ln w="28575">
-            <a:prstDash val="dash"/>
-            <a:tailEnd type="arrow"/>
-          </a:ln>
-        </p:spPr>
-        <p:style>
-          <a:lnRef idx="1">
-            <a:schemeClr val="accent1"/>
-          </a:lnRef>
-          <a:fillRef idx="0">
-            <a:schemeClr val="accent1"/>
-          </a:fillRef>
-          <a:effectRef idx="0">
-            <a:schemeClr val="accent1"/>
-          </a:effectRef>
-          <a:fontRef idx="minor">
-            <a:schemeClr val="tx1"/>
-          </a:fontRef>
-        </p:style>
-      </p:cxnSp>
-      <p:cxnSp>
-        <p:nvCxnSpPr>
-          <p:cNvPr id="485" name="Shape 248">
-            <a:extLst>
-              <a:ext uri="{FF2B5EF4-FFF2-40B4-BE49-F238E27FC236}">
-                <a16:creationId xmlns:a16="http://schemas.microsoft.com/office/drawing/2014/main" id="{DF3711AB-6295-410A-9A2A-94423B778B58}"/>
-              </a:ext>
-            </a:extLst>
-          </p:cNvPr>
-          <p:cNvCxnSpPr>
-            <a:cxnSpLocks/>
-            <a:stCxn id="476" idx="2"/>
-            <a:endCxn id="547" idx="0"/>
-          </p:cNvCxnSpPr>
-          <p:nvPr/>
-        </p:nvCxnSpPr>
-        <p:spPr>
-          <a:xfrm rot="5400000">
-            <a:off x="16367107" y="5749491"/>
-            <a:ext cx="347869" cy="1649963"/>
-          </a:xfrm>
-          <a:prstGeom prst="bentConnector3">
-            <a:avLst>
-              <a:gd name="adj1" fmla="val 50000"/>
-            </a:avLst>
-          </a:prstGeom>
-          <a:ln w="28575">
-            <a:prstDash val="dash"/>
-            <a:tailEnd type="arrow"/>
-          </a:ln>
-        </p:spPr>
-        <p:style>
-          <a:lnRef idx="1">
-            <a:schemeClr val="accent1"/>
-          </a:lnRef>
-          <a:fillRef idx="0">
-            <a:schemeClr val="accent1"/>
-          </a:fillRef>
-          <a:effectRef idx="0">
-            <a:schemeClr val="accent1"/>
-          </a:effectRef>
-          <a:fontRef idx="minor">
-            <a:schemeClr val="tx1"/>
-          </a:fontRef>
-        </p:style>
-      </p:cxnSp>
-      <p:cxnSp>
-        <p:nvCxnSpPr>
-          <p:cNvPr id="488" name="Прямая со стрелкой 487">
-            <a:extLst>
-              <a:ext uri="{FF2B5EF4-FFF2-40B4-BE49-F238E27FC236}">
-                <a16:creationId xmlns:a16="http://schemas.microsoft.com/office/drawing/2014/main" id="{A58FD799-D13A-45C5-B00A-AD633F89DE28}"/>
-              </a:ext>
-            </a:extLst>
-          </p:cNvPr>
-          <p:cNvCxnSpPr>
-            <a:cxnSpLocks/>
-            <a:stCxn id="475" idx="2"/>
-            <a:endCxn id="547" idx="0"/>
-          </p:cNvCxnSpPr>
-          <p:nvPr/>
-        </p:nvCxnSpPr>
-        <p:spPr>
-          <a:xfrm flipH="1">
-            <a:off x="15716059" y="6400537"/>
-            <a:ext cx="3009" cy="347870"/>
-          </a:xfrm>
-          <a:prstGeom prst="straightConnector1">
-            <a:avLst/>
-          </a:prstGeom>
-          <a:ln w="28575">
-            <a:prstDash val="dash"/>
-            <a:tailEnd type="arrow"/>
-          </a:ln>
-        </p:spPr>
-        <p:style>
-          <a:lnRef idx="1">
-            <a:schemeClr val="accent1"/>
-          </a:lnRef>
-          <a:fillRef idx="0">
-            <a:schemeClr val="accent1"/>
-          </a:fillRef>
-          <a:effectRef idx="0">
-            <a:schemeClr val="accent1"/>
-          </a:effectRef>
-          <a:fontRef idx="minor">
-            <a:schemeClr val="tx1"/>
-          </a:fontRef>
-        </p:style>
-      </p:cxnSp>
-      <p:cxnSp>
-        <p:nvCxnSpPr>
-          <p:cNvPr id="491" name="Прямая со стрелкой 490">
-            <a:extLst>
-              <a:ext uri="{FF2B5EF4-FFF2-40B4-BE49-F238E27FC236}">
-                <a16:creationId xmlns:a16="http://schemas.microsoft.com/office/drawing/2014/main" id="{EBA5CF81-C209-4598-A828-02270094403C}"/>
-              </a:ext>
-            </a:extLst>
-          </p:cNvPr>
-          <p:cNvCxnSpPr>
-            <a:cxnSpLocks/>
-            <a:stCxn id="476" idx="2"/>
-            <a:endCxn id="546" idx="0"/>
-          </p:cNvCxnSpPr>
-          <p:nvPr/>
-        </p:nvCxnSpPr>
-        <p:spPr>
-          <a:xfrm>
-            <a:off x="17366022" y="6400538"/>
-            <a:ext cx="4956" cy="347869"/>
-          </a:xfrm>
-          <a:prstGeom prst="straightConnector1">
-            <a:avLst/>
-          </a:prstGeom>
-          <a:ln w="28575">
-            <a:prstDash val="dash"/>
-            <a:tailEnd type="arrow"/>
-          </a:ln>
-        </p:spPr>
-        <p:style>
-          <a:lnRef idx="1">
-            <a:schemeClr val="accent1"/>
-          </a:lnRef>
-          <a:fillRef idx="0">
-            <a:schemeClr val="accent1"/>
-          </a:fillRef>
-          <a:effectRef idx="0">
-            <a:schemeClr val="accent1"/>
-          </a:effectRef>
-          <a:fontRef idx="minor">
-            <a:schemeClr val="tx1"/>
-          </a:fontRef>
-        </p:style>
-      </p:cxnSp>
       <p:cxnSp>
         <p:nvCxnSpPr>
           <p:cNvPr id="497" name="Прямая со стрелкой 496">
@@ -24643,8 +24279,8 @@
         </p:nvCxnSpPr>
         <p:spPr>
           <a:xfrm rot="5400000">
-            <a:off x="14631823" y="3629687"/>
-            <a:ext cx="453135" cy="1732521"/>
+            <a:off x="15064953" y="4062817"/>
+            <a:ext cx="453135" cy="866260"/>
           </a:xfrm>
           <a:prstGeom prst="bentConnector3">
             <a:avLst>
@@ -24687,9 +24323,9 @@
           <p:nvPr/>
         </p:nvCxnSpPr>
         <p:spPr>
-          <a:xfrm rot="5400000">
-            <a:off x="13765561" y="4492391"/>
-            <a:ext cx="456692" cy="3556"/>
+          <a:xfrm rot="16200000" flipH="1">
+            <a:off x="14198691" y="4062816"/>
+            <a:ext cx="456692" cy="862705"/>
           </a:xfrm>
           <a:prstGeom prst="bentConnector3">
             <a:avLst>
@@ -24733,8 +24369,8 @@
         </p:nvCxnSpPr>
         <p:spPr>
           <a:xfrm>
-            <a:off x="13992129" y="5361530"/>
-            <a:ext cx="5375" cy="399992"/>
+            <a:off x="14858390" y="5361530"/>
+            <a:ext cx="4596" cy="399993"/>
           </a:xfrm>
           <a:prstGeom prst="straightConnector1">
             <a:avLst/>
@@ -26839,8 +26475,8 @@
         </p:nvCxnSpPr>
         <p:spPr>
           <a:xfrm rot="5400000">
-            <a:off x="16757478" y="4075231"/>
-            <a:ext cx="443906" cy="850664"/>
+            <a:off x="16752716" y="4070469"/>
+            <a:ext cx="443906" cy="860189"/>
           </a:xfrm>
           <a:prstGeom prst="bentConnector3">
             <a:avLst>
@@ -30114,6 +29750,139 @@
           </a:p>
         </p:txBody>
       </p:sp>
+      <p:cxnSp>
+        <p:nvCxnSpPr>
+          <p:cNvPr id="583" name="Shape 248">
+            <a:extLst>
+              <a:ext uri="{FF2B5EF4-FFF2-40B4-BE49-F238E27FC236}">
+                <a16:creationId xmlns:a16="http://schemas.microsoft.com/office/drawing/2014/main" id="{99DB9D5F-5DE9-4010-BA51-B858F47C69D3}"/>
+              </a:ext>
+            </a:extLst>
+          </p:cNvPr>
+          <p:cNvCxnSpPr>
+            <a:cxnSpLocks/>
+            <a:stCxn id="476" idx="2"/>
+            <a:endCxn id="547" idx="0"/>
+          </p:cNvCxnSpPr>
+          <p:nvPr/>
+        </p:nvCxnSpPr>
+        <p:spPr>
+          <a:xfrm rot="5400000">
+            <a:off x="15958597" y="6159927"/>
+            <a:ext cx="345943" cy="831017"/>
+          </a:xfrm>
+          <a:prstGeom prst="bentConnector3">
+            <a:avLst>
+              <a:gd name="adj1" fmla="val 50000"/>
+            </a:avLst>
+          </a:prstGeom>
+          <a:ln w="28575">
+            <a:tailEnd type="arrow"/>
+          </a:ln>
+        </p:spPr>
+        <p:style>
+          <a:lnRef idx="1">
+            <a:schemeClr val="accent1"/>
+          </a:lnRef>
+          <a:fillRef idx="0">
+            <a:schemeClr val="accent1"/>
+          </a:fillRef>
+          <a:effectRef idx="0">
+            <a:schemeClr val="accent1"/>
+          </a:effectRef>
+          <a:fontRef idx="minor">
+            <a:schemeClr val="tx1"/>
+          </a:fontRef>
+        </p:style>
+      </p:cxnSp>
+      <p:cxnSp>
+        <p:nvCxnSpPr>
+          <p:cNvPr id="584" name="Shape 248">
+            <a:extLst>
+              <a:ext uri="{FF2B5EF4-FFF2-40B4-BE49-F238E27FC236}">
+                <a16:creationId xmlns:a16="http://schemas.microsoft.com/office/drawing/2014/main" id="{DC99852F-F757-49C1-8229-F071A8D930B8}"/>
+              </a:ext>
+            </a:extLst>
+          </p:cNvPr>
+          <p:cNvCxnSpPr>
+            <a:cxnSpLocks/>
+            <a:stCxn id="476" idx="2"/>
+            <a:endCxn id="546" idx="0"/>
+          </p:cNvCxnSpPr>
+          <p:nvPr/>
+        </p:nvCxnSpPr>
+        <p:spPr>
+          <a:xfrm rot="16200000" flipH="1">
+            <a:off x="16786056" y="6163484"/>
+            <a:ext cx="345943" cy="823902"/>
+          </a:xfrm>
+          <a:prstGeom prst="bentConnector3">
+            <a:avLst>
+              <a:gd name="adj1" fmla="val 50000"/>
+            </a:avLst>
+          </a:prstGeom>
+          <a:ln w="28575">
+            <a:tailEnd type="arrow"/>
+          </a:ln>
+        </p:spPr>
+        <p:style>
+          <a:lnRef idx="1">
+            <a:schemeClr val="accent1"/>
+          </a:lnRef>
+          <a:fillRef idx="0">
+            <a:schemeClr val="accent1"/>
+          </a:fillRef>
+          <a:effectRef idx="0">
+            <a:schemeClr val="accent1"/>
+          </a:effectRef>
+          <a:fontRef idx="minor">
+            <a:schemeClr val="tx1"/>
+          </a:fontRef>
+        </p:style>
+      </p:cxnSp>
+      <p:cxnSp>
+        <p:nvCxnSpPr>
+          <p:cNvPr id="659" name="Прямая со стрелкой 658">
+            <a:extLst>
+              <a:ext uri="{FF2B5EF4-FFF2-40B4-BE49-F238E27FC236}">
+                <a16:creationId xmlns:a16="http://schemas.microsoft.com/office/drawing/2014/main" id="{E15831D3-02E0-43B2-B53C-040E35F74958}"/>
+              </a:ext>
+            </a:extLst>
+          </p:cNvPr>
+          <p:cNvCxnSpPr>
+            <a:cxnSpLocks/>
+            <a:stCxn id="416" idx="2"/>
+            <a:endCxn id="476" idx="0"/>
+          </p:cNvCxnSpPr>
+          <p:nvPr/>
+        </p:nvCxnSpPr>
+        <p:spPr>
+          <a:xfrm>
+            <a:off x="16544574" y="5361531"/>
+            <a:ext cx="2502" cy="401918"/>
+          </a:xfrm>
+          <a:prstGeom prst="straightConnector1">
+            <a:avLst/>
+          </a:prstGeom>
+          <a:ln w="28575">
+            <a:tailEnd type="arrow"/>
+          </a:ln>
+        </p:spPr>
+        <p:style>
+          <a:lnRef idx="1">
+            <a:schemeClr val="accent1"/>
+          </a:lnRef>
+          <a:fillRef idx="0">
+            <a:schemeClr val="accent1"/>
+          </a:fillRef>
+          <a:effectRef idx="0">
+            <a:schemeClr val="accent1"/>
+          </a:effectRef>
+          <a:fontRef idx="minor">
+            <a:schemeClr val="tx1"/>
+          </a:fontRef>
+        </p:style>
+      </p:cxnSp>
     </p:spTree>
     <p:extLst>
       <p:ext uri="{BB962C8B-B14F-4D97-AF65-F5344CB8AC3E}">

--- a/Наработки/диздоки/ЮАС/ЮАС общая.pptx
+++ b/Наработки/диздоки/ЮАС/ЮАС общая.pptx
@@ -209,7 +209,7 @@
             <a:fld id="{33E3D7F9-E251-484C-A6FF-FA958879DF69}" type="datetimeFigureOut">
               <a:rPr lang="ru-RU" smtClean="0"/>
               <a:pPr/>
-              <a:t>05.02.2026</a:t>
+              <a:t>10.02.2026</a:t>
             </a:fld>
             <a:endParaRPr lang="ru-RU"/>
           </a:p>
@@ -699,7 +699,7 @@
             <a:fld id="{85A5DE44-605B-4D3B-B2B7-94543DF81A36}" type="datetimeFigureOut">
               <a:rPr lang="ru-RU" smtClean="0"/>
               <a:pPr/>
-              <a:t>05.02.2026</a:t>
+              <a:t>10.02.2026</a:t>
             </a:fld>
             <a:endParaRPr lang="ru-RU"/>
           </a:p>
@@ -871,7 +871,7 @@
             <a:fld id="{85A5DE44-605B-4D3B-B2B7-94543DF81A36}" type="datetimeFigureOut">
               <a:rPr lang="ru-RU" smtClean="0"/>
               <a:pPr/>
-              <a:t>05.02.2026</a:t>
+              <a:t>10.02.2026</a:t>
             </a:fld>
             <a:endParaRPr lang="ru-RU"/>
           </a:p>
@@ -1053,7 +1053,7 @@
             <a:fld id="{85A5DE44-605B-4D3B-B2B7-94543DF81A36}" type="datetimeFigureOut">
               <a:rPr lang="ru-RU" smtClean="0"/>
               <a:pPr/>
-              <a:t>05.02.2026</a:t>
+              <a:t>10.02.2026</a:t>
             </a:fld>
             <a:endParaRPr lang="ru-RU"/>
           </a:p>
@@ -1225,7 +1225,7 @@
             <a:fld id="{85A5DE44-605B-4D3B-B2B7-94543DF81A36}" type="datetimeFigureOut">
               <a:rPr lang="ru-RU" smtClean="0"/>
               <a:pPr/>
-              <a:t>05.02.2026</a:t>
+              <a:t>10.02.2026</a:t>
             </a:fld>
             <a:endParaRPr lang="ru-RU"/>
           </a:p>
@@ -1473,7 +1473,7 @@
             <a:fld id="{85A5DE44-605B-4D3B-B2B7-94543DF81A36}" type="datetimeFigureOut">
               <a:rPr lang="ru-RU" smtClean="0"/>
               <a:pPr/>
-              <a:t>05.02.2026</a:t>
+              <a:t>10.02.2026</a:t>
             </a:fld>
             <a:endParaRPr lang="ru-RU"/>
           </a:p>
@@ -1707,7 +1707,7 @@
             <a:fld id="{85A5DE44-605B-4D3B-B2B7-94543DF81A36}" type="datetimeFigureOut">
               <a:rPr lang="ru-RU" smtClean="0"/>
               <a:pPr/>
-              <a:t>05.02.2026</a:t>
+              <a:t>10.02.2026</a:t>
             </a:fld>
             <a:endParaRPr lang="ru-RU"/>
           </a:p>
@@ -2076,7 +2076,7 @@
             <a:fld id="{85A5DE44-605B-4D3B-B2B7-94543DF81A36}" type="datetimeFigureOut">
               <a:rPr lang="ru-RU" smtClean="0"/>
               <a:pPr/>
-              <a:t>05.02.2026</a:t>
+              <a:t>10.02.2026</a:t>
             </a:fld>
             <a:endParaRPr lang="ru-RU"/>
           </a:p>
@@ -2196,7 +2196,7 @@
             <a:fld id="{85A5DE44-605B-4D3B-B2B7-94543DF81A36}" type="datetimeFigureOut">
               <a:rPr lang="ru-RU" smtClean="0"/>
               <a:pPr/>
-              <a:t>05.02.2026</a:t>
+              <a:t>10.02.2026</a:t>
             </a:fld>
             <a:endParaRPr lang="ru-RU"/>
           </a:p>
@@ -2293,7 +2293,7 @@
             <a:fld id="{85A5DE44-605B-4D3B-B2B7-94543DF81A36}" type="datetimeFigureOut">
               <a:rPr lang="ru-RU" smtClean="0"/>
               <a:pPr/>
-              <a:t>05.02.2026</a:t>
+              <a:t>10.02.2026</a:t>
             </a:fld>
             <a:endParaRPr lang="ru-RU"/>
           </a:p>
@@ -2572,7 +2572,7 @@
             <a:fld id="{85A5DE44-605B-4D3B-B2B7-94543DF81A36}" type="datetimeFigureOut">
               <a:rPr lang="ru-RU" smtClean="0"/>
               <a:pPr/>
-              <a:t>05.02.2026</a:t>
+              <a:t>10.02.2026</a:t>
             </a:fld>
             <a:endParaRPr lang="ru-RU"/>
           </a:p>
@@ -2831,7 +2831,7 @@
             <a:fld id="{85A5DE44-605B-4D3B-B2B7-94543DF81A36}" type="datetimeFigureOut">
               <a:rPr lang="ru-RU" smtClean="0"/>
               <a:pPr/>
-              <a:t>05.02.2026</a:t>
+              <a:t>10.02.2026</a:t>
             </a:fld>
             <a:endParaRPr lang="ru-RU"/>
           </a:p>
@@ -3046,7 +3046,7 @@
             <a:fld id="{85A5DE44-605B-4D3B-B2B7-94543DF81A36}" type="datetimeFigureOut">
               <a:rPr lang="ru-RU" smtClean="0"/>
               <a:pPr/>
-              <a:t>05.02.2026</a:t>
+              <a:t>10.02.2026</a:t>
             </a:fld>
             <a:endParaRPr lang="ru-RU"/>
           </a:p>
@@ -16606,7 +16606,7 @@
             <a:pPr algn="ctr"/>
             <a:r>
               <a:rPr lang="ru-RU" sz="1100" dirty="0"/>
-              <a:t>Открыть троллейбусное движение в Кейптауне</a:t>
+              <a:t>Открыть троллейбусное движение в Кейптауне (февраль 1936)</a:t>
             </a:r>
             <a:endParaRPr lang="ru-RU" sz="600" dirty="0"/>
           </a:p>
@@ -20031,7 +20031,7 @@
         </p:nvSpPr>
         <p:spPr>
           <a:xfrm>
-            <a:off x="7870037" y="534590"/>
+            <a:off x="4886216" y="534590"/>
             <a:ext cx="1156124" cy="645064"/>
           </a:xfrm>
           <a:prstGeom prst="rect">
@@ -20087,7 +20087,7 @@
         </p:nvCxnSpPr>
         <p:spPr>
           <a:xfrm>
-            <a:off x="8205035" y="5044502"/>
+            <a:off x="5221214" y="5044502"/>
             <a:ext cx="504579" cy="3511"/>
           </a:xfrm>
           <a:prstGeom prst="line">
@@ -20128,7 +20128,7 @@
         </p:nvSpPr>
         <p:spPr>
           <a:xfrm>
-            <a:off x="7876073" y="3630820"/>
+            <a:off x="4892252" y="3630820"/>
             <a:ext cx="1156124" cy="645064"/>
           </a:xfrm>
           <a:prstGeom prst="rect">
@@ -20196,7 +20196,7 @@
         </p:nvSpPr>
         <p:spPr>
           <a:xfrm>
-            <a:off x="7048911" y="4721970"/>
+            <a:off x="4065090" y="4721970"/>
             <a:ext cx="1156124" cy="645064"/>
           </a:xfrm>
           <a:prstGeom prst="rect">
@@ -20248,7 +20248,7 @@
         </p:nvSpPr>
         <p:spPr>
           <a:xfrm>
-            <a:off x="8709614" y="4725481"/>
+            <a:off x="5725793" y="4725481"/>
             <a:ext cx="1156124" cy="645064"/>
           </a:xfrm>
           <a:prstGeom prst="rect">
@@ -20299,7 +20299,7 @@
         </p:nvSpPr>
         <p:spPr>
           <a:xfrm>
-            <a:off x="6226860" y="3630293"/>
+            <a:off x="3243039" y="3630293"/>
             <a:ext cx="1156124" cy="645064"/>
           </a:xfrm>
           <a:prstGeom prst="rect">
@@ -20351,7 +20351,7 @@
         </p:nvSpPr>
         <p:spPr>
           <a:xfrm>
-            <a:off x="7875433" y="1566667"/>
+            <a:off x="4891612" y="1566667"/>
             <a:ext cx="1156124" cy="643812"/>
           </a:xfrm>
           <a:prstGeom prst="rect">
@@ -20403,7 +20403,7 @@
         </p:nvSpPr>
         <p:spPr>
           <a:xfrm>
-            <a:off x="5415239" y="2618185"/>
+            <a:off x="2431418" y="2618185"/>
             <a:ext cx="1156124" cy="645064"/>
           </a:xfrm>
           <a:prstGeom prst="rect">
@@ -20459,7 +20459,7 @@
         </p:nvSpPr>
         <p:spPr>
           <a:xfrm>
-            <a:off x="3872126" y="1551449"/>
+            <a:off x="888305" y="1551449"/>
             <a:ext cx="1156124" cy="645064"/>
           </a:xfrm>
           <a:prstGeom prst="rect">
@@ -20511,7 +20511,7 @@
         </p:nvSpPr>
         <p:spPr>
           <a:xfrm>
-            <a:off x="8711728" y="2617192"/>
+            <a:off x="5727907" y="2617192"/>
             <a:ext cx="1156124" cy="645064"/>
           </a:xfrm>
           <a:prstGeom prst="rect">
@@ -20563,7 +20563,7 @@
         </p:nvSpPr>
         <p:spPr>
           <a:xfrm>
-            <a:off x="3869366" y="2626035"/>
+            <a:off x="885545" y="2626035"/>
             <a:ext cx="1156124" cy="645064"/>
           </a:xfrm>
           <a:prstGeom prst="rect">
@@ -20615,7 +20615,7 @@
         </p:nvSpPr>
         <p:spPr>
           <a:xfrm>
-            <a:off x="9472896" y="1567398"/>
+            <a:off x="6489075" y="1567398"/>
             <a:ext cx="1156124" cy="645064"/>
           </a:xfrm>
           <a:prstGeom prst="rect">
@@ -20667,7 +20667,7 @@
         </p:nvSpPr>
         <p:spPr>
           <a:xfrm>
-            <a:off x="5417570" y="4735635"/>
+            <a:off x="2433749" y="4735635"/>
             <a:ext cx="1156124" cy="645064"/>
           </a:xfrm>
           <a:prstGeom prst="rect">
@@ -20719,7 +20719,7 @@
         </p:nvSpPr>
         <p:spPr>
           <a:xfrm>
-            <a:off x="3082912" y="3636870"/>
+            <a:off x="99091" y="3636870"/>
             <a:ext cx="1156124" cy="645064"/>
           </a:xfrm>
           <a:prstGeom prst="rect">
@@ -20814,7 +20814,7 @@
         </p:nvSpPr>
         <p:spPr>
           <a:xfrm>
-            <a:off x="20257790" y="534590"/>
+            <a:off x="17273969" y="534590"/>
             <a:ext cx="1144480" cy="639015"/>
           </a:xfrm>
           <a:prstGeom prst="rect">
@@ -20863,7 +20863,7 @@
         </p:nvSpPr>
         <p:spPr>
           <a:xfrm>
-            <a:off x="25137488" y="1561665"/>
+            <a:off x="22153667" y="1561665"/>
             <a:ext cx="1144480" cy="639015"/>
           </a:xfrm>
           <a:prstGeom prst="rect">
@@ -20918,7 +20918,7 @@
         </p:nvSpPr>
         <p:spPr>
           <a:xfrm>
-            <a:off x="14286150" y="1557499"/>
+            <a:off x="11302329" y="1557499"/>
             <a:ext cx="1144480" cy="639015"/>
           </a:xfrm>
           <a:prstGeom prst="rect">
@@ -21002,7 +21002,7 @@
             <a:pPr algn="ctr"/>
             <a:r>
               <a:rPr lang="ru-RU" sz="1100" dirty="0"/>
-              <a:t>Закон о представительстве коренных народов</a:t>
+              <a:t>Закон о представительстве коренных народов (7 апреля 1936</a:t>
             </a:r>
             <a:endParaRPr lang="ru-RU" sz="600" dirty="0"/>
           </a:p>
@@ -21022,7 +21022,7 @@
         </p:nvSpPr>
         <p:spPr>
           <a:xfrm>
-            <a:off x="20257790" y="1573051"/>
+            <a:off x="17273969" y="1573051"/>
             <a:ext cx="1144480" cy="639015"/>
           </a:xfrm>
           <a:prstGeom prst="rect">
@@ -21126,7 +21126,7 @@
         </p:nvSpPr>
         <p:spPr>
           <a:xfrm>
-            <a:off x="20257790" y="2623375"/>
+            <a:off x="17273969" y="2623375"/>
             <a:ext cx="1144480" cy="639015"/>
           </a:xfrm>
           <a:prstGeom prst="rect">
@@ -21188,7 +21188,7 @@
         </p:nvSpPr>
         <p:spPr>
           <a:xfrm>
-            <a:off x="21106983" y="3639599"/>
+            <a:off x="18123162" y="3639599"/>
             <a:ext cx="1144480" cy="639015"/>
           </a:xfrm>
           <a:prstGeom prst="rect">
@@ -21243,7 +21243,7 @@
         </p:nvSpPr>
         <p:spPr>
           <a:xfrm>
-            <a:off x="19402599" y="3639599"/>
+            <a:off x="16418778" y="3639599"/>
             <a:ext cx="1144480" cy="639015"/>
           </a:xfrm>
           <a:prstGeom prst="rect">
@@ -21301,7 +21301,7 @@
         </p:nvCxnSpPr>
         <p:spPr>
           <a:xfrm flipV="1">
-            <a:off x="21402270" y="1881173"/>
+            <a:off x="18418449" y="1881173"/>
             <a:ext cx="3735218" cy="11386"/>
           </a:xfrm>
           <a:prstGeom prst="line">
@@ -21346,7 +21346,7 @@
         </p:nvCxnSpPr>
         <p:spPr>
           <a:xfrm>
-            <a:off x="15430630" y="1877007"/>
+            <a:off x="12446809" y="1877007"/>
             <a:ext cx="4827160" cy="15552"/>
           </a:xfrm>
           <a:prstGeom prst="line">
@@ -21391,7 +21391,7 @@
         </p:nvCxnSpPr>
         <p:spPr>
           <a:xfrm rot="5400000">
-            <a:off x="17652263" y="-1620268"/>
+            <a:off x="14668442" y="-1620268"/>
             <a:ext cx="383894" cy="5971640"/>
           </a:xfrm>
           <a:prstGeom prst="bentConnector3">
@@ -21436,7 +21436,7 @@
         </p:nvCxnSpPr>
         <p:spPr>
           <a:xfrm rot="16200000" flipH="1">
-            <a:off x="23075849" y="-1072214"/>
+            <a:off x="20092028" y="-1072214"/>
             <a:ext cx="388060" cy="4879698"/>
           </a:xfrm>
           <a:prstGeom prst="bentConnector3">
@@ -21481,7 +21481,7 @@
         </p:nvCxnSpPr>
         <p:spPr>
           <a:xfrm>
-            <a:off x="20830030" y="1173605"/>
+            <a:off x="17846209" y="1173605"/>
             <a:ext cx="0" cy="399446"/>
           </a:xfrm>
           <a:prstGeom prst="straightConnector1">
@@ -21524,7 +21524,7 @@
         </p:nvCxnSpPr>
         <p:spPr>
           <a:xfrm>
-            <a:off x="20830030" y="2212066"/>
+            <a:off x="17846209" y="2212066"/>
             <a:ext cx="0" cy="411309"/>
           </a:xfrm>
           <a:prstGeom prst="straightConnector1">
@@ -21567,7 +21567,7 @@
         </p:nvCxnSpPr>
         <p:spPr>
           <a:xfrm rot="5400000">
-            <a:off x="20213831" y="3023399"/>
+            <a:off x="17230010" y="3023399"/>
             <a:ext cx="377209" cy="855191"/>
           </a:xfrm>
           <a:prstGeom prst="bentConnector3">
@@ -21612,7 +21612,7 @@
         </p:nvCxnSpPr>
         <p:spPr>
           <a:xfrm rot="16200000" flipH="1">
-            <a:off x="21066022" y="3026397"/>
+            <a:off x="18082201" y="3026397"/>
             <a:ext cx="377209" cy="849193"/>
           </a:xfrm>
           <a:prstGeom prst="bentConnector3">
@@ -21657,7 +21657,7 @@
         </p:nvCxnSpPr>
         <p:spPr>
           <a:xfrm>
-            <a:off x="20547079" y="3959107"/>
+            <a:off x="17563258" y="3959107"/>
             <a:ext cx="559904" cy="0"/>
           </a:xfrm>
           <a:prstGeom prst="line">
@@ -21698,7 +21698,7 @@
         </p:nvSpPr>
         <p:spPr>
           <a:xfrm>
-            <a:off x="17692229" y="4727542"/>
+            <a:off x="14708408" y="4727542"/>
             <a:ext cx="1144480" cy="639015"/>
           </a:xfrm>
           <a:prstGeom prst="rect">
@@ -21752,7 +21752,7 @@
         </p:nvSpPr>
         <p:spPr>
           <a:xfrm>
-            <a:off x="15972334" y="4722516"/>
+            <a:off x="12988513" y="4722516"/>
             <a:ext cx="1144480" cy="639015"/>
           </a:xfrm>
           <a:prstGeom prst="rect">
@@ -21805,7 +21805,7 @@
         </p:nvCxnSpPr>
         <p:spPr>
           <a:xfrm rot="5400000">
-            <a:off x="19743336" y="4510117"/>
+            <a:off x="16759515" y="4510117"/>
             <a:ext cx="463006" cy="12700"/>
           </a:xfrm>
           <a:prstGeom prst="bentConnector3">
@@ -21847,7 +21847,7 @@
         </p:nvSpPr>
         <p:spPr>
           <a:xfrm>
-            <a:off x="21106982" y="4741622"/>
+            <a:off x="18123161" y="4741622"/>
             <a:ext cx="1144480" cy="639015"/>
           </a:xfrm>
           <a:prstGeom prst="rect">
@@ -21906,7 +21906,7 @@
         </p:nvCxnSpPr>
         <p:spPr>
           <a:xfrm flipH="1">
-            <a:off x="21679222" y="4278614"/>
+            <a:off x="18695401" y="4278614"/>
             <a:ext cx="1" cy="463008"/>
           </a:xfrm>
           <a:prstGeom prst="straightConnector1">
@@ -21950,7 +21950,7 @@
         </p:nvCxnSpPr>
         <p:spPr>
           <a:xfrm rot="16200000" flipH="1">
-            <a:off x="19663518" y="4589934"/>
+            <a:off x="16679697" y="4589934"/>
             <a:ext cx="1474833" cy="852191"/>
           </a:xfrm>
           <a:prstGeom prst="bentConnector3">
@@ -21996,7 +21996,7 @@
         </p:nvCxnSpPr>
         <p:spPr>
           <a:xfrm rot="5400000">
-            <a:off x="20515711" y="4589934"/>
+            <a:off x="17531890" y="4589934"/>
             <a:ext cx="1474833" cy="852193"/>
           </a:xfrm>
           <a:prstGeom prst="bentConnector3">
@@ -22038,7 +22038,7 @@
         </p:nvSpPr>
         <p:spPr>
           <a:xfrm>
-            <a:off x="21962240" y="5750271"/>
+            <a:off x="18978419" y="5750271"/>
             <a:ext cx="1144480" cy="639015"/>
           </a:xfrm>
           <a:prstGeom prst="rect">
@@ -22097,7 +22097,7 @@
         </p:nvCxnSpPr>
         <p:spPr>
           <a:xfrm rot="16200000" flipH="1">
-            <a:off x="21371023" y="4586813"/>
+            <a:off x="18387202" y="4586813"/>
             <a:ext cx="1471657" cy="855257"/>
           </a:xfrm>
           <a:prstGeom prst="bentConnector3">
@@ -22138,7 +22138,7 @@
         </p:nvSpPr>
         <p:spPr>
           <a:xfrm>
-            <a:off x="18544421" y="5761523"/>
+            <a:off x="15560600" y="5761523"/>
             <a:ext cx="1144480" cy="639015"/>
           </a:xfrm>
           <a:prstGeom prst="rect">
@@ -22196,7 +22196,7 @@
         </p:nvCxnSpPr>
         <p:spPr>
           <a:xfrm rot="5400000">
-            <a:off x="18804296" y="4590979"/>
+            <a:off x="15820475" y="4590979"/>
             <a:ext cx="1482909" cy="858178"/>
           </a:xfrm>
           <a:prstGeom prst="bentConnector3">
@@ -22237,7 +22237,7 @@
         </p:nvSpPr>
         <p:spPr>
           <a:xfrm>
-            <a:off x="22822861" y="4747970"/>
+            <a:off x="19839040" y="4747970"/>
             <a:ext cx="1144480" cy="639015"/>
           </a:xfrm>
           <a:prstGeom prst="rect">
@@ -22292,7 +22292,7 @@
         </p:nvSpPr>
         <p:spPr>
           <a:xfrm>
-            <a:off x="22829015" y="7697013"/>
+            <a:off x="19845194" y="7697013"/>
             <a:ext cx="1144480" cy="639015"/>
           </a:xfrm>
           <a:prstGeom prst="rect">
@@ -22351,7 +22351,7 @@
         </p:nvCxnSpPr>
         <p:spPr>
           <a:xfrm rot="16200000" flipH="1">
-            <a:off x="22302484" y="3655353"/>
+            <a:off x="19318663" y="3655353"/>
             <a:ext cx="469356" cy="1715878"/>
           </a:xfrm>
           <a:prstGeom prst="bentConnector3">
@@ -22396,7 +22396,7 @@
         </p:nvCxnSpPr>
         <p:spPr>
           <a:xfrm rot="16200000" flipH="1">
-            <a:off x="22243164" y="6538922"/>
+            <a:off x="19259343" y="6538922"/>
             <a:ext cx="2310028" cy="6154"/>
           </a:xfrm>
           <a:prstGeom prst="bentConnector3">
@@ -22441,7 +22441,7 @@
         </p:nvCxnSpPr>
         <p:spPr>
           <a:xfrm rot="5400000">
-            <a:off x="18895190" y="3647893"/>
+            <a:off x="15911369" y="3647893"/>
             <a:ext cx="448928" cy="1710370"/>
           </a:xfrm>
           <a:prstGeom prst="bentConnector3">
@@ -22482,7 +22482,7 @@
         </p:nvSpPr>
         <p:spPr>
           <a:xfrm>
-            <a:off x="23730568" y="5747304"/>
+            <a:off x="20746747" y="5747304"/>
             <a:ext cx="1144480" cy="639015"/>
           </a:xfrm>
           <a:prstGeom prst="rect">
@@ -22541,7 +22541,7 @@
         </p:nvCxnSpPr>
         <p:spPr>
           <a:xfrm rot="16200000" flipH="1">
-            <a:off x="22256670" y="3701166"/>
+            <a:off x="19272849" y="3701166"/>
             <a:ext cx="1468690" cy="2623585"/>
           </a:xfrm>
           <a:prstGeom prst="bentConnector3">
@@ -22582,7 +22582,7 @@
         </p:nvSpPr>
         <p:spPr>
           <a:xfrm>
-            <a:off x="23731143" y="6748405"/>
+            <a:off x="20747322" y="6748405"/>
             <a:ext cx="1144480" cy="639015"/>
           </a:xfrm>
           <a:prstGeom prst="rect">
@@ -22641,7 +22641,7 @@
         </p:nvCxnSpPr>
         <p:spPr>
           <a:xfrm>
-            <a:off x="24302808" y="6386319"/>
+            <a:off x="21318987" y="6386319"/>
             <a:ext cx="575" cy="362086"/>
           </a:xfrm>
           <a:prstGeom prst="straightConnector1">
@@ -22684,7 +22684,7 @@
         </p:nvCxnSpPr>
         <p:spPr>
           <a:xfrm rot="5400000">
-            <a:off x="18037756" y="2785433"/>
+            <a:off x="15053935" y="2785433"/>
             <a:ext cx="443902" cy="3430265"/>
           </a:xfrm>
           <a:prstGeom prst="bentConnector3">
@@ -22726,7 +22726,7 @@
         </p:nvSpPr>
         <p:spPr>
           <a:xfrm>
-            <a:off x="16832523" y="3639595"/>
+            <a:off x="13848702" y="3639595"/>
             <a:ext cx="1144480" cy="639015"/>
           </a:xfrm>
           <a:prstGeom prst="rect">
@@ -22785,7 +22785,7 @@
         </p:nvSpPr>
         <p:spPr>
           <a:xfrm>
-            <a:off x="16798738" y="6748407"/>
+            <a:off x="13814917" y="6748407"/>
             <a:ext cx="1144480" cy="639015"/>
           </a:xfrm>
           <a:prstGeom prst="rect">
@@ -22838,7 +22838,7 @@
         </p:nvSpPr>
         <p:spPr>
           <a:xfrm>
-            <a:off x="15143819" y="6748407"/>
+            <a:off x="12159998" y="6748407"/>
             <a:ext cx="1144480" cy="639015"/>
           </a:xfrm>
           <a:prstGeom prst="rect">
@@ -22891,7 +22891,7 @@
         </p:nvCxnSpPr>
         <p:spPr>
           <a:xfrm>
-            <a:off x="16288299" y="7067915"/>
+            <a:off x="13304478" y="7067915"/>
             <a:ext cx="510439" cy="0"/>
           </a:xfrm>
           <a:prstGeom prst="line">
@@ -22932,7 +22932,7 @@
         </p:nvSpPr>
         <p:spPr>
           <a:xfrm>
-            <a:off x="15974836" y="7711635"/>
+            <a:off x="12991015" y="7711635"/>
             <a:ext cx="1144480" cy="639015"/>
           </a:xfrm>
           <a:prstGeom prst="rect">
@@ -22985,7 +22985,7 @@
         </p:nvCxnSpPr>
         <p:spPr>
           <a:xfrm rot="5400000">
-            <a:off x="16796921" y="7137577"/>
+            <a:off x="13813100" y="7137577"/>
             <a:ext cx="324213" cy="823902"/>
           </a:xfrm>
           <a:prstGeom prst="bentConnector3">
@@ -23031,7 +23031,7 @@
         </p:nvCxnSpPr>
         <p:spPr>
           <a:xfrm rot="16200000" flipH="1">
-            <a:off x="15969461" y="7134019"/>
+            <a:off x="12985640" y="7134019"/>
             <a:ext cx="324213" cy="831017"/>
           </a:xfrm>
           <a:prstGeom prst="bentConnector3">
@@ -23073,7 +23073,7 @@
         </p:nvSpPr>
         <p:spPr>
           <a:xfrm>
-            <a:off x="17691607" y="7700038"/>
+            <a:off x="14707786" y="7700038"/>
             <a:ext cx="1144480" cy="639015"/>
           </a:xfrm>
           <a:prstGeom prst="rect">
@@ -23131,7 +23131,7 @@
         </p:nvCxnSpPr>
         <p:spPr>
           <a:xfrm flipH="1">
-            <a:off x="18263847" y="5366557"/>
+            <a:off x="15280026" y="5366557"/>
             <a:ext cx="622" cy="2333481"/>
           </a:xfrm>
           <a:prstGeom prst="straightConnector1">
@@ -23174,7 +23174,7 @@
         </p:nvCxnSpPr>
         <p:spPr>
           <a:xfrm rot="16200000" flipH="1">
-            <a:off x="15922444" y="1132460"/>
+            <a:off x="12938623" y="1132460"/>
             <a:ext cx="413562" cy="2541670"/>
           </a:xfrm>
           <a:prstGeom prst="bentConnector3">
@@ -23215,7 +23215,7 @@
         </p:nvSpPr>
         <p:spPr>
           <a:xfrm>
-            <a:off x="23726914" y="2629060"/>
+            <a:off x="20743093" y="2629060"/>
             <a:ext cx="1144480" cy="639015"/>
           </a:xfrm>
           <a:prstGeom prst="rect">
@@ -23274,7 +23274,7 @@
         </p:nvCxnSpPr>
         <p:spPr>
           <a:xfrm rot="5400000">
-            <a:off x="24790251" y="1709583"/>
+            <a:off x="21806430" y="1709583"/>
             <a:ext cx="428380" cy="1410574"/>
           </a:xfrm>
           <a:prstGeom prst="bentConnector3">
@@ -23315,7 +23315,7 @@
         </p:nvSpPr>
         <p:spPr>
           <a:xfrm>
-            <a:off x="22823338" y="3636402"/>
+            <a:off x="19839517" y="3636402"/>
             <a:ext cx="1144480" cy="639015"/>
           </a:xfrm>
           <a:prstGeom prst="rect">
@@ -23378,7 +23378,7 @@
         </p:nvSpPr>
         <p:spPr>
           <a:xfrm>
-            <a:off x="25136780" y="2637112"/>
+            <a:off x="22152959" y="2637112"/>
             <a:ext cx="1144480" cy="639015"/>
           </a:xfrm>
           <a:prstGeom prst="rect">
@@ -23437,7 +23437,7 @@
         </p:nvCxnSpPr>
         <p:spPr>
           <a:xfrm>
-            <a:off x="24299154" y="3268075"/>
+            <a:off x="21315333" y="3268075"/>
             <a:ext cx="3654" cy="2479229"/>
           </a:xfrm>
           <a:prstGeom prst="straightConnector1">
@@ -23481,7 +23481,7 @@
         </p:nvCxnSpPr>
         <p:spPr>
           <a:xfrm flipH="1">
-            <a:off x="25709020" y="2200680"/>
+            <a:off x="22725199" y="2200680"/>
             <a:ext cx="708" cy="436432"/>
           </a:xfrm>
           <a:prstGeom prst="straightConnector1">
@@ -23520,7 +23520,7 @@
         </p:nvSpPr>
         <p:spPr>
           <a:xfrm>
-            <a:off x="24509208" y="3639599"/>
+            <a:off x="21525387" y="3639599"/>
             <a:ext cx="1144480" cy="639015"/>
           </a:xfrm>
           <a:prstGeom prst="rect">
@@ -23575,7 +23575,7 @@
         </p:nvSpPr>
         <p:spPr>
           <a:xfrm>
-            <a:off x="25929555" y="3636402"/>
+            <a:off x="22945734" y="3636402"/>
             <a:ext cx="1144480" cy="639015"/>
           </a:xfrm>
           <a:prstGeom prst="rect">
@@ -23634,7 +23634,7 @@
         </p:nvCxnSpPr>
         <p:spPr>
           <a:xfrm rot="16200000" flipH="1">
-            <a:off x="25925270" y="3059876"/>
+            <a:off x="22941449" y="3059876"/>
             <a:ext cx="360275" cy="792775"/>
           </a:xfrm>
           <a:prstGeom prst="bentConnector3">
@@ -23679,7 +23679,7 @@
         </p:nvCxnSpPr>
         <p:spPr>
           <a:xfrm flipV="1">
-            <a:off x="9026161" y="854098"/>
+            <a:off x="6042340" y="854098"/>
             <a:ext cx="11231629" cy="3024"/>
           </a:xfrm>
           <a:prstGeom prst="line">
@@ -23720,7 +23720,7 @@
         </p:nvSpPr>
         <p:spPr>
           <a:xfrm>
-            <a:off x="14290746" y="2619379"/>
+            <a:off x="11306925" y="2619379"/>
             <a:ext cx="1144480" cy="639015"/>
           </a:xfrm>
           <a:prstGeom prst="rect">
@@ -23775,7 +23775,7 @@
         </p:nvSpPr>
         <p:spPr>
           <a:xfrm>
-            <a:off x="15152410" y="3630365"/>
+            <a:off x="12168589" y="3630365"/>
             <a:ext cx="1144480" cy="639015"/>
           </a:xfrm>
           <a:prstGeom prst="rect">
@@ -23829,7 +23829,7 @@
         </p:nvSpPr>
         <p:spPr>
           <a:xfrm>
-            <a:off x="14286150" y="4722515"/>
+            <a:off x="11302329" y="4722515"/>
             <a:ext cx="1144480" cy="639015"/>
           </a:xfrm>
           <a:prstGeom prst="rect">
@@ -23883,7 +23883,7 @@
         </p:nvSpPr>
         <p:spPr>
           <a:xfrm>
-            <a:off x="16827820" y="2610076"/>
+            <a:off x="13843999" y="2610076"/>
             <a:ext cx="1144480" cy="639015"/>
           </a:xfrm>
           <a:prstGeom prst="rect">
@@ -23942,7 +23942,7 @@
         </p:nvSpPr>
         <p:spPr>
           <a:xfrm>
-            <a:off x="13423445" y="3626808"/>
+            <a:off x="10439624" y="3626808"/>
             <a:ext cx="1144480" cy="639015"/>
           </a:xfrm>
           <a:prstGeom prst="rect">
@@ -23996,7 +23996,7 @@
         </p:nvSpPr>
         <p:spPr>
           <a:xfrm>
-            <a:off x="14290746" y="5761523"/>
+            <a:off x="11306925" y="5761523"/>
             <a:ext cx="1144480" cy="639015"/>
           </a:xfrm>
           <a:prstGeom prst="rect">
@@ -24054,7 +24054,7 @@
         </p:nvCxnSpPr>
         <p:spPr>
           <a:xfrm>
-            <a:off x="17400060" y="3249091"/>
+            <a:off x="14416239" y="3249091"/>
             <a:ext cx="4703" cy="390504"/>
           </a:xfrm>
           <a:prstGeom prst="straightConnector1">
@@ -24093,7 +24093,7 @@
         </p:nvSpPr>
         <p:spPr>
           <a:xfrm>
-            <a:off x="15974836" y="5763449"/>
+            <a:off x="12991015" y="5763449"/>
             <a:ext cx="1144480" cy="639015"/>
           </a:xfrm>
           <a:prstGeom prst="rect">
@@ -24146,7 +24146,7 @@
         </p:nvCxnSpPr>
         <p:spPr>
           <a:xfrm>
-            <a:off x="14858390" y="2196514"/>
+            <a:off x="11874569" y="2196514"/>
             <a:ext cx="4596" cy="422865"/>
           </a:xfrm>
           <a:prstGeom prst="straightConnector1">
@@ -24189,7 +24189,7 @@
         </p:nvCxnSpPr>
         <p:spPr>
           <a:xfrm rot="16200000" flipH="1">
-            <a:off x="15107833" y="3013547"/>
+            <a:off x="12124012" y="3013547"/>
             <a:ext cx="371971" cy="861664"/>
           </a:xfrm>
           <a:prstGeom prst="bentConnector3">
@@ -24234,7 +24234,7 @@
         </p:nvCxnSpPr>
         <p:spPr>
           <a:xfrm rot="5400000">
-            <a:off x="14245129" y="3008951"/>
+            <a:off x="11261308" y="3008951"/>
             <a:ext cx="368414" cy="867301"/>
           </a:xfrm>
           <a:prstGeom prst="bentConnector3">
@@ -24279,7 +24279,7 @@
         </p:nvCxnSpPr>
         <p:spPr>
           <a:xfrm rot="5400000">
-            <a:off x="15064953" y="4062817"/>
+            <a:off x="12081132" y="4062817"/>
             <a:ext cx="453135" cy="866260"/>
           </a:xfrm>
           <a:prstGeom prst="bentConnector3">
@@ -24324,7 +24324,7 @@
         </p:nvCxnSpPr>
         <p:spPr>
           <a:xfrm rot="16200000" flipH="1">
-            <a:off x="14198691" y="4062816"/>
+            <a:off x="11214870" y="4062816"/>
             <a:ext cx="456692" cy="862705"/>
           </a:xfrm>
           <a:prstGeom prst="bentConnector3">
@@ -24369,7 +24369,7 @@
         </p:nvCxnSpPr>
         <p:spPr>
           <a:xfrm>
-            <a:off x="14858390" y="5361530"/>
+            <a:off x="11874569" y="5361530"/>
             <a:ext cx="4596" cy="399993"/>
           </a:xfrm>
           <a:prstGeom prst="straightConnector1">
@@ -24408,7 +24408,7 @@
         </p:nvSpPr>
         <p:spPr>
           <a:xfrm>
-            <a:off x="25266524" y="4739837"/>
+            <a:off x="22282703" y="4739837"/>
             <a:ext cx="1144480" cy="639015"/>
           </a:xfrm>
           <a:prstGeom prst="rect">
@@ -24463,7 +24463,7 @@
         </p:nvSpPr>
         <p:spPr>
           <a:xfrm>
-            <a:off x="11116402" y="2614683"/>
+            <a:off x="8132581" y="2614683"/>
             <a:ext cx="1144480" cy="639015"/>
           </a:xfrm>
           <a:prstGeom prst="rect">
@@ -24517,7 +24517,7 @@
         </p:nvSpPr>
         <p:spPr>
           <a:xfrm>
-            <a:off x="11116402" y="5744222"/>
+            <a:off x="8132581" y="5744222"/>
             <a:ext cx="1144480" cy="639015"/>
           </a:xfrm>
           <a:prstGeom prst="rect">
@@ -24571,7 +24571,7 @@
         </p:nvSpPr>
         <p:spPr>
           <a:xfrm>
-            <a:off x="11111252" y="3639595"/>
+            <a:off x="8127431" y="3639595"/>
             <a:ext cx="1144480" cy="639015"/>
           </a:xfrm>
           <a:prstGeom prst="rect">
@@ -24625,7 +24625,7 @@
         </p:nvSpPr>
         <p:spPr>
           <a:xfrm>
-            <a:off x="10280585" y="4722515"/>
+            <a:off x="7296764" y="4722515"/>
             <a:ext cx="1144480" cy="639015"/>
           </a:xfrm>
           <a:prstGeom prst="rect">
@@ -24679,7 +24679,7 @@
         </p:nvSpPr>
         <p:spPr>
           <a:xfrm>
-            <a:off x="11987475" y="4726689"/>
+            <a:off x="9003654" y="4726689"/>
             <a:ext cx="1144480" cy="639015"/>
           </a:xfrm>
           <a:prstGeom prst="rect">
@@ -24737,7 +24737,7 @@
         </p:nvCxnSpPr>
         <p:spPr>
           <a:xfrm rot="5400000">
-            <a:off x="10536326" y="3570198"/>
+            <a:off x="7552505" y="3570198"/>
             <a:ext cx="1468817" cy="835817"/>
           </a:xfrm>
           <a:prstGeom prst="bentConnector3">
@@ -24782,7 +24782,7 @@
         </p:nvCxnSpPr>
         <p:spPr>
           <a:xfrm rot="16200000" flipH="1">
-            <a:off x="9055656" y="572096"/>
+            <a:off x="6071835" y="572096"/>
             <a:ext cx="387744" cy="1602859"/>
           </a:xfrm>
           <a:prstGeom prst="bentConnector3">
@@ -24827,7 +24827,7 @@
         </p:nvCxnSpPr>
         <p:spPr>
           <a:xfrm rot="5400000">
-            <a:off x="7817511" y="4085346"/>
+            <a:off x="4833690" y="4085346"/>
             <a:ext cx="446086" cy="827162"/>
           </a:xfrm>
           <a:prstGeom prst="bentConnector3">
@@ -24872,7 +24872,7 @@
         </p:nvCxnSpPr>
         <p:spPr>
           <a:xfrm rot="16200000" flipH="1">
-            <a:off x="8646107" y="4083911"/>
+            <a:off x="5662286" y="4083911"/>
             <a:ext cx="449597" cy="833541"/>
           </a:xfrm>
           <a:prstGeom prst="bentConnector3">
@@ -24917,7 +24917,7 @@
         </p:nvCxnSpPr>
         <p:spPr>
           <a:xfrm flipH="1">
-            <a:off x="4447428" y="2196513"/>
+            <a:off x="1463607" y="2196513"/>
             <a:ext cx="2760" cy="429522"/>
           </a:xfrm>
           <a:prstGeom prst="straightConnector1">
@@ -24960,7 +24960,7 @@
         </p:nvCxnSpPr>
         <p:spPr>
           <a:xfrm>
-            <a:off x="4447428" y="3271099"/>
+            <a:off x="1463607" y="3271099"/>
             <a:ext cx="2760" cy="1462689"/>
           </a:xfrm>
           <a:prstGeom prst="straightConnector1">
@@ -25003,7 +25003,7 @@
         </p:nvCxnSpPr>
         <p:spPr>
           <a:xfrm rot="5400000">
-            <a:off x="13064432" y="820724"/>
+            <a:off x="10080611" y="820724"/>
             <a:ext cx="418169" cy="3169748"/>
           </a:xfrm>
           <a:prstGeom prst="bentConnector3">
@@ -25049,7 +25049,7 @@
         </p:nvCxnSpPr>
         <p:spPr>
           <a:xfrm rot="16200000" flipH="1">
-            <a:off x="9868966" y="795007"/>
+            <a:off x="6885145" y="795007"/>
             <a:ext cx="404204" cy="3235147"/>
           </a:xfrm>
           <a:prstGeom prst="bentConnector3">
@@ -25365,7 +25365,7 @@
         </p:nvCxnSpPr>
         <p:spPr>
           <a:xfrm flipH="1">
-            <a:off x="11683492" y="3253698"/>
+            <a:off x="8699671" y="3253698"/>
             <a:ext cx="5150" cy="385897"/>
           </a:xfrm>
           <a:prstGeom prst="straightConnector1">
@@ -25408,7 +25408,7 @@
         </p:nvCxnSpPr>
         <p:spPr>
           <a:xfrm rot="16200000" flipH="1">
-            <a:off x="18378478" y="3304894"/>
+            <a:off x="15394657" y="3304894"/>
             <a:ext cx="1474837" cy="3422267"/>
           </a:xfrm>
           <a:prstGeom prst="bentConnector3">
@@ -25450,7 +25450,7 @@
         </p:nvSpPr>
         <p:spPr>
           <a:xfrm>
-            <a:off x="5397843" y="1558142"/>
+            <a:off x="2414022" y="1558142"/>
             <a:ext cx="1156124" cy="645064"/>
           </a:xfrm>
           <a:prstGeom prst="rect">
@@ -25633,7 +25633,7 @@
             <a:pPr algn="ctr"/>
             <a:r>
               <a:rPr lang="ru-RU" sz="1100" dirty="0"/>
-              <a:t>Провести имперскую выставку</a:t>
+              <a:t>Провести имперскую выставку (15 сентября 1936)</a:t>
             </a:r>
             <a:endParaRPr lang="ru-RU" sz="600" dirty="0"/>
           </a:p>
@@ -25974,7 +25974,7 @@
         </p:nvSpPr>
         <p:spPr>
           <a:xfrm>
-            <a:off x="7886449" y="5732602"/>
+            <a:off x="4902628" y="5732602"/>
             <a:ext cx="1156124" cy="645064"/>
           </a:xfrm>
           <a:prstGeom prst="rect">
@@ -26046,7 +26046,7 @@
         </p:nvCxnSpPr>
         <p:spPr>
           <a:xfrm>
-            <a:off x="8454135" y="4275884"/>
+            <a:off x="5470314" y="4275884"/>
             <a:ext cx="10376" cy="1456718"/>
           </a:xfrm>
           <a:prstGeom prst="straightConnector1">
@@ -26085,7 +26085,7 @@
         </p:nvSpPr>
         <p:spPr>
           <a:xfrm>
-            <a:off x="4644640" y="3627340"/>
+            <a:off x="1660819" y="3627340"/>
             <a:ext cx="1156124" cy="645064"/>
           </a:xfrm>
           <a:prstGeom prst="rect">
@@ -26137,7 +26137,7 @@
         </p:nvSpPr>
         <p:spPr>
           <a:xfrm>
-            <a:off x="9472896" y="6747430"/>
+            <a:off x="6489075" y="6747430"/>
             <a:ext cx="1156124" cy="645064"/>
           </a:xfrm>
           <a:prstGeom prst="rect">
@@ -26193,7 +26193,7 @@
         </p:nvCxnSpPr>
         <p:spPr>
           <a:xfrm>
-            <a:off x="8464511" y="6377666"/>
+            <a:off x="5480690" y="6377666"/>
             <a:ext cx="0" cy="362057"/>
           </a:xfrm>
           <a:prstGeom prst="straightConnector1">
@@ -26232,7 +26232,7 @@
         </p:nvSpPr>
         <p:spPr>
           <a:xfrm>
-            <a:off x="7886821" y="7740593"/>
+            <a:off x="4903000" y="7740593"/>
             <a:ext cx="1156124" cy="645064"/>
           </a:xfrm>
           <a:prstGeom prst="rect">
@@ -26284,7 +26284,7 @@
         </p:nvSpPr>
         <p:spPr>
           <a:xfrm>
-            <a:off x="7886449" y="6739723"/>
+            <a:off x="4902628" y="6739723"/>
             <a:ext cx="1156124" cy="645064"/>
           </a:xfrm>
           <a:prstGeom prst="rect">
@@ -26340,7 +26340,7 @@
         </p:nvCxnSpPr>
         <p:spPr>
           <a:xfrm rot="5400000">
-            <a:off x="25213498" y="3144077"/>
+            <a:off x="22229677" y="3144077"/>
             <a:ext cx="363472" cy="627572"/>
           </a:xfrm>
           <a:prstGeom prst="bentConnector3">
@@ -26385,7 +26385,7 @@
         </p:nvCxnSpPr>
         <p:spPr>
           <a:xfrm rot="16200000" flipH="1">
-            <a:off x="25229495" y="4130567"/>
+            <a:off x="22245674" y="4130567"/>
             <a:ext cx="461223" cy="757316"/>
           </a:xfrm>
           <a:prstGeom prst="bentConnector3">
@@ -26430,7 +26430,7 @@
         </p:nvCxnSpPr>
         <p:spPr>
           <a:xfrm rot="5400000">
-            <a:off x="25938070" y="4176112"/>
+            <a:off x="22954249" y="4176112"/>
             <a:ext cx="464420" cy="663031"/>
           </a:xfrm>
           <a:prstGeom prst="bentConnector3">
@@ -26475,7 +26475,7 @@
         </p:nvCxnSpPr>
         <p:spPr>
           <a:xfrm rot="5400000">
-            <a:off x="16752716" y="4070469"/>
+            <a:off x="13768895" y="4070469"/>
             <a:ext cx="443906" cy="860189"/>
           </a:xfrm>
           <a:prstGeom prst="bentConnector3">
@@ -26521,7 +26521,7 @@
         </p:nvCxnSpPr>
         <p:spPr>
           <a:xfrm rot="16200000" flipH="1">
-            <a:off x="11387683" y="3554656"/>
+            <a:off x="8403862" y="3554656"/>
             <a:ext cx="1472991" cy="871073"/>
           </a:xfrm>
           <a:prstGeom prst="bentConnector3">
@@ -26658,7 +26658,7 @@
         </p:nvCxnSpPr>
         <p:spPr>
           <a:xfrm rot="5400000">
-            <a:off x="23663203" y="3000450"/>
+            <a:off x="20679382" y="3000450"/>
             <a:ext cx="368327" cy="903576"/>
           </a:xfrm>
           <a:prstGeom prst="bentConnector3">
@@ -26704,7 +26704,7 @@
         </p:nvCxnSpPr>
         <p:spPr>
           <a:xfrm rot="16200000" flipH="1">
-            <a:off x="21925798" y="2166622"/>
+            <a:off x="18941977" y="2166622"/>
             <a:ext cx="374012" cy="2565548"/>
           </a:xfrm>
           <a:prstGeom prst="bentConnector3">
@@ -26746,7 +26746,7 @@
         </p:nvSpPr>
         <p:spPr>
           <a:xfrm>
-            <a:off x="19402599" y="4741620"/>
+            <a:off x="16418778" y="4741620"/>
             <a:ext cx="1144480" cy="639015"/>
           </a:xfrm>
           <a:prstGeom prst="rect">
@@ -26804,7 +26804,7 @@
         </p:nvSpPr>
         <p:spPr>
           <a:xfrm>
-            <a:off x="20254790" y="5753447"/>
+            <a:off x="17270969" y="5753447"/>
             <a:ext cx="1144480" cy="639015"/>
           </a:xfrm>
           <a:prstGeom prst="rect">
@@ -26853,7 +26853,7 @@
         </p:nvSpPr>
         <p:spPr>
           <a:xfrm>
-            <a:off x="20251871" y="6747431"/>
+            <a:off x="17268050" y="6747431"/>
             <a:ext cx="1144480" cy="639015"/>
           </a:xfrm>
           <a:prstGeom prst="rect">
@@ -26902,7 +26902,7 @@
         </p:nvSpPr>
         <p:spPr>
           <a:xfrm>
-            <a:off x="21108516" y="7703678"/>
+            <a:off x="18124695" y="7703678"/>
             <a:ext cx="1144480" cy="639015"/>
           </a:xfrm>
           <a:prstGeom prst="rect">
@@ -26955,7 +26955,7 @@
         </p:nvSpPr>
         <p:spPr>
           <a:xfrm>
-            <a:off x="19402599" y="7711635"/>
+            <a:off x="16418778" y="7711635"/>
             <a:ext cx="1144480" cy="639015"/>
           </a:xfrm>
           <a:prstGeom prst="rect">
@@ -27004,7 +27004,7 @@
         </p:nvSpPr>
         <p:spPr>
           <a:xfrm>
-            <a:off x="21962241" y="6747431"/>
+            <a:off x="18978420" y="6747431"/>
             <a:ext cx="1144480" cy="639015"/>
           </a:xfrm>
           <a:prstGeom prst="rect">
@@ -27053,7 +27053,7 @@
         </p:nvSpPr>
         <p:spPr>
           <a:xfrm>
-            <a:off x="18546231" y="6747431"/>
+            <a:off x="15562410" y="6747431"/>
             <a:ext cx="1144480" cy="639015"/>
           </a:xfrm>
           <a:prstGeom prst="rect">
@@ -27106,7 +27106,7 @@
         </p:nvCxnSpPr>
         <p:spPr>
           <a:xfrm rot="5400000">
-            <a:off x="19795267" y="5715667"/>
+            <a:off x="16811446" y="5715667"/>
             <a:ext cx="354969" cy="1708559"/>
           </a:xfrm>
           <a:prstGeom prst="bentConnector3">
@@ -27151,7 +27151,7 @@
         </p:nvCxnSpPr>
         <p:spPr>
           <a:xfrm rot="16200000" flipH="1">
-            <a:off x="21503271" y="5716220"/>
+            <a:off x="18519450" y="5716220"/>
             <a:ext cx="354969" cy="1707451"/>
           </a:xfrm>
           <a:prstGeom prst="bentConnector3">
@@ -27196,7 +27196,7 @@
         </p:nvCxnSpPr>
         <p:spPr>
           <a:xfrm rot="5400000">
-            <a:off x="19741349" y="6625953"/>
+            <a:off x="16757528" y="6625953"/>
             <a:ext cx="1319173" cy="852191"/>
           </a:xfrm>
           <a:prstGeom prst="bentConnector3">
@@ -27241,7 +27241,7 @@
         </p:nvCxnSpPr>
         <p:spPr>
           <a:xfrm flipH="1">
-            <a:off x="20824111" y="6392462"/>
+            <a:off x="17840290" y="6392462"/>
             <a:ext cx="2919" cy="354969"/>
           </a:xfrm>
           <a:prstGeom prst="straightConnector1">
@@ -27280,7 +27280,7 @@
         </p:nvSpPr>
         <p:spPr>
           <a:xfrm>
-            <a:off x="20249159" y="9806492"/>
+            <a:off x="17265338" y="9806492"/>
             <a:ext cx="1144480" cy="639015"/>
           </a:xfrm>
           <a:prstGeom prst="rect">
@@ -27337,7 +27337,7 @@
         </p:nvCxnSpPr>
         <p:spPr>
           <a:xfrm rot="5400000">
-            <a:off x="21949003" y="7118200"/>
+            <a:off x="18965182" y="7118200"/>
             <a:ext cx="317232" cy="853725"/>
           </a:xfrm>
           <a:prstGeom prst="bentConnector3">
@@ -27383,7 +27383,7 @@
         </p:nvCxnSpPr>
         <p:spPr>
           <a:xfrm rot="16200000" flipH="1">
-            <a:off x="21093817" y="7116739"/>
+            <a:off x="18109996" y="7116739"/>
             <a:ext cx="317232" cy="856645"/>
           </a:xfrm>
           <a:prstGeom prst="bentConnector3">
@@ -27425,7 +27425,7 @@
         </p:nvSpPr>
         <p:spPr>
           <a:xfrm>
-            <a:off x="20251870" y="8748757"/>
+            <a:off x="17268049" y="8748757"/>
             <a:ext cx="1144480" cy="639015"/>
           </a:xfrm>
           <a:prstGeom prst="rect">
@@ -27490,7 +27490,7 @@
         </p:nvCxnSpPr>
         <p:spPr>
           <a:xfrm flipH="1">
-            <a:off x="20821399" y="9387772"/>
+            <a:off x="17837578" y="9387772"/>
             <a:ext cx="2711" cy="418720"/>
           </a:xfrm>
           <a:prstGeom prst="straightConnector1">
@@ -27533,7 +27533,7 @@
         </p:nvCxnSpPr>
         <p:spPr>
           <a:xfrm rot="5400000">
-            <a:off x="21049401" y="8117402"/>
+            <a:off x="18065580" y="8117402"/>
             <a:ext cx="406064" cy="856646"/>
           </a:xfrm>
           <a:prstGeom prst="bentConnector3">
@@ -27579,7 +27579,7 @@
         </p:nvCxnSpPr>
         <p:spPr>
           <a:xfrm flipH="1">
-            <a:off x="20824110" y="7386446"/>
+            <a:off x="17840289" y="7386446"/>
             <a:ext cx="1" cy="1362311"/>
           </a:xfrm>
           <a:prstGeom prst="straightConnector1">
@@ -27619,7 +27619,7 @@
         </p:nvSpPr>
         <p:spPr>
           <a:xfrm>
-            <a:off x="21968589" y="8748757"/>
+            <a:off x="18984768" y="8748757"/>
             <a:ext cx="1144480" cy="639015"/>
           </a:xfrm>
           <a:prstGeom prst="rect">
@@ -27676,7 +27676,7 @@
         </p:nvCxnSpPr>
         <p:spPr>
           <a:xfrm rot="16200000" flipH="1">
-            <a:off x="21907760" y="8115688"/>
+            <a:off x="18923939" y="8115688"/>
             <a:ext cx="406064" cy="860073"/>
           </a:xfrm>
           <a:prstGeom prst="bentConnector3">
@@ -27722,7 +27722,7 @@
         </p:nvCxnSpPr>
         <p:spPr>
           <a:xfrm rot="16200000" flipH="1">
-            <a:off x="21001315" y="7209242"/>
+            <a:off x="18017494" y="7209242"/>
             <a:ext cx="1362311" cy="1716718"/>
           </a:xfrm>
           <a:prstGeom prst="bentConnector3">
@@ -27768,7 +27768,7 @@
         </p:nvCxnSpPr>
         <p:spPr>
           <a:xfrm rot="5400000">
-            <a:off x="11934920" y="5119427"/>
+            <a:off x="8951099" y="5119427"/>
             <a:ext cx="378518" cy="871073"/>
           </a:xfrm>
           <a:prstGeom prst="bentConnector3">
@@ -27814,7 +27814,7 @@
         </p:nvCxnSpPr>
         <p:spPr>
           <a:xfrm rot="16200000" flipH="1">
-            <a:off x="11079387" y="5134967"/>
+            <a:off x="8095566" y="5134967"/>
             <a:ext cx="382692" cy="835817"/>
           </a:xfrm>
           <a:prstGeom prst="bentConnector3">
@@ -27856,7 +27856,7 @@
         </p:nvSpPr>
         <p:spPr>
           <a:xfrm>
-            <a:off x="7043919" y="2619179"/>
+            <a:off x="4060098" y="2619179"/>
             <a:ext cx="1156124" cy="645064"/>
           </a:xfrm>
           <a:prstGeom prst="rect">
@@ -27912,7 +27912,7 @@
         </p:nvCxnSpPr>
         <p:spPr>
           <a:xfrm rot="16200000" flipH="1">
-            <a:off x="8668286" y="1995687"/>
+            <a:off x="5684465" y="1995687"/>
             <a:ext cx="406713" cy="836295"/>
           </a:xfrm>
           <a:prstGeom prst="bentConnector3">
@@ -27957,7 +27957,7 @@
         </p:nvCxnSpPr>
         <p:spPr>
           <a:xfrm rot="5400000">
-            <a:off x="7833388" y="1999072"/>
+            <a:off x="4849567" y="1999072"/>
             <a:ext cx="408700" cy="831514"/>
           </a:xfrm>
           <a:prstGeom prst="bentConnector3">
@@ -28002,7 +28002,7 @@
         </p:nvCxnSpPr>
         <p:spPr>
           <a:xfrm>
-            <a:off x="8448099" y="1179654"/>
+            <a:off x="5464278" y="1179654"/>
             <a:ext cx="5396" cy="387013"/>
           </a:xfrm>
           <a:prstGeom prst="straightConnector1">
@@ -28045,7 +28045,7 @@
         </p:nvCxnSpPr>
         <p:spPr>
           <a:xfrm rot="5400000">
-            <a:off x="7022758" y="132801"/>
+            <a:off x="4038937" y="132801"/>
             <a:ext cx="378488" cy="2472194"/>
           </a:xfrm>
           <a:prstGeom prst="bentConnector3">
@@ -28090,7 +28090,7 @@
         </p:nvCxnSpPr>
         <p:spPr>
           <a:xfrm rot="5400000">
-            <a:off x="6263247" y="-633404"/>
+            <a:off x="3279426" y="-633404"/>
             <a:ext cx="371795" cy="3997911"/>
           </a:xfrm>
           <a:prstGeom prst="bentConnector3">
@@ -28135,7 +28135,7 @@
         </p:nvCxnSpPr>
         <p:spPr>
           <a:xfrm rot="16200000" flipH="1">
-            <a:off x="5777114" y="2401997"/>
+            <a:off x="2793293" y="2401997"/>
             <a:ext cx="414979" cy="17396"/>
           </a:xfrm>
           <a:prstGeom prst="bentConnector3">
@@ -28181,7 +28181,7 @@
         </p:nvCxnSpPr>
         <p:spPr>
           <a:xfrm rot="16200000" flipH="1">
-            <a:off x="5676870" y="2502240"/>
+            <a:off x="2693049" y="2502240"/>
             <a:ext cx="1427087" cy="829017"/>
           </a:xfrm>
           <a:prstGeom prst="bentConnector3">
@@ -28227,7 +28227,7 @@
         </p:nvCxnSpPr>
         <p:spPr>
           <a:xfrm rot="5400000">
-            <a:off x="4887237" y="2538672"/>
+            <a:off x="1903416" y="2538672"/>
             <a:ext cx="1424134" cy="753203"/>
           </a:xfrm>
           <a:prstGeom prst="bentConnector3">
@@ -28273,7 +28273,7 @@
         </p:nvCxnSpPr>
         <p:spPr>
           <a:xfrm>
-            <a:off x="5993301" y="3263249"/>
+            <a:off x="3009480" y="3263249"/>
             <a:ext cx="2331" cy="1472386"/>
           </a:xfrm>
           <a:prstGeom prst="straightConnector1">
@@ -28316,7 +28316,7 @@
         </p:nvCxnSpPr>
         <p:spPr>
           <a:xfrm rot="16200000" flipH="1">
-            <a:off x="6992641" y="4087637"/>
+            <a:off x="4008820" y="4087637"/>
             <a:ext cx="446613" cy="822051"/>
           </a:xfrm>
           <a:prstGeom prst="bentConnector3">
@@ -28357,7 +28357,7 @@
         </p:nvSpPr>
         <p:spPr>
           <a:xfrm>
-            <a:off x="3872126" y="4733788"/>
+            <a:off x="888305" y="4733788"/>
             <a:ext cx="1156124" cy="645064"/>
           </a:xfrm>
           <a:prstGeom prst="rect">
@@ -28413,7 +28413,7 @@
         </p:nvCxnSpPr>
         <p:spPr>
           <a:xfrm rot="5400000">
-            <a:off x="3871316" y="3060757"/>
+            <a:off x="887495" y="3060757"/>
             <a:ext cx="365771" cy="786454"/>
           </a:xfrm>
           <a:prstGeom prst="bentConnector3">
@@ -28454,7 +28454,7 @@
         </p:nvSpPr>
         <p:spPr>
           <a:xfrm>
-            <a:off x="12668893" y="2610029"/>
+            <a:off x="9685072" y="2610029"/>
             <a:ext cx="1156124" cy="645064"/>
           </a:xfrm>
           <a:prstGeom prst="rect">
@@ -28510,7 +28510,7 @@
         </p:nvCxnSpPr>
         <p:spPr>
           <a:xfrm rot="5400000">
-            <a:off x="13845916" y="1597554"/>
+            <a:off x="10862095" y="1597554"/>
             <a:ext cx="413515" cy="1611435"/>
           </a:xfrm>
           <a:prstGeom prst="bentConnector3">
@@ -28556,7 +28556,7 @@
         </p:nvCxnSpPr>
         <p:spPr>
           <a:xfrm rot="16200000" flipH="1">
-            <a:off x="11450173" y="813246"/>
+            <a:off x="8466352" y="813246"/>
             <a:ext cx="397567" cy="3195997"/>
           </a:xfrm>
           <a:prstGeom prst="bentConnector3">
@@ -28602,7 +28602,7 @@
         </p:nvCxnSpPr>
         <p:spPr>
           <a:xfrm rot="16200000" flipH="1">
-            <a:off x="7854770" y="3031454"/>
+            <a:off x="4870949" y="3031454"/>
             <a:ext cx="366577" cy="832154"/>
           </a:xfrm>
           <a:prstGeom prst="bentConnector3">
@@ -28647,7 +28647,7 @@
         </p:nvCxnSpPr>
         <p:spPr>
           <a:xfrm>
-            <a:off x="8464511" y="7384787"/>
+            <a:off x="5480690" y="7384787"/>
             <a:ext cx="372" cy="355806"/>
           </a:xfrm>
           <a:prstGeom prst="straightConnector1">
@@ -28690,7 +28690,7 @@
         </p:nvCxnSpPr>
         <p:spPr>
           <a:xfrm rot="16200000" flipH="1">
-            <a:off x="9072852" y="5769324"/>
+            <a:off x="6089031" y="5769324"/>
             <a:ext cx="369764" cy="1586447"/>
           </a:xfrm>
           <a:prstGeom prst="bentConnector3">
@@ -28731,7 +28731,7 @@
         </p:nvSpPr>
         <p:spPr>
           <a:xfrm>
-            <a:off x="6226860" y="6739723"/>
+            <a:off x="3243039" y="6739723"/>
             <a:ext cx="1156124" cy="645064"/>
           </a:xfrm>
           <a:prstGeom prst="rect">
@@ -28783,7 +28783,7 @@
         </p:nvSpPr>
         <p:spPr>
           <a:xfrm>
-            <a:off x="6226655" y="7743186"/>
+            <a:off x="3242834" y="7743186"/>
             <a:ext cx="1156124" cy="645064"/>
           </a:xfrm>
           <a:prstGeom prst="rect">
@@ -28839,7 +28839,7 @@
         </p:nvCxnSpPr>
         <p:spPr>
           <a:xfrm rot="5400000">
-            <a:off x="7453689" y="5728900"/>
+            <a:off x="4469868" y="5728900"/>
             <a:ext cx="362057" cy="1659589"/>
           </a:xfrm>
           <a:prstGeom prst="bentConnector3">
@@ -28884,7 +28884,7 @@
         </p:nvCxnSpPr>
         <p:spPr>
           <a:xfrm flipH="1">
-            <a:off x="6804717" y="7384787"/>
+            <a:off x="3820896" y="7384787"/>
             <a:ext cx="205" cy="358399"/>
           </a:xfrm>
           <a:prstGeom prst="straightConnector1">
@@ -28923,7 +28923,7 @@
         </p:nvSpPr>
         <p:spPr>
           <a:xfrm>
-            <a:off x="9472896" y="7739720"/>
+            <a:off x="6489075" y="7739720"/>
             <a:ext cx="1156124" cy="645064"/>
           </a:xfrm>
           <a:prstGeom prst="rect">
@@ -28979,7 +28979,7 @@
         </p:nvCxnSpPr>
         <p:spPr>
           <a:xfrm>
-            <a:off x="10050958" y="7392494"/>
+            <a:off x="7067137" y="7392494"/>
             <a:ext cx="0" cy="347226"/>
           </a:xfrm>
           <a:prstGeom prst="straightConnector1">
@@ -29018,7 +29018,7 @@
         </p:nvSpPr>
         <p:spPr>
           <a:xfrm>
-            <a:off x="8692732" y="8809829"/>
+            <a:off x="5708911" y="8809829"/>
             <a:ext cx="1156124" cy="645064"/>
           </a:xfrm>
           <a:prstGeom prst="rect">
@@ -29070,7 +29070,7 @@
         </p:nvSpPr>
         <p:spPr>
           <a:xfrm>
-            <a:off x="7046775" y="8809829"/>
+            <a:off x="4062954" y="8809829"/>
             <a:ext cx="1156124" cy="645064"/>
           </a:xfrm>
           <a:prstGeom prst="rect">
@@ -29126,7 +29126,7 @@
         </p:nvCxnSpPr>
         <p:spPr>
           <a:xfrm rot="5400000">
-            <a:off x="9448354" y="8207224"/>
+            <a:off x="6464533" y="8207224"/>
             <a:ext cx="425045" cy="780164"/>
           </a:xfrm>
           <a:prstGeom prst="bentConnector3">
@@ -29171,7 +29171,7 @@
         </p:nvCxnSpPr>
         <p:spPr>
           <a:xfrm rot="16200000" flipH="1">
-            <a:off x="8655752" y="8194787"/>
+            <a:off x="5671931" y="8194787"/>
             <a:ext cx="424172" cy="805911"/>
           </a:xfrm>
           <a:prstGeom prst="bentConnector3">
@@ -29216,7 +29216,7 @@
         </p:nvCxnSpPr>
         <p:spPr>
           <a:xfrm rot="5400000">
-            <a:off x="7832774" y="8177720"/>
+            <a:off x="4848953" y="8177720"/>
             <a:ext cx="424172" cy="840046"/>
           </a:xfrm>
           <a:prstGeom prst="bentConnector3">
@@ -29261,7 +29261,7 @@
         </p:nvCxnSpPr>
         <p:spPr>
           <a:xfrm rot="16200000" flipH="1">
-            <a:off x="7003988" y="8188979"/>
+            <a:off x="4020167" y="8188979"/>
             <a:ext cx="421579" cy="820120"/>
           </a:xfrm>
           <a:prstGeom prst="bentConnector3">
@@ -29302,7 +29302,7 @@
         </p:nvSpPr>
         <p:spPr>
           <a:xfrm>
-            <a:off x="7865215" y="9797238"/>
+            <a:off x="4881394" y="9797238"/>
             <a:ext cx="1156124" cy="645064"/>
           </a:xfrm>
           <a:prstGeom prst="rect">
@@ -29358,7 +29358,7 @@
         </p:nvCxnSpPr>
         <p:spPr>
           <a:xfrm rot="16200000" flipH="1">
-            <a:off x="7862885" y="9216845"/>
+            <a:off x="4879064" y="9216845"/>
             <a:ext cx="342345" cy="818440"/>
           </a:xfrm>
           <a:prstGeom prst="bentConnector3">
@@ -29403,7 +29403,7 @@
         </p:nvCxnSpPr>
         <p:spPr>
           <a:xfrm rot="5400000">
-            <a:off x="8685864" y="9212307"/>
+            <a:off x="5702043" y="9212307"/>
             <a:ext cx="342345" cy="827517"/>
           </a:xfrm>
           <a:prstGeom prst="bentConnector3">
@@ -29444,7 +29444,7 @@
         </p:nvSpPr>
         <p:spPr>
           <a:xfrm>
-            <a:off x="4649277" y="5736764"/>
+            <a:off x="1665456" y="5736764"/>
             <a:ext cx="1156124" cy="645064"/>
           </a:xfrm>
           <a:prstGeom prst="rect">
@@ -29504,7 +29504,7 @@
         </p:nvCxnSpPr>
         <p:spPr>
           <a:xfrm rot="5400000">
-            <a:off x="5433454" y="5174585"/>
+            <a:off x="2449633" y="5174585"/>
             <a:ext cx="356065" cy="768293"/>
           </a:xfrm>
           <a:prstGeom prst="bentConnector3">
@@ -29545,7 +29545,7 @@
         </p:nvSpPr>
         <p:spPr>
           <a:xfrm>
-            <a:off x="4641523" y="6747430"/>
+            <a:off x="1657702" y="6747430"/>
             <a:ext cx="1156124" cy="645064"/>
           </a:xfrm>
           <a:prstGeom prst="rect">
@@ -29601,7 +29601,7 @@
         </p:nvCxnSpPr>
         <p:spPr>
           <a:xfrm flipH="1">
-            <a:off x="5219585" y="6381828"/>
+            <a:off x="2235764" y="6381828"/>
             <a:ext cx="7754" cy="365602"/>
           </a:xfrm>
           <a:prstGeom prst="straightConnector1">
@@ -29640,7 +29640,7 @@
         </p:nvSpPr>
         <p:spPr>
           <a:xfrm>
-            <a:off x="25885097" y="7678741"/>
+            <a:off x="24850479" y="1671346"/>
             <a:ext cx="1144480" cy="639015"/>
           </a:xfrm>
           <a:prstGeom prst="rect">
@@ -29692,7 +29692,7 @@
         </p:nvSpPr>
         <p:spPr>
           <a:xfrm>
-            <a:off x="25887880" y="8744655"/>
+            <a:off x="24853262" y="2737260"/>
             <a:ext cx="1144480" cy="639015"/>
           </a:xfrm>
           <a:prstGeom prst="rect">
@@ -29768,7 +29768,7 @@
         </p:nvCxnSpPr>
         <p:spPr>
           <a:xfrm rot="5400000">
-            <a:off x="15958597" y="6159927"/>
+            <a:off x="12974776" y="6159927"/>
             <a:ext cx="345943" cy="831017"/>
           </a:xfrm>
           <a:prstGeom prst="bentConnector3">
@@ -29813,7 +29813,7 @@
         </p:nvCxnSpPr>
         <p:spPr>
           <a:xfrm rot="16200000" flipH="1">
-            <a:off x="16786056" y="6163484"/>
+            <a:off x="13802235" y="6163484"/>
             <a:ext cx="345943" cy="823902"/>
           </a:xfrm>
           <a:prstGeom prst="bentConnector3">
@@ -29858,7 +29858,7 @@
         </p:nvCxnSpPr>
         <p:spPr>
           <a:xfrm>
-            <a:off x="16544574" y="5361531"/>
+            <a:off x="13560753" y="5361531"/>
             <a:ext cx="2502" cy="401918"/>
           </a:xfrm>
           <a:prstGeom prst="straightConnector1">

--- a/Наработки/диздоки/ЮАС/ЮАС общая.pptx
+++ b/Наработки/диздоки/ЮАС/ЮАС общая.pptx
@@ -209,7 +209,7 @@
             <a:fld id="{33E3D7F9-E251-484C-A6FF-FA958879DF69}" type="datetimeFigureOut">
               <a:rPr lang="ru-RU" smtClean="0"/>
               <a:pPr/>
-              <a:t>10.02.2026</a:t>
+              <a:t>03.03.2026</a:t>
             </a:fld>
             <a:endParaRPr lang="ru-RU"/>
           </a:p>
@@ -699,7 +699,7 @@
             <a:fld id="{85A5DE44-605B-4D3B-B2B7-94543DF81A36}" type="datetimeFigureOut">
               <a:rPr lang="ru-RU" smtClean="0"/>
               <a:pPr/>
-              <a:t>10.02.2026</a:t>
+              <a:t>03.03.2026</a:t>
             </a:fld>
             <a:endParaRPr lang="ru-RU"/>
           </a:p>
@@ -871,7 +871,7 @@
             <a:fld id="{85A5DE44-605B-4D3B-B2B7-94543DF81A36}" type="datetimeFigureOut">
               <a:rPr lang="ru-RU" smtClean="0"/>
               <a:pPr/>
-              <a:t>10.02.2026</a:t>
+              <a:t>03.03.2026</a:t>
             </a:fld>
             <a:endParaRPr lang="ru-RU"/>
           </a:p>
@@ -1053,7 +1053,7 @@
             <a:fld id="{85A5DE44-605B-4D3B-B2B7-94543DF81A36}" type="datetimeFigureOut">
               <a:rPr lang="ru-RU" smtClean="0"/>
               <a:pPr/>
-              <a:t>10.02.2026</a:t>
+              <a:t>03.03.2026</a:t>
             </a:fld>
             <a:endParaRPr lang="ru-RU"/>
           </a:p>
@@ -1225,7 +1225,7 @@
             <a:fld id="{85A5DE44-605B-4D3B-B2B7-94543DF81A36}" type="datetimeFigureOut">
               <a:rPr lang="ru-RU" smtClean="0"/>
               <a:pPr/>
-              <a:t>10.02.2026</a:t>
+              <a:t>03.03.2026</a:t>
             </a:fld>
             <a:endParaRPr lang="ru-RU"/>
           </a:p>
@@ -1473,7 +1473,7 @@
             <a:fld id="{85A5DE44-605B-4D3B-B2B7-94543DF81A36}" type="datetimeFigureOut">
               <a:rPr lang="ru-RU" smtClean="0"/>
               <a:pPr/>
-              <a:t>10.02.2026</a:t>
+              <a:t>03.03.2026</a:t>
             </a:fld>
             <a:endParaRPr lang="ru-RU"/>
           </a:p>
@@ -1707,7 +1707,7 @@
             <a:fld id="{85A5DE44-605B-4D3B-B2B7-94543DF81A36}" type="datetimeFigureOut">
               <a:rPr lang="ru-RU" smtClean="0"/>
               <a:pPr/>
-              <a:t>10.02.2026</a:t>
+              <a:t>03.03.2026</a:t>
             </a:fld>
             <a:endParaRPr lang="ru-RU"/>
           </a:p>
@@ -2076,7 +2076,7 @@
             <a:fld id="{85A5DE44-605B-4D3B-B2B7-94543DF81A36}" type="datetimeFigureOut">
               <a:rPr lang="ru-RU" smtClean="0"/>
               <a:pPr/>
-              <a:t>10.02.2026</a:t>
+              <a:t>03.03.2026</a:t>
             </a:fld>
             <a:endParaRPr lang="ru-RU"/>
           </a:p>
@@ -2196,7 +2196,7 @@
             <a:fld id="{85A5DE44-605B-4D3B-B2B7-94543DF81A36}" type="datetimeFigureOut">
               <a:rPr lang="ru-RU" smtClean="0"/>
               <a:pPr/>
-              <a:t>10.02.2026</a:t>
+              <a:t>03.03.2026</a:t>
             </a:fld>
             <a:endParaRPr lang="ru-RU"/>
           </a:p>
@@ -2293,7 +2293,7 @@
             <a:fld id="{85A5DE44-605B-4D3B-B2B7-94543DF81A36}" type="datetimeFigureOut">
               <a:rPr lang="ru-RU" smtClean="0"/>
               <a:pPr/>
-              <a:t>10.02.2026</a:t>
+              <a:t>03.03.2026</a:t>
             </a:fld>
             <a:endParaRPr lang="ru-RU"/>
           </a:p>
@@ -2572,7 +2572,7 @@
             <a:fld id="{85A5DE44-605B-4D3B-B2B7-94543DF81A36}" type="datetimeFigureOut">
               <a:rPr lang="ru-RU" smtClean="0"/>
               <a:pPr/>
-              <a:t>10.02.2026</a:t>
+              <a:t>03.03.2026</a:t>
             </a:fld>
             <a:endParaRPr lang="ru-RU"/>
           </a:p>
@@ -2831,7 +2831,7 @@
             <a:fld id="{85A5DE44-605B-4D3B-B2B7-94543DF81A36}" type="datetimeFigureOut">
               <a:rPr lang="ru-RU" smtClean="0"/>
               <a:pPr/>
-              <a:t>10.02.2026</a:t>
+              <a:t>03.03.2026</a:t>
             </a:fld>
             <a:endParaRPr lang="ru-RU"/>
           </a:p>
@@ -3046,7 +3046,7 @@
             <a:fld id="{85A5DE44-605B-4D3B-B2B7-94543DF81A36}" type="datetimeFigureOut">
               <a:rPr lang="ru-RU" smtClean="0"/>
               <a:pPr/>
-              <a:t>10.02.2026</a:t>
+              <a:t>03.03.2026</a:t>
             </a:fld>
             <a:endParaRPr lang="ru-RU"/>
           </a:p>
@@ -3520,7 +3520,7 @@
         <p:spPr>
           <a:xfrm flipV="1">
             <a:off x="13264604" y="12000276"/>
-            <a:ext cx="1963720" cy="14514"/>
+            <a:ext cx="1963720" cy="5805"/>
           </a:xfrm>
           <a:prstGeom prst="line">
             <a:avLst/>
@@ -6407,7 +6407,7 @@
         </p:nvSpPr>
         <p:spPr>
           <a:xfrm>
-            <a:off x="12120124" y="11695282"/>
+            <a:off x="12120124" y="11686573"/>
             <a:ext cx="1144480" cy="639015"/>
           </a:xfrm>
           <a:prstGeom prst="rect">
@@ -7111,8 +7111,8 @@
         </p:nvCxnSpPr>
         <p:spPr>
           <a:xfrm rot="5400000">
-            <a:off x="11784156" y="11712469"/>
-            <a:ext cx="286381" cy="1530037"/>
+            <a:off x="11779801" y="11708115"/>
+            <a:ext cx="295090" cy="1530037"/>
           </a:xfrm>
           <a:prstGeom prst="bentConnector3">
             <a:avLst>
@@ -7201,8 +7201,8 @@
         </p:nvCxnSpPr>
         <p:spPr>
           <a:xfrm rot="5400000">
-            <a:off x="12549174" y="12477487"/>
-            <a:ext cx="286381" cy="12700"/>
+            <a:off x="12544819" y="12473133"/>
+            <a:ext cx="295090" cy="12700"/>
           </a:xfrm>
           <a:prstGeom prst="bentConnector3">
             <a:avLst>
@@ -7291,8 +7291,8 @@
         </p:nvCxnSpPr>
         <p:spPr>
           <a:xfrm rot="16200000" flipH="1">
-            <a:off x="13329603" y="11697057"/>
-            <a:ext cx="287643" cy="1562121"/>
+            <a:off x="13325248" y="11692703"/>
+            <a:ext cx="296352" cy="1562121"/>
           </a:xfrm>
           <a:prstGeom prst="bentConnector3">
             <a:avLst>
@@ -25230,8 +25230,8 @@
         </p:nvCxnSpPr>
         <p:spPr>
           <a:xfrm rot="5400000">
-            <a:off x="13288791" y="10723238"/>
-            <a:ext cx="375618" cy="1568471"/>
+            <a:off x="13293146" y="10718883"/>
+            <a:ext cx="366909" cy="1568471"/>
           </a:xfrm>
           <a:prstGeom prst="bentConnector3">
             <a:avLst>
